--- a/docs/operational-guide.pptx
+++ b/docs/operational-guide.pptx
@@ -35,6 +35,10 @@
     <p:sldId id="283" r:id="rId34"/>
     <p:sldId id="284" r:id="rId35"/>
     <p:sldId id="285" r:id="rId36"/>
+    <p:sldId id="286" r:id="rId37"/>
+    <p:sldId id="287" r:id="rId38"/>
+    <p:sldId id="288" r:id="rId39"/>
+    <p:sldId id="289" r:id="rId40"/>
   </p:sldIdLst>
   <p:sldSz cx="12191695" cy="6858000" type="screen4x3"/>
   <p:notesSz cx="6858000" cy="9144000"/>
@@ -3217,7 +3221,7 @@
               </a:defRPr>
             </a:pPr>
             <a:r>
-              <a:t>next-procurement-poc  |  2026-03-26</a:t>
+              <a:t>next-procurement-poc  |  2026-03-28  v2</a:t>
             </a:r>
           </a:p>
         </p:txBody>
@@ -8363,7 +8367,7 @@
             <a:pPr>
               <a:defRPr sz="12000" b="1">
                 <a:solidFill>
-                  <a:srgbClr val="00D4FF"/>
+                  <a:srgbClr val="F59E0B"/>
                 </a:solidFill>
               </a:defRPr>
             </a:pPr>
@@ -8403,7 +8407,7 @@
               </a:defRPr>
             </a:pPr>
             <a:r>
-              <a:t>定期タスク</a:t>
+              <a:t>カード明細照合</a:t>
             </a:r>
           </a:p>
         </p:txBody>
@@ -8464,7 +8468,1360 @@
               </a:defRPr>
             </a:pPr>
             <a:r>
-              <a:t>オペレーションカレンダー</a:t>
+              <a:t>月次カード明細照合フロー</a:t>
+            </a:r>
+          </a:p>
+        </p:txBody>
+      </p:sp>
+      <p:sp>
+        <p:nvSpPr>
+          <p:cNvPr id="3" name="Rounded Rectangle 2"/>
+          <p:cNvSpPr/>
+          <p:nvPr/>
+        </p:nvSpPr>
+        <p:spPr>
+          <a:xfrm>
+            <a:off x="548640" y="1645920"/>
+            <a:ext cx="3474720" cy="1463040"/>
+          </a:xfrm>
+          <a:prstGeom prst="roundRect">
+            <a:avLst/>
+          </a:prstGeom>
+          <a:solidFill>
+            <a:srgbClr val="1E293B"/>
+          </a:solidFill>
+          <a:ln>
+            <a:noFill/>
+          </a:ln>
+        </p:spPr>
+        <p:style>
+          <a:lnRef idx="1">
+            <a:schemeClr val="accent1"/>
+          </a:lnRef>
+          <a:fillRef idx="3">
+            <a:schemeClr val="accent1"/>
+          </a:fillRef>
+          <a:effectRef idx="2">
+            <a:schemeClr val="accent1"/>
+          </a:effectRef>
+          <a:fontRef idx="minor">
+            <a:schemeClr val="lt1"/>
+          </a:fontRef>
+        </p:style>
+        <p:txBody>
+          <a:bodyPr rtlCol="0" anchor="ctr"/>
+          <a:lstStyle/>
+          <a:p>
+            <a:pPr algn="ctr"/>
+          </a:p>
+        </p:txBody>
+      </p:sp>
+      <p:sp>
+        <p:nvSpPr>
+          <p:cNvPr id="4" name="Rectangle 3"/>
+          <p:cNvSpPr/>
+          <p:nvPr/>
+        </p:nvSpPr>
+        <p:spPr>
+          <a:xfrm>
+            <a:off x="548640" y="1645920"/>
+            <a:ext cx="3474720" cy="38100"/>
+          </a:xfrm>
+          <a:prstGeom prst="rect">
+            <a:avLst/>
+          </a:prstGeom>
+          <a:solidFill>
+            <a:srgbClr val="00D4FF"/>
+          </a:solidFill>
+          <a:ln>
+            <a:noFill/>
+          </a:ln>
+        </p:spPr>
+        <p:style>
+          <a:lnRef idx="1">
+            <a:schemeClr val="accent1"/>
+          </a:lnRef>
+          <a:fillRef idx="3">
+            <a:schemeClr val="accent1"/>
+          </a:fillRef>
+          <a:effectRef idx="2">
+            <a:schemeClr val="accent1"/>
+          </a:effectRef>
+          <a:fontRef idx="minor">
+            <a:schemeClr val="lt1"/>
+          </a:fontRef>
+        </p:style>
+        <p:txBody>
+          <a:bodyPr rtlCol="0" anchor="ctr"/>
+          <a:lstStyle/>
+          <a:p>
+            <a:pPr algn="ctr"/>
+          </a:p>
+        </p:txBody>
+      </p:sp>
+      <p:sp>
+        <p:nvSpPr>
+          <p:cNvPr id="5" name="Oval 4"/>
+          <p:cNvSpPr/>
+          <p:nvPr/>
+        </p:nvSpPr>
+        <p:spPr>
+          <a:xfrm>
+            <a:off x="685800" y="1828800"/>
+            <a:ext cx="411480" cy="411480"/>
+          </a:xfrm>
+          <a:prstGeom prst="ellipse">
+            <a:avLst/>
+          </a:prstGeom>
+          <a:solidFill>
+            <a:srgbClr val="00D4FF"/>
+          </a:solidFill>
+          <a:ln>
+            <a:noFill/>
+          </a:ln>
+        </p:spPr>
+        <p:style>
+          <a:lnRef idx="1">
+            <a:schemeClr val="accent1"/>
+          </a:lnRef>
+          <a:fillRef idx="3">
+            <a:schemeClr val="accent1"/>
+          </a:fillRef>
+          <a:effectRef idx="2">
+            <a:schemeClr val="accent1"/>
+          </a:effectRef>
+          <a:fontRef idx="minor">
+            <a:schemeClr val="lt1"/>
+          </a:fontRef>
+        </p:style>
+        <p:txBody>
+          <a:bodyPr rtlCol="0" anchor="ctr"/>
+          <a:lstStyle/>
+          <a:p>
+            <a:pPr algn="ctr">
+              <a:defRPr sz="1600" b="1">
+                <a:solidFill>
+                  <a:srgbClr val="FFFFFF"/>
+                </a:solidFill>
+              </a:defRPr>
+            </a:pPr>
+            <a:r>
+              <a:t>1</a:t>
+            </a:r>
+          </a:p>
+        </p:txBody>
+      </p:sp>
+      <p:sp>
+        <p:nvSpPr>
+          <p:cNvPr id="6" name="TextBox 5"/>
+          <p:cNvSpPr txBox="1"/>
+          <p:nvPr/>
+        </p:nvSpPr>
+        <p:spPr>
+          <a:xfrm>
+            <a:off x="1188720" y="1783080"/>
+            <a:ext cx="2651760" cy="365760"/>
+          </a:xfrm>
+          <a:prstGeom prst="rect">
+            <a:avLst/>
+          </a:prstGeom>
+          <a:noFill/>
+        </p:spPr>
+        <p:txBody>
+          <a:bodyPr wrap="none">
+            <a:spAutoFit/>
+          </a:bodyPr>
+          <a:lstStyle/>
+          <a:p>
+            <a:pPr>
+              <a:defRPr sz="1600" b="1">
+                <a:solidFill>
+                  <a:srgbClr val="FFFFFF"/>
+                </a:solidFill>
+              </a:defRPr>
+            </a:pPr>
+            <a:r>
+              <a:t>CSV準備</a:t>
+            </a:r>
+          </a:p>
+        </p:txBody>
+      </p:sp>
+      <p:sp>
+        <p:nvSpPr>
+          <p:cNvPr id="7" name="TextBox 6"/>
+          <p:cNvSpPr txBox="1"/>
+          <p:nvPr/>
+        </p:nvSpPr>
+        <p:spPr>
+          <a:xfrm>
+            <a:off x="685800" y="2286000"/>
+            <a:ext cx="3200400" cy="777240"/>
+          </a:xfrm>
+          <a:prstGeom prst="rect">
+            <a:avLst/>
+          </a:prstGeom>
+          <a:noFill/>
+        </p:spPr>
+        <p:txBody>
+          <a:bodyPr wrap="square">
+            <a:spAutoFit/>
+          </a:bodyPr>
+          <a:lstStyle/>
+          <a:p>
+            <a:pPr>
+              <a:defRPr sz="1200">
+                <a:solidFill>
+                  <a:srgbClr val="94A3B8"/>
+                </a:solidFill>
+              </a:defRPr>
+            </a:pPr>
+            <a:r>
+              <a:t>MFビジネスカード管理画面</a:t>
+            </a:r>
+            <a:br/>
+            <a:r>
+              <a:t>から利用明細CSVを</a:t>
+            </a:r>
+            <a:br/>
+            <a:r>
+              <a:t>ダウンロード</a:t>
+            </a:r>
+          </a:p>
+        </p:txBody>
+      </p:sp>
+      <p:sp>
+        <p:nvSpPr>
+          <p:cNvPr id="8" name="Rounded Rectangle 7"/>
+          <p:cNvSpPr/>
+          <p:nvPr/>
+        </p:nvSpPr>
+        <p:spPr>
+          <a:xfrm>
+            <a:off x="4297680" y="1645920"/>
+            <a:ext cx="3474720" cy="1463040"/>
+          </a:xfrm>
+          <a:prstGeom prst="roundRect">
+            <a:avLst/>
+          </a:prstGeom>
+          <a:solidFill>
+            <a:srgbClr val="1E293B"/>
+          </a:solidFill>
+          <a:ln>
+            <a:noFill/>
+          </a:ln>
+        </p:spPr>
+        <p:style>
+          <a:lnRef idx="1">
+            <a:schemeClr val="accent1"/>
+          </a:lnRef>
+          <a:fillRef idx="3">
+            <a:schemeClr val="accent1"/>
+          </a:fillRef>
+          <a:effectRef idx="2">
+            <a:schemeClr val="accent1"/>
+          </a:effectRef>
+          <a:fontRef idx="minor">
+            <a:schemeClr val="lt1"/>
+          </a:fontRef>
+        </p:style>
+        <p:txBody>
+          <a:bodyPr rtlCol="0" anchor="ctr"/>
+          <a:lstStyle/>
+          <a:p>
+            <a:pPr algn="ctr"/>
+          </a:p>
+        </p:txBody>
+      </p:sp>
+      <p:sp>
+        <p:nvSpPr>
+          <p:cNvPr id="9" name="Rectangle 8"/>
+          <p:cNvSpPr/>
+          <p:nvPr/>
+        </p:nvSpPr>
+        <p:spPr>
+          <a:xfrm>
+            <a:off x="4297680" y="1645920"/>
+            <a:ext cx="3474720" cy="38100"/>
+          </a:xfrm>
+          <a:prstGeom prst="rect">
+            <a:avLst/>
+          </a:prstGeom>
+          <a:solidFill>
+            <a:srgbClr val="7C3AED"/>
+          </a:solidFill>
+          <a:ln>
+            <a:noFill/>
+          </a:ln>
+        </p:spPr>
+        <p:style>
+          <a:lnRef idx="1">
+            <a:schemeClr val="accent1"/>
+          </a:lnRef>
+          <a:fillRef idx="3">
+            <a:schemeClr val="accent1"/>
+          </a:fillRef>
+          <a:effectRef idx="2">
+            <a:schemeClr val="accent1"/>
+          </a:effectRef>
+          <a:fontRef idx="minor">
+            <a:schemeClr val="lt1"/>
+          </a:fontRef>
+        </p:style>
+        <p:txBody>
+          <a:bodyPr rtlCol="0" anchor="ctr"/>
+          <a:lstStyle/>
+          <a:p>
+            <a:pPr algn="ctr"/>
+          </a:p>
+        </p:txBody>
+      </p:sp>
+      <p:sp>
+        <p:nvSpPr>
+          <p:cNvPr id="10" name="Oval 9"/>
+          <p:cNvSpPr/>
+          <p:nvPr/>
+        </p:nvSpPr>
+        <p:spPr>
+          <a:xfrm>
+            <a:off x="4434840" y="1828800"/>
+            <a:ext cx="411480" cy="411480"/>
+          </a:xfrm>
+          <a:prstGeom prst="ellipse">
+            <a:avLst/>
+          </a:prstGeom>
+          <a:solidFill>
+            <a:srgbClr val="7C3AED"/>
+          </a:solidFill>
+          <a:ln>
+            <a:noFill/>
+          </a:ln>
+        </p:spPr>
+        <p:style>
+          <a:lnRef idx="1">
+            <a:schemeClr val="accent1"/>
+          </a:lnRef>
+          <a:fillRef idx="3">
+            <a:schemeClr val="accent1"/>
+          </a:fillRef>
+          <a:effectRef idx="2">
+            <a:schemeClr val="accent1"/>
+          </a:effectRef>
+          <a:fontRef idx="minor">
+            <a:schemeClr val="lt1"/>
+          </a:fontRef>
+        </p:style>
+        <p:txBody>
+          <a:bodyPr rtlCol="0" anchor="ctr"/>
+          <a:lstStyle/>
+          <a:p>
+            <a:pPr algn="ctr">
+              <a:defRPr sz="1600" b="1">
+                <a:solidFill>
+                  <a:srgbClr val="FFFFFF"/>
+                </a:solidFill>
+              </a:defRPr>
+            </a:pPr>
+            <a:r>
+              <a:t>2</a:t>
+            </a:r>
+          </a:p>
+        </p:txBody>
+      </p:sp>
+      <p:sp>
+        <p:nvSpPr>
+          <p:cNvPr id="11" name="TextBox 10"/>
+          <p:cNvSpPr txBox="1"/>
+          <p:nvPr/>
+        </p:nvSpPr>
+        <p:spPr>
+          <a:xfrm>
+            <a:off x="4937760" y="1783080"/>
+            <a:ext cx="2651760" cy="365760"/>
+          </a:xfrm>
+          <a:prstGeom prst="rect">
+            <a:avLst/>
+          </a:prstGeom>
+          <a:noFill/>
+        </p:spPr>
+        <p:txBody>
+          <a:bodyPr wrap="none">
+            <a:spAutoFit/>
+          </a:bodyPr>
+          <a:lstStyle/>
+          <a:p>
+            <a:pPr>
+              <a:defRPr sz="1600" b="1">
+                <a:solidFill>
+                  <a:srgbClr val="FFFFFF"/>
+                </a:solidFill>
+              </a:defRPr>
+            </a:pPr>
+            <a:r>
+              <a:t>照合UIにアップロード</a:t>
+            </a:r>
+          </a:p>
+        </p:txBody>
+      </p:sp>
+      <p:sp>
+        <p:nvSpPr>
+          <p:cNvPr id="12" name="TextBox 11"/>
+          <p:cNvSpPr txBox="1"/>
+          <p:nvPr/>
+        </p:nvSpPr>
+        <p:spPr>
+          <a:xfrm>
+            <a:off x="4434840" y="2286000"/>
+            <a:ext cx="3200400" cy="777240"/>
+          </a:xfrm>
+          <a:prstGeom prst="rect">
+            <a:avLst/>
+          </a:prstGeom>
+          <a:noFill/>
+        </p:spPr>
+        <p:txBody>
+          <a:bodyPr wrap="square">
+            <a:spAutoFit/>
+          </a:bodyPr>
+          <a:lstStyle/>
+          <a:p>
+            <a:pPr>
+              <a:defRPr sz="1200">
+                <a:solidFill>
+                  <a:srgbClr val="94A3B8"/>
+                </a:solidFill>
+              </a:defRPr>
+            </a:pPr>
+            <a:r>
+              <a:t>/admin/card-matching を開き</a:t>
+            </a:r>
+            <a:br/>
+            <a:r>
+              <a:t>月を選択してCSVを</a:t>
+            </a:r>
+            <a:br/>
+            <a:r>
+              <a:t>ドロップ</a:t>
+            </a:r>
+          </a:p>
+        </p:txBody>
+      </p:sp>
+      <p:sp>
+        <p:nvSpPr>
+          <p:cNvPr id="13" name="Rounded Rectangle 12"/>
+          <p:cNvSpPr/>
+          <p:nvPr/>
+        </p:nvSpPr>
+        <p:spPr>
+          <a:xfrm>
+            <a:off x="8046720" y="1645920"/>
+            <a:ext cx="3474720" cy="1463040"/>
+          </a:xfrm>
+          <a:prstGeom prst="roundRect">
+            <a:avLst/>
+          </a:prstGeom>
+          <a:solidFill>
+            <a:srgbClr val="1E293B"/>
+          </a:solidFill>
+          <a:ln>
+            <a:noFill/>
+          </a:ln>
+        </p:spPr>
+        <p:style>
+          <a:lnRef idx="1">
+            <a:schemeClr val="accent1"/>
+          </a:lnRef>
+          <a:fillRef idx="3">
+            <a:schemeClr val="accent1"/>
+          </a:fillRef>
+          <a:effectRef idx="2">
+            <a:schemeClr val="accent1"/>
+          </a:effectRef>
+          <a:fontRef idx="minor">
+            <a:schemeClr val="lt1"/>
+          </a:fontRef>
+        </p:style>
+        <p:txBody>
+          <a:bodyPr rtlCol="0" anchor="ctr"/>
+          <a:lstStyle/>
+          <a:p>
+            <a:pPr algn="ctr"/>
+          </a:p>
+        </p:txBody>
+      </p:sp>
+      <p:sp>
+        <p:nvSpPr>
+          <p:cNvPr id="14" name="Rectangle 13"/>
+          <p:cNvSpPr/>
+          <p:nvPr/>
+        </p:nvSpPr>
+        <p:spPr>
+          <a:xfrm>
+            <a:off x="8046720" y="1645920"/>
+            <a:ext cx="3474720" cy="38100"/>
+          </a:xfrm>
+          <a:prstGeom prst="rect">
+            <a:avLst/>
+          </a:prstGeom>
+          <a:solidFill>
+            <a:srgbClr val="EC4899"/>
+          </a:solidFill>
+          <a:ln>
+            <a:noFill/>
+          </a:ln>
+        </p:spPr>
+        <p:style>
+          <a:lnRef idx="1">
+            <a:schemeClr val="accent1"/>
+          </a:lnRef>
+          <a:fillRef idx="3">
+            <a:schemeClr val="accent1"/>
+          </a:fillRef>
+          <a:effectRef idx="2">
+            <a:schemeClr val="accent1"/>
+          </a:effectRef>
+          <a:fontRef idx="minor">
+            <a:schemeClr val="lt1"/>
+          </a:fontRef>
+        </p:style>
+        <p:txBody>
+          <a:bodyPr rtlCol="0" anchor="ctr"/>
+          <a:lstStyle/>
+          <a:p>
+            <a:pPr algn="ctr"/>
+          </a:p>
+        </p:txBody>
+      </p:sp>
+      <p:sp>
+        <p:nvSpPr>
+          <p:cNvPr id="15" name="Oval 14"/>
+          <p:cNvSpPr/>
+          <p:nvPr/>
+        </p:nvSpPr>
+        <p:spPr>
+          <a:xfrm>
+            <a:off x="8183880" y="1828800"/>
+            <a:ext cx="411480" cy="411480"/>
+          </a:xfrm>
+          <a:prstGeom prst="ellipse">
+            <a:avLst/>
+          </a:prstGeom>
+          <a:solidFill>
+            <a:srgbClr val="EC4899"/>
+          </a:solidFill>
+          <a:ln>
+            <a:noFill/>
+          </a:ln>
+        </p:spPr>
+        <p:style>
+          <a:lnRef idx="1">
+            <a:schemeClr val="accent1"/>
+          </a:lnRef>
+          <a:fillRef idx="3">
+            <a:schemeClr val="accent1"/>
+          </a:fillRef>
+          <a:effectRef idx="2">
+            <a:schemeClr val="accent1"/>
+          </a:effectRef>
+          <a:fontRef idx="minor">
+            <a:schemeClr val="lt1"/>
+          </a:fontRef>
+        </p:style>
+        <p:txBody>
+          <a:bodyPr rtlCol="0" anchor="ctr"/>
+          <a:lstStyle/>
+          <a:p>
+            <a:pPr algn="ctr">
+              <a:defRPr sz="1600" b="1">
+                <a:solidFill>
+                  <a:srgbClr val="FFFFFF"/>
+                </a:solidFill>
+              </a:defRPr>
+            </a:pPr>
+            <a:r>
+              <a:t>3</a:t>
+            </a:r>
+          </a:p>
+        </p:txBody>
+      </p:sp>
+      <p:sp>
+        <p:nvSpPr>
+          <p:cNvPr id="16" name="TextBox 15"/>
+          <p:cNvSpPr txBox="1"/>
+          <p:nvPr/>
+        </p:nvSpPr>
+        <p:spPr>
+          <a:xfrm>
+            <a:off x="8686800" y="1783080"/>
+            <a:ext cx="2651760" cy="365760"/>
+          </a:xfrm>
+          <a:prstGeom prst="rect">
+            <a:avLst/>
+          </a:prstGeom>
+          <a:noFill/>
+        </p:spPr>
+        <p:txBody>
+          <a:bodyPr wrap="none">
+            <a:spAutoFit/>
+          </a:bodyPr>
+          <a:lstStyle/>
+          <a:p>
+            <a:pPr>
+              <a:defRPr sz="1600" b="1">
+                <a:solidFill>
+                  <a:srgbClr val="FFFFFF"/>
+                </a:solidFill>
+              </a:defRPr>
+            </a:pPr>
+            <a:r>
+              <a:t>自動照合</a:t>
+            </a:r>
+          </a:p>
+        </p:txBody>
+      </p:sp>
+      <p:sp>
+        <p:nvSpPr>
+          <p:cNvPr id="17" name="TextBox 16"/>
+          <p:cNvSpPr txBox="1"/>
+          <p:nvPr/>
+        </p:nvSpPr>
+        <p:spPr>
+          <a:xfrm>
+            <a:off x="8183880" y="2286000"/>
+            <a:ext cx="3200400" cy="777240"/>
+          </a:xfrm>
+          <a:prstGeom prst="rect">
+            <a:avLst/>
+          </a:prstGeom>
+          <a:noFill/>
+        </p:spPr>
+        <p:txBody>
+          <a:bodyPr wrap="square">
+            <a:spAutoFit/>
+          </a:bodyPr>
+          <a:lstStyle/>
+          <a:p>
+            <a:pPr>
+              <a:defRPr sz="1200">
+                <a:solidFill>
+                  <a:srgbClr val="94A3B8"/>
+                </a:solidFill>
+              </a:defRPr>
+            </a:pPr>
+            <a:r>
+              <a:t>予測テーブル照合(Phase1)</a:t>
+            </a:r>
+            <a:br/>
+            <a:r>
+              <a:t>→ スコア照合(Phase2)</a:t>
+            </a:r>
+            <a:br/>
+            <a:r>
+              <a:t>→ 4区分に振り分け</a:t>
+            </a:r>
+          </a:p>
+        </p:txBody>
+      </p:sp>
+      <p:sp>
+        <p:nvSpPr>
+          <p:cNvPr id="18" name="Rounded Rectangle 17"/>
+          <p:cNvSpPr/>
+          <p:nvPr/>
+        </p:nvSpPr>
+        <p:spPr>
+          <a:xfrm>
+            <a:off x="548640" y="3383280"/>
+            <a:ext cx="3474720" cy="1463040"/>
+          </a:xfrm>
+          <a:prstGeom prst="roundRect">
+            <a:avLst/>
+          </a:prstGeom>
+          <a:solidFill>
+            <a:srgbClr val="1E293B"/>
+          </a:solidFill>
+          <a:ln>
+            <a:noFill/>
+          </a:ln>
+        </p:spPr>
+        <p:style>
+          <a:lnRef idx="1">
+            <a:schemeClr val="accent1"/>
+          </a:lnRef>
+          <a:fillRef idx="3">
+            <a:schemeClr val="accent1"/>
+          </a:fillRef>
+          <a:effectRef idx="2">
+            <a:schemeClr val="accent1"/>
+          </a:effectRef>
+          <a:fontRef idx="minor">
+            <a:schemeClr val="lt1"/>
+          </a:fontRef>
+        </p:style>
+        <p:txBody>
+          <a:bodyPr rtlCol="0" anchor="ctr"/>
+          <a:lstStyle/>
+          <a:p>
+            <a:pPr algn="ctr"/>
+          </a:p>
+        </p:txBody>
+      </p:sp>
+      <p:sp>
+        <p:nvSpPr>
+          <p:cNvPr id="19" name="Rectangle 18"/>
+          <p:cNvSpPr/>
+          <p:nvPr/>
+        </p:nvSpPr>
+        <p:spPr>
+          <a:xfrm>
+            <a:off x="548640" y="3383280"/>
+            <a:ext cx="3474720" cy="38100"/>
+          </a:xfrm>
+          <a:prstGeom prst="rect">
+            <a:avLst/>
+          </a:prstGeom>
+          <a:solidFill>
+            <a:srgbClr val="10B981"/>
+          </a:solidFill>
+          <a:ln>
+            <a:noFill/>
+          </a:ln>
+        </p:spPr>
+        <p:style>
+          <a:lnRef idx="1">
+            <a:schemeClr val="accent1"/>
+          </a:lnRef>
+          <a:fillRef idx="3">
+            <a:schemeClr val="accent1"/>
+          </a:fillRef>
+          <a:effectRef idx="2">
+            <a:schemeClr val="accent1"/>
+          </a:effectRef>
+          <a:fontRef idx="minor">
+            <a:schemeClr val="lt1"/>
+          </a:fontRef>
+        </p:style>
+        <p:txBody>
+          <a:bodyPr rtlCol="0" anchor="ctr"/>
+          <a:lstStyle/>
+          <a:p>
+            <a:pPr algn="ctr"/>
+          </a:p>
+        </p:txBody>
+      </p:sp>
+      <p:sp>
+        <p:nvSpPr>
+          <p:cNvPr id="20" name="Oval 19"/>
+          <p:cNvSpPr/>
+          <p:nvPr/>
+        </p:nvSpPr>
+        <p:spPr>
+          <a:xfrm>
+            <a:off x="685800" y="3566160"/>
+            <a:ext cx="411480" cy="411480"/>
+          </a:xfrm>
+          <a:prstGeom prst="ellipse">
+            <a:avLst/>
+          </a:prstGeom>
+          <a:solidFill>
+            <a:srgbClr val="10B981"/>
+          </a:solidFill>
+          <a:ln>
+            <a:noFill/>
+          </a:ln>
+        </p:spPr>
+        <p:style>
+          <a:lnRef idx="1">
+            <a:schemeClr val="accent1"/>
+          </a:lnRef>
+          <a:fillRef idx="3">
+            <a:schemeClr val="accent1"/>
+          </a:fillRef>
+          <a:effectRef idx="2">
+            <a:schemeClr val="accent1"/>
+          </a:effectRef>
+          <a:fontRef idx="minor">
+            <a:schemeClr val="lt1"/>
+          </a:fontRef>
+        </p:style>
+        <p:txBody>
+          <a:bodyPr rtlCol="0" anchor="ctr"/>
+          <a:lstStyle/>
+          <a:p>
+            <a:pPr algn="ctr">
+              <a:defRPr sz="1600" b="1">
+                <a:solidFill>
+                  <a:srgbClr val="FFFFFF"/>
+                </a:solidFill>
+              </a:defRPr>
+            </a:pPr>
+            <a:r>
+              <a:t>4</a:t>
+            </a:r>
+          </a:p>
+        </p:txBody>
+      </p:sp>
+      <p:sp>
+        <p:nvSpPr>
+          <p:cNvPr id="21" name="TextBox 20"/>
+          <p:cNvSpPr txBox="1"/>
+          <p:nvPr/>
+        </p:nvSpPr>
+        <p:spPr>
+          <a:xfrm>
+            <a:off x="1188720" y="3520440"/>
+            <a:ext cx="2651760" cy="365760"/>
+          </a:xfrm>
+          <a:prstGeom prst="rect">
+            <a:avLst/>
+          </a:prstGeom>
+          <a:noFill/>
+        </p:spPr>
+        <p:txBody>
+          <a:bodyPr wrap="none">
+            <a:spAutoFit/>
+          </a:bodyPr>
+          <a:lstStyle/>
+          <a:p>
+            <a:pPr>
+              <a:defRPr sz="1600" b="1">
+                <a:solidFill>
+                  <a:srgbClr val="FFFFFF"/>
+                </a:solidFill>
+              </a:defRPr>
+            </a:pPr>
+            <a:r>
+              <a:t>要確認の処理</a:t>
+            </a:r>
+          </a:p>
+        </p:txBody>
+      </p:sp>
+      <p:sp>
+        <p:nvSpPr>
+          <p:cNvPr id="22" name="TextBox 21"/>
+          <p:cNvSpPr txBox="1"/>
+          <p:nvPr/>
+        </p:nvSpPr>
+        <p:spPr>
+          <a:xfrm>
+            <a:off x="685800" y="4023360"/>
+            <a:ext cx="3200400" cy="777240"/>
+          </a:xfrm>
+          <a:prstGeom prst="rect">
+            <a:avLst/>
+          </a:prstGeom>
+          <a:noFill/>
+        </p:spPr>
+        <p:txBody>
+          <a:bodyPr wrap="square">
+            <a:spAutoFit/>
+          </a:bodyPr>
+          <a:lstStyle/>
+          <a:p>
+            <a:pPr>
+              <a:defRPr sz="1200">
+                <a:solidFill>
+                  <a:srgbClr val="94A3B8"/>
+                </a:solidFill>
+              </a:defRPr>
+            </a:pPr>
+            <a:r>
+              <a:t>差異タグを見て</a:t>
+            </a:r>
+            <a:br/>
+            <a:r>
+              <a:t>正しい明細を選択</a:t>
+            </a:r>
+            <a:br/>
+            <a:r>
+              <a:t>→ [これに確定]</a:t>
+            </a:r>
+          </a:p>
+        </p:txBody>
+      </p:sp>
+      <p:sp>
+        <p:nvSpPr>
+          <p:cNvPr id="23" name="Rounded Rectangle 22"/>
+          <p:cNvSpPr/>
+          <p:nvPr/>
+        </p:nvSpPr>
+        <p:spPr>
+          <a:xfrm>
+            <a:off x="4297680" y="3383280"/>
+            <a:ext cx="3474720" cy="1463040"/>
+          </a:xfrm>
+          <a:prstGeom prst="roundRect">
+            <a:avLst/>
+          </a:prstGeom>
+          <a:solidFill>
+            <a:srgbClr val="1E293B"/>
+          </a:solidFill>
+          <a:ln>
+            <a:noFill/>
+          </a:ln>
+        </p:spPr>
+        <p:style>
+          <a:lnRef idx="1">
+            <a:schemeClr val="accent1"/>
+          </a:lnRef>
+          <a:fillRef idx="3">
+            <a:schemeClr val="accent1"/>
+          </a:fillRef>
+          <a:effectRef idx="2">
+            <a:schemeClr val="accent1"/>
+          </a:effectRef>
+          <a:fontRef idx="minor">
+            <a:schemeClr val="lt1"/>
+          </a:fontRef>
+        </p:style>
+        <p:txBody>
+          <a:bodyPr rtlCol="0" anchor="ctr"/>
+          <a:lstStyle/>
+          <a:p>
+            <a:pPr algn="ctr"/>
+          </a:p>
+        </p:txBody>
+      </p:sp>
+      <p:sp>
+        <p:nvSpPr>
+          <p:cNvPr id="24" name="Rectangle 23"/>
+          <p:cNvSpPr/>
+          <p:nvPr/>
+        </p:nvSpPr>
+        <p:spPr>
+          <a:xfrm>
+            <a:off x="4297680" y="3383280"/>
+            <a:ext cx="3474720" cy="38100"/>
+          </a:xfrm>
+          <a:prstGeom prst="rect">
+            <a:avLst/>
+          </a:prstGeom>
+          <a:solidFill>
+            <a:srgbClr val="F59E0B"/>
+          </a:solidFill>
+          <a:ln>
+            <a:noFill/>
+          </a:ln>
+        </p:spPr>
+        <p:style>
+          <a:lnRef idx="1">
+            <a:schemeClr val="accent1"/>
+          </a:lnRef>
+          <a:fillRef idx="3">
+            <a:schemeClr val="accent1"/>
+          </a:fillRef>
+          <a:effectRef idx="2">
+            <a:schemeClr val="accent1"/>
+          </a:effectRef>
+          <a:fontRef idx="minor">
+            <a:schemeClr val="lt1"/>
+          </a:fontRef>
+        </p:style>
+        <p:txBody>
+          <a:bodyPr rtlCol="0" anchor="ctr"/>
+          <a:lstStyle/>
+          <a:p>
+            <a:pPr algn="ctr"/>
+          </a:p>
+        </p:txBody>
+      </p:sp>
+      <p:sp>
+        <p:nvSpPr>
+          <p:cNvPr id="25" name="Oval 24"/>
+          <p:cNvSpPr/>
+          <p:nvPr/>
+        </p:nvSpPr>
+        <p:spPr>
+          <a:xfrm>
+            <a:off x="4434840" y="3566160"/>
+            <a:ext cx="411480" cy="411480"/>
+          </a:xfrm>
+          <a:prstGeom prst="ellipse">
+            <a:avLst/>
+          </a:prstGeom>
+          <a:solidFill>
+            <a:srgbClr val="F59E0B"/>
+          </a:solidFill>
+          <a:ln>
+            <a:noFill/>
+          </a:ln>
+        </p:spPr>
+        <p:style>
+          <a:lnRef idx="1">
+            <a:schemeClr val="accent1"/>
+          </a:lnRef>
+          <a:fillRef idx="3">
+            <a:schemeClr val="accent1"/>
+          </a:fillRef>
+          <a:effectRef idx="2">
+            <a:schemeClr val="accent1"/>
+          </a:effectRef>
+          <a:fontRef idx="minor">
+            <a:schemeClr val="lt1"/>
+          </a:fontRef>
+        </p:style>
+        <p:txBody>
+          <a:bodyPr rtlCol="0" anchor="ctr"/>
+          <a:lstStyle/>
+          <a:p>
+            <a:pPr algn="ctr">
+              <a:defRPr sz="1600" b="1">
+                <a:solidFill>
+                  <a:srgbClr val="FFFFFF"/>
+                </a:solidFill>
+              </a:defRPr>
+            </a:pPr>
+            <a:r>
+              <a:t>5</a:t>
+            </a:r>
+          </a:p>
+        </p:txBody>
+      </p:sp>
+      <p:sp>
+        <p:nvSpPr>
+          <p:cNvPr id="26" name="TextBox 25"/>
+          <p:cNvSpPr txBox="1"/>
+          <p:nvPr/>
+        </p:nvSpPr>
+        <p:spPr>
+          <a:xfrm>
+            <a:off x="4937760" y="3520440"/>
+            <a:ext cx="2651760" cy="365760"/>
+          </a:xfrm>
+          <a:prstGeom prst="rect">
+            <a:avLst/>
+          </a:prstGeom>
+          <a:noFill/>
+        </p:spPr>
+        <p:txBody>
+          <a:bodyPr wrap="none">
+            <a:spAutoFit/>
+          </a:bodyPr>
+          <a:lstStyle/>
+          <a:p>
+            <a:pPr>
+              <a:defRPr sz="1600" b="1">
+                <a:solidFill>
+                  <a:srgbClr val="FFFFFF"/>
+                </a:solidFill>
+              </a:defRPr>
+            </a:pPr>
+            <a:r>
+              <a:t>未申請利用の対応</a:t>
+            </a:r>
+          </a:p>
+        </p:txBody>
+      </p:sp>
+      <p:sp>
+        <p:nvSpPr>
+          <p:cNvPr id="27" name="TextBox 26"/>
+          <p:cNvSpPr txBox="1"/>
+          <p:nvPr/>
+        </p:nvSpPr>
+        <p:spPr>
+          <a:xfrm>
+            <a:off x="4434840" y="4023360"/>
+            <a:ext cx="3200400" cy="777240"/>
+          </a:xfrm>
+          <a:prstGeom prst="rect">
+            <a:avLst/>
+          </a:prstGeom>
+          <a:noFill/>
+        </p:spPr>
+        <p:txBody>
+          <a:bodyPr wrap="square">
+            <a:spAutoFit/>
+          </a:bodyPr>
+          <a:lstStyle/>
+          <a:p>
+            <a:pPr>
+              <a:defRPr sz="1200">
+                <a:solidFill>
+                  <a:srgbClr val="94A3B8"/>
+                </a:solidFill>
+              </a:defRPr>
+            </a:pPr>
+            <a:r>
+              <a:t>本人に確認通知</a:t>
+            </a:r>
+            <a:br/>
+            <a:r>
+              <a:t>または経費として処理</a:t>
+            </a:r>
+          </a:p>
+        </p:txBody>
+      </p:sp>
+      <p:sp>
+        <p:nvSpPr>
+          <p:cNvPr id="28" name="Rounded Rectangle 27"/>
+          <p:cNvSpPr/>
+          <p:nvPr/>
+        </p:nvSpPr>
+        <p:spPr>
+          <a:xfrm>
+            <a:off x="8046720" y="3383280"/>
+            <a:ext cx="3474720" cy="1463040"/>
+          </a:xfrm>
+          <a:prstGeom prst="roundRect">
+            <a:avLst/>
+          </a:prstGeom>
+          <a:solidFill>
+            <a:srgbClr val="1E293B"/>
+          </a:solidFill>
+          <a:ln>
+            <a:noFill/>
+          </a:ln>
+        </p:spPr>
+        <p:style>
+          <a:lnRef idx="1">
+            <a:schemeClr val="accent1"/>
+          </a:lnRef>
+          <a:fillRef idx="3">
+            <a:schemeClr val="accent1"/>
+          </a:fillRef>
+          <a:effectRef idx="2">
+            <a:schemeClr val="accent1"/>
+          </a:effectRef>
+          <a:fontRef idx="minor">
+            <a:schemeClr val="lt1"/>
+          </a:fontRef>
+        </p:style>
+        <p:txBody>
+          <a:bodyPr rtlCol="0" anchor="ctr"/>
+          <a:lstStyle/>
+          <a:p>
+            <a:pPr algn="ctr"/>
+          </a:p>
+        </p:txBody>
+      </p:sp>
+      <p:sp>
+        <p:nvSpPr>
+          <p:cNvPr id="29" name="Rectangle 28"/>
+          <p:cNvSpPr/>
+          <p:nvPr/>
+        </p:nvSpPr>
+        <p:spPr>
+          <a:xfrm>
+            <a:off x="8046720" y="3383280"/>
+            <a:ext cx="3474720" cy="38100"/>
+          </a:xfrm>
+          <a:prstGeom prst="rect">
+            <a:avLst/>
+          </a:prstGeom>
+          <a:solidFill>
+            <a:srgbClr val="EF4444"/>
+          </a:solidFill>
+          <a:ln>
+            <a:noFill/>
+          </a:ln>
+        </p:spPr>
+        <p:style>
+          <a:lnRef idx="1">
+            <a:schemeClr val="accent1"/>
+          </a:lnRef>
+          <a:fillRef idx="3">
+            <a:schemeClr val="accent1"/>
+          </a:fillRef>
+          <a:effectRef idx="2">
+            <a:schemeClr val="accent1"/>
+          </a:effectRef>
+          <a:fontRef idx="minor">
+            <a:schemeClr val="lt1"/>
+          </a:fontRef>
+        </p:style>
+        <p:txBody>
+          <a:bodyPr rtlCol="0" anchor="ctr"/>
+          <a:lstStyle/>
+          <a:p>
+            <a:pPr algn="ctr"/>
+          </a:p>
+        </p:txBody>
+      </p:sp>
+      <p:sp>
+        <p:nvSpPr>
+          <p:cNvPr id="30" name="Oval 29"/>
+          <p:cNvSpPr/>
+          <p:nvPr/>
+        </p:nvSpPr>
+        <p:spPr>
+          <a:xfrm>
+            <a:off x="8183880" y="3566160"/>
+            <a:ext cx="411480" cy="411480"/>
+          </a:xfrm>
+          <a:prstGeom prst="ellipse">
+            <a:avLst/>
+          </a:prstGeom>
+          <a:solidFill>
+            <a:srgbClr val="EF4444"/>
+          </a:solidFill>
+          <a:ln>
+            <a:noFill/>
+          </a:ln>
+        </p:spPr>
+        <p:style>
+          <a:lnRef idx="1">
+            <a:schemeClr val="accent1"/>
+          </a:lnRef>
+          <a:fillRef idx="3">
+            <a:schemeClr val="accent1"/>
+          </a:fillRef>
+          <a:effectRef idx="2">
+            <a:schemeClr val="accent1"/>
+          </a:effectRef>
+          <a:fontRef idx="minor">
+            <a:schemeClr val="lt1"/>
+          </a:fontRef>
+        </p:style>
+        <p:txBody>
+          <a:bodyPr rtlCol="0" anchor="ctr"/>
+          <a:lstStyle/>
+          <a:p>
+            <a:pPr algn="ctr">
+              <a:defRPr sz="1600" b="1">
+                <a:solidFill>
+                  <a:srgbClr val="FFFFFF"/>
+                </a:solidFill>
+              </a:defRPr>
+            </a:pPr>
+            <a:r>
+              <a:t>6</a:t>
+            </a:r>
+          </a:p>
+        </p:txBody>
+      </p:sp>
+      <p:sp>
+        <p:nvSpPr>
+          <p:cNvPr id="31" name="TextBox 30"/>
+          <p:cNvSpPr txBox="1"/>
+          <p:nvPr/>
+        </p:nvSpPr>
+        <p:spPr>
+          <a:xfrm>
+            <a:off x="8686800" y="3520440"/>
+            <a:ext cx="2651760" cy="365760"/>
+          </a:xfrm>
+          <a:prstGeom prst="rect">
+            <a:avLst/>
+          </a:prstGeom>
+          <a:noFill/>
+        </p:spPr>
+        <p:txBody>
+          <a:bodyPr wrap="none">
+            <a:spAutoFit/>
+          </a:bodyPr>
+          <a:lstStyle/>
+          <a:p>
+            <a:pPr>
+              <a:defRPr sz="1600" b="1">
+                <a:solidFill>
+                  <a:srgbClr val="FFFFFF"/>
+                </a:solidFill>
+              </a:defRPr>
+            </a:pPr>
+            <a:r>
+              <a:t>引落照合</a:t>
+            </a:r>
+          </a:p>
+        </p:txBody>
+      </p:sp>
+      <p:sp>
+        <p:nvSpPr>
+          <p:cNvPr id="32" name="TextBox 31"/>
+          <p:cNvSpPr txBox="1"/>
+          <p:nvPr/>
+        </p:nvSpPr>
+        <p:spPr>
+          <a:xfrm>
+            <a:off x="8183880" y="4023360"/>
+            <a:ext cx="3200400" cy="777240"/>
+          </a:xfrm>
+          <a:prstGeom prst="rect">
+            <a:avLst/>
+          </a:prstGeom>
+          <a:noFill/>
+        </p:spPr>
+        <p:txBody>
+          <a:bodyPr wrap="square">
+            <a:spAutoFit/>
+          </a:bodyPr>
+          <a:lstStyle/>
+          <a:p>
+            <a:pPr>
+              <a:defRPr sz="1200">
+                <a:solidFill>
+                  <a:srgbClr val="94A3B8"/>
+                </a:solidFill>
+              </a:defRPr>
+            </a:pPr>
+            <a:r>
+              <a:t>入出金履歴CSVと</a:t>
+            </a:r>
+            <a:br/>
+            <a:r>
+              <a:t>未払金合計を突合</a:t>
+            </a:r>
+            <a:br/>
+            <a:r>
+              <a:t>→ 差額調査</a:t>
+            </a:r>
+          </a:p>
+        </p:txBody>
+      </p:sp>
+    </p:spTree>
+  </p:cSld>
+  <p:clrMapOvr>
+    <a:masterClrMapping/>
+  </p:clrMapOvr>
+</p:sld>
+</file>
+
+<file path=ppt/slides/slide26.xml><?xml version="1.0" encoding="utf-8"?>
+<p:sld xmlns:a="http://schemas.openxmlformats.org/drawingml/2006/main" xmlns:p="http://schemas.openxmlformats.org/presentationml/2006/main" xmlns:r="http://schemas.openxmlformats.org/officeDocument/2006/relationships">
+  <p:cSld>
+    <p:bg>
+      <p:bgPr>
+        <a:solidFill>
+          <a:srgbClr val="0F0F1A"/>
+        </a:solidFill>
+        <a:effectLst/>
+      </p:bgPr>
+    </p:bg>
+    <p:spTree>
+      <p:nvGrpSpPr>
+        <p:cNvPr id="1" name=""/>
+        <p:cNvGrpSpPr/>
+        <p:nvPr/>
+      </p:nvGrpSpPr>
+      <p:grpSpPr/>
+      <p:sp>
+        <p:nvSpPr>
+          <p:cNvPr id="2" name="TextBox 1"/>
+          <p:cNvSpPr txBox="1"/>
+          <p:nvPr/>
+        </p:nvSpPr>
+        <p:spPr>
+          <a:xfrm>
+            <a:off x="1371600" y="640080"/>
+            <a:ext cx="9144000" cy="914400"/>
+          </a:xfrm>
+          <a:prstGeom prst="rect">
+            <a:avLst/>
+          </a:prstGeom>
+          <a:noFill/>
+        </p:spPr>
+        <p:txBody>
+          <a:bodyPr wrap="none">
+            <a:spAutoFit/>
+          </a:bodyPr>
+          <a:lstStyle/>
+          <a:p>
+            <a:pPr>
+              <a:defRPr sz="3200" b="1">
+                <a:solidFill>
+                  <a:srgbClr val="FFFFFF"/>
+                </a:solidFill>
+              </a:defRPr>
+            </a:pPr>
+            <a:r>
+              <a:t>照合結果の4タブ</a:t>
             </a:r>
           </a:p>
         </p:txBody>
@@ -8479,7 +9836,824 @@
         </p:nvGraphicFramePr>
         <p:xfrm>
           <a:off x="1097280" y="1554480"/>
-          <a:ext cx="9966960" cy="3291840"/>
+          <a:ext cx="9966960" cy="2057400"/>
+        </p:xfrm>
+        <a:graphic>
+          <a:graphicData uri="http://schemas.openxmlformats.org/drawingml/2006/table">
+            <a:tbl>
+              <a:tblPr firstRow="1" bandRow="1">
+                <a:tableStyleId>{5C22544A-7EE6-4342-B048-85BDC9FD1C3A}</a:tableStyleId>
+              </a:tblPr>
+              <a:tblGrid>
+                <a:gridCol w="3322320"/>
+                <a:gridCol w="3322320"/>
+                <a:gridCol w="3322320"/>
+              </a:tblGrid>
+              <a:tr h="411480">
+                <a:tc>
+                  <a:txBody>
+                    <a:bodyPr/>
+                    <a:lstStyle/>
+                    <a:p>
+                      <a:pPr>
+                        <a:defRPr sz="1300" b="1">
+                          <a:solidFill>
+                            <a:srgbClr val="F59E0B"/>
+                          </a:solidFill>
+                        </a:defRPr>
+                      </a:pPr>
+                      <a:r>
+                        <a:t>タブ</a:t>
+                      </a:r>
+                    </a:p>
+                  </a:txBody>
+                  <a:tcPr>
+                    <a:solidFill>
+                      <a:srgbClr val="1A1C2E"/>
+                    </a:solidFill>
+                  </a:tcPr>
+                </a:tc>
+                <a:tc>
+                  <a:txBody>
+                    <a:bodyPr/>
+                    <a:lstStyle/>
+                    <a:p>
+                      <a:pPr>
+                        <a:defRPr sz="1300" b="1">
+                          <a:solidFill>
+                            <a:srgbClr val="F59E0B"/>
+                          </a:solidFill>
+                        </a:defRPr>
+                      </a:pPr>
+                      <a:r>
+                        <a:t>内容</a:t>
+                      </a:r>
+                    </a:p>
+                  </a:txBody>
+                  <a:tcPr>
+                    <a:solidFill>
+                      <a:srgbClr val="1A1C2E"/>
+                    </a:solidFill>
+                  </a:tcPr>
+                </a:tc>
+                <a:tc>
+                  <a:txBody>
+                    <a:bodyPr/>
+                    <a:lstStyle/>
+                    <a:p>
+                      <a:pPr>
+                        <a:defRPr sz="1300" b="1">
+                          <a:solidFill>
+                            <a:srgbClr val="F59E0B"/>
+                          </a:solidFill>
+                        </a:defRPr>
+                      </a:pPr>
+                      <a:r>
+                        <a:t>対応</a:t>
+                      </a:r>
+                    </a:p>
+                  </a:txBody>
+                  <a:tcPr>
+                    <a:solidFill>
+                      <a:srgbClr val="1A1C2E"/>
+                    </a:solidFill>
+                  </a:tcPr>
+                </a:tc>
+              </a:tr>
+              <a:tr h="411480">
+                <a:tc>
+                  <a:txBody>
+                    <a:bodyPr/>
+                    <a:lstStyle/>
+                    <a:p>
+                      <a:pPr>
+                        <a:defRPr sz="1200">
+                          <a:solidFill>
+                            <a:srgbClr val="E2E8F0"/>
+                          </a:solidFill>
+                        </a:defRPr>
+                      </a:pPr>
+                      <a:r>
+                        <a:t>自動照合済み</a:t>
+                      </a:r>
+                    </a:p>
+                  </a:txBody>
+                  <a:tcPr>
+                    <a:solidFill>
+                      <a:srgbClr val="1E293B"/>
+                    </a:solidFill>
+                  </a:tcPr>
+                </a:tc>
+                <a:tc>
+                  <a:txBody>
+                    <a:bodyPr/>
+                    <a:lstStyle/>
+                    <a:p>
+                      <a:pPr>
+                        <a:defRPr sz="1200">
+                          <a:solidFill>
+                            <a:srgbClr val="E2E8F0"/>
+                          </a:solidFill>
+                        </a:defRPr>
+                      </a:pPr>
+                      <a:r>
+                        <a:t>申請と明細が自動マッチ</a:t>
+                      </a:r>
+                    </a:p>
+                  </a:txBody>
+                  <a:tcPr>
+                    <a:solidFill>
+                      <a:srgbClr val="1E293B"/>
+                    </a:solidFill>
+                  </a:tcPr>
+                </a:tc>
+                <a:tc>
+                  <a:txBody>
+                    <a:bodyPr/>
+                    <a:lstStyle/>
+                    <a:p>
+                      <a:pPr>
+                        <a:defRPr sz="1200">
+                          <a:solidFill>
+                            <a:srgbClr val="E2E8F0"/>
+                          </a:solidFill>
+                        </a:defRPr>
+                      </a:pPr>
+                      <a:r>
+                        <a:t>確認のみ（差額は調整仕訳済み）</a:t>
+                      </a:r>
+                    </a:p>
+                  </a:txBody>
+                  <a:tcPr>
+                    <a:solidFill>
+                      <a:srgbClr val="1E293B"/>
+                    </a:solidFill>
+                  </a:tcPr>
+                </a:tc>
+              </a:tr>
+              <a:tr h="411480">
+                <a:tc>
+                  <a:txBody>
+                    <a:bodyPr/>
+                    <a:lstStyle/>
+                    <a:p>
+                      <a:pPr>
+                        <a:defRPr sz="1200">
+                          <a:solidFill>
+                            <a:srgbClr val="E2E8F0"/>
+                          </a:solidFill>
+                        </a:defRPr>
+                      </a:pPr>
+                      <a:r>
+                        <a:t>要確認</a:t>
+                      </a:r>
+                    </a:p>
+                  </a:txBody>
+                  <a:tcPr>
+                    <a:solidFill>
+                      <a:srgbClr val="0F0F1A"/>
+                    </a:solidFill>
+                  </a:tcPr>
+                </a:tc>
+                <a:tc>
+                  <a:txBody>
+                    <a:bodyPr/>
+                    <a:lstStyle/>
+                    <a:p>
+                      <a:pPr>
+                        <a:defRPr sz="1200">
+                          <a:solidFill>
+                            <a:srgbClr val="E2E8F0"/>
+                          </a:solidFill>
+                        </a:defRPr>
+                      </a:pPr>
+                      <a:r>
+                        <a:t>候補が複数 or スコア中程度</a:t>
+                      </a:r>
+                    </a:p>
+                  </a:txBody>
+                  <a:tcPr>
+                    <a:solidFill>
+                      <a:srgbClr val="0F0F1A"/>
+                    </a:solidFill>
+                  </a:tcPr>
+                </a:tc>
+                <a:tc>
+                  <a:txBody>
+                    <a:bodyPr/>
+                    <a:lstStyle/>
+                    <a:p>
+                      <a:pPr>
+                        <a:defRPr sz="1200">
+                          <a:solidFill>
+                            <a:srgbClr val="E2E8F0"/>
+                          </a:solidFill>
+                        </a:defRPr>
+                      </a:pPr>
+                      <a:r>
+                        <a:t>[これに確定] で正しい明細を選択</a:t>
+                      </a:r>
+                    </a:p>
+                  </a:txBody>
+                  <a:tcPr>
+                    <a:solidFill>
+                      <a:srgbClr val="0F0F1A"/>
+                    </a:solidFill>
+                  </a:tcPr>
+                </a:tc>
+              </a:tr>
+              <a:tr h="411480">
+                <a:tc>
+                  <a:txBody>
+                    <a:bodyPr/>
+                    <a:lstStyle/>
+                    <a:p>
+                      <a:pPr>
+                        <a:defRPr sz="1200">
+                          <a:solidFill>
+                            <a:srgbClr val="E2E8F0"/>
+                          </a:solidFill>
+                        </a:defRPr>
+                      </a:pPr>
+                      <a:r>
+                        <a:t>明細なし</a:t>
+                      </a:r>
+                    </a:p>
+                  </a:txBody>
+                  <a:tcPr>
+                    <a:solidFill>
+                      <a:srgbClr val="1E293B"/>
+                    </a:solidFill>
+                  </a:tcPr>
+                </a:tc>
+                <a:tc>
+                  <a:txBody>
+                    <a:bodyPr/>
+                    <a:lstStyle/>
+                    <a:p>
+                      <a:pPr>
+                        <a:defRPr sz="1200">
+                          <a:solidFill>
+                            <a:srgbClr val="E2E8F0"/>
+                          </a:solidFill>
+                        </a:defRPr>
+                      </a:pPr>
+                      <a:r>
+                        <a:t>申請はあるが明細にない</a:t>
+                      </a:r>
+                    </a:p>
+                  </a:txBody>
+                  <a:tcPr>
+                    <a:solidFill>
+                      <a:srgbClr val="1E293B"/>
+                    </a:solidFill>
+                  </a:tcPr>
+                </a:tc>
+                <a:tc>
+                  <a:txBody>
+                    <a:bodyPr/>
+                    <a:lstStyle/>
+                    <a:p>
+                      <a:pPr>
+                        <a:defRPr sz="1200">
+                          <a:solidFill>
+                            <a:srgbClr val="E2E8F0"/>
+                          </a:solidFill>
+                        </a:defRPr>
+                      </a:pPr>
+                      <a:r>
+                        <a:t>翌月繰越 or キャンセル確認</a:t>
+                      </a:r>
+                    </a:p>
+                  </a:txBody>
+                  <a:tcPr>
+                    <a:solidFill>
+                      <a:srgbClr val="1E293B"/>
+                    </a:solidFill>
+                  </a:tcPr>
+                </a:tc>
+              </a:tr>
+              <a:tr h="411480">
+                <a:tc>
+                  <a:txBody>
+                    <a:bodyPr/>
+                    <a:lstStyle/>
+                    <a:p>
+                      <a:pPr>
+                        <a:defRPr sz="1200">
+                          <a:solidFill>
+                            <a:srgbClr val="E2E8F0"/>
+                          </a:solidFill>
+                        </a:defRPr>
+                      </a:pPr>
+                      <a:r>
+                        <a:t>未申請利用</a:t>
+                      </a:r>
+                    </a:p>
+                  </a:txBody>
+                  <a:tcPr>
+                    <a:solidFill>
+                      <a:srgbClr val="0F0F1A"/>
+                    </a:solidFill>
+                  </a:tcPr>
+                </a:tc>
+                <a:tc>
+                  <a:txBody>
+                    <a:bodyPr/>
+                    <a:lstStyle/>
+                    <a:p>
+                      <a:pPr>
+                        <a:defRPr sz="1200">
+                          <a:solidFill>
+                            <a:srgbClr val="E2E8F0"/>
+                          </a:solidFill>
+                        </a:defRPr>
+                      </a:pPr>
+                      <a:r>
+                        <a:t>明細あるが申請がない</a:t>
+                      </a:r>
+                    </a:p>
+                  </a:txBody>
+                  <a:tcPr>
+                    <a:solidFill>
+                      <a:srgbClr val="0F0F1A"/>
+                    </a:solidFill>
+                  </a:tcPr>
+                </a:tc>
+                <a:tc>
+                  <a:txBody>
+                    <a:bodyPr/>
+                    <a:lstStyle/>
+                    <a:p>
+                      <a:pPr>
+                        <a:defRPr sz="1200">
+                          <a:solidFill>
+                            <a:srgbClr val="E2E8F0"/>
+                          </a:solidFill>
+                        </a:defRPr>
+                      </a:pPr>
+                      <a:r>
+                        <a:t>本人に確認 or 経費処理</a:t>
+                      </a:r>
+                    </a:p>
+                  </a:txBody>
+                  <a:tcPr>
+                    <a:solidFill>
+                      <a:srgbClr val="0F0F1A"/>
+                    </a:solidFill>
+                  </a:tcPr>
+                </a:tc>
+              </a:tr>
+            </a:tbl>
+          </a:graphicData>
+        </a:graphic>
+      </p:graphicFrame>
+    </p:spTree>
+  </p:cSld>
+  <p:clrMapOvr>
+    <a:masterClrMapping/>
+  </p:clrMapOvr>
+</p:sld>
+</file>
+
+<file path=ppt/slides/slide27.xml><?xml version="1.0" encoding="utf-8"?>
+<p:sld xmlns:a="http://schemas.openxmlformats.org/drawingml/2006/main" xmlns:p="http://schemas.openxmlformats.org/presentationml/2006/main" xmlns:r="http://schemas.openxmlformats.org/officeDocument/2006/relationships">
+  <p:cSld>
+    <p:bg>
+      <p:bgPr>
+        <a:solidFill>
+          <a:srgbClr val="0F0F1A"/>
+        </a:solidFill>
+        <a:effectLst/>
+      </p:bgPr>
+    </p:bg>
+    <p:spTree>
+      <p:nvGrpSpPr>
+        <p:cNvPr id="1" name=""/>
+        <p:cNvGrpSpPr/>
+        <p:nvPr/>
+      </p:nvGrpSpPr>
+      <p:grpSpPr/>
+      <p:sp>
+        <p:nvSpPr>
+          <p:cNvPr id="2" name="TextBox 1"/>
+          <p:cNvSpPr txBox="1"/>
+          <p:nvPr/>
+        </p:nvSpPr>
+        <p:spPr>
+          <a:xfrm>
+            <a:off x="1371600" y="640080"/>
+            <a:ext cx="9144000" cy="914400"/>
+          </a:xfrm>
+          <a:prstGeom prst="rect">
+            <a:avLst/>
+          </a:prstGeom>
+          <a:noFill/>
+        </p:spPr>
+        <p:txBody>
+          <a:bodyPr wrap="none">
+            <a:spAutoFit/>
+          </a:bodyPr>
+          <a:lstStyle/>
+          <a:p>
+            <a:pPr>
+              <a:defRPr sz="3200" b="1">
+                <a:solidFill>
+                  <a:srgbClr val="FFFFFF"/>
+                </a:solidFill>
+              </a:defRPr>
+            </a:pPr>
+            <a:r>
+              <a:t>マッチングの仕組み</a:t>
+            </a:r>
+          </a:p>
+        </p:txBody>
+      </p:sp>
+      <p:sp>
+        <p:nvSpPr>
+          <p:cNvPr id="3" name="Rectangle 2"/>
+          <p:cNvSpPr/>
+          <p:nvPr/>
+        </p:nvSpPr>
+        <p:spPr>
+          <a:xfrm>
+            <a:off x="1371600" y="1371600"/>
+            <a:ext cx="731520" cy="38100"/>
+          </a:xfrm>
+          <a:prstGeom prst="rect">
+            <a:avLst/>
+          </a:prstGeom>
+          <a:solidFill>
+            <a:srgbClr val="F59E0B"/>
+          </a:solidFill>
+          <a:ln>
+            <a:noFill/>
+          </a:ln>
+        </p:spPr>
+        <p:style>
+          <a:lnRef idx="1">
+            <a:schemeClr val="accent1"/>
+          </a:lnRef>
+          <a:fillRef idx="3">
+            <a:schemeClr val="accent1"/>
+          </a:fillRef>
+          <a:effectRef idx="2">
+            <a:schemeClr val="accent1"/>
+          </a:effectRef>
+          <a:fontRef idx="minor">
+            <a:schemeClr val="lt1"/>
+          </a:fontRef>
+        </p:style>
+        <p:txBody>
+          <a:bodyPr rtlCol="0" anchor="ctr"/>
+          <a:lstStyle/>
+          <a:p>
+            <a:pPr algn="ctr"/>
+          </a:p>
+        </p:txBody>
+      </p:sp>
+      <p:sp>
+        <p:nvSpPr>
+          <p:cNvPr id="4" name="TextBox 3"/>
+          <p:cNvSpPr txBox="1"/>
+          <p:nvPr/>
+        </p:nvSpPr>
+        <p:spPr>
+          <a:xfrm>
+            <a:off x="1371600" y="1737360"/>
+            <a:ext cx="9418320" cy="4572000"/>
+          </a:xfrm>
+          <a:prstGeom prst="rect">
+            <a:avLst/>
+          </a:prstGeom>
+          <a:noFill/>
+        </p:spPr>
+        <p:txBody>
+          <a:bodyPr wrap="square">
+            <a:spAutoFit/>
+          </a:bodyPr>
+          <a:lstStyle/>
+          <a:p>
+            <a:pPr>
+              <a:spcAft>
+                <a:spcPts val="400"/>
+              </a:spcAft>
+              <a:defRPr sz="2000">
+                <a:solidFill>
+                  <a:srgbClr val="E2E8F0"/>
+                </a:solidFill>
+              </a:defRPr>
+            </a:pPr>
+            <a:r>
+              <a:t>Phase 1: 予測マッチング（高精度）</a:t>
+            </a:r>
+          </a:p>
+          <a:p>
+            <a:pPr lvl="1">
+              <a:spcAft>
+                <a:spcPts val="400"/>
+              </a:spcAft>
+              <a:defRPr sz="1500">
+                <a:solidFill>
+                  <a:srgbClr val="94A3B8"/>
+                </a:solidFill>
+              </a:defRPr>
+            </a:pPr>
+            <a:r>
+              <a:t>購買承認時に card_last4 × 金額 × 予想日付 を予測テーブルに自動記録</a:t>
+            </a:r>
+          </a:p>
+          <a:p>
+            <a:pPr lvl="1">
+              <a:spcAft>
+                <a:spcPts val="400"/>
+              </a:spcAft>
+              <a:defRPr sz="1500">
+                <a:solidFill>
+                  <a:srgbClr val="94A3B8"/>
+                </a:solidFill>
+              </a:defRPr>
+            </a:pPr>
+            <a:r>
+              <a:t>金額完全一致 → 自動確定、5%以内 → 自動（差額調整付き）、5-10% → 要確認</a:t>
+            </a:r>
+          </a:p>
+          <a:p>
+            <a:pPr>
+              <a:spcAft>
+                <a:spcPts val="400"/>
+              </a:spcAft>
+              <a:defRPr sz="800"/>
+            </a:pPr>
+          </a:p>
+          <a:p>
+            <a:pPr>
+              <a:spcAft>
+                <a:spcPts val="400"/>
+              </a:spcAft>
+              <a:defRPr sz="2000">
+                <a:solidFill>
+                  <a:srgbClr val="E2E8F0"/>
+                </a:solidFill>
+              </a:defRPr>
+            </a:pPr>
+            <a:r>
+              <a:t>Phase 2: スコアリング（フォールバック）</a:t>
+            </a:r>
+          </a:p>
+          <a:p>
+            <a:pPr lvl="1">
+              <a:spcAft>
+                <a:spcPts val="400"/>
+              </a:spcAft>
+              <a:defRPr sz="1500">
+                <a:solidFill>
+                  <a:srgbClr val="94A3B8"/>
+                </a:solidFill>
+              </a:defRPr>
+            </a:pPr>
+            <a:r>
+              <a:t>金額(50点) + 日付(30点) + 加盟店名(20点) = 100点満点</a:t>
+            </a:r>
+          </a:p>
+          <a:p>
+            <a:pPr lvl="1">
+              <a:spcAft>
+                <a:spcPts val="400"/>
+              </a:spcAft>
+              <a:defRPr sz="1500">
+                <a:solidFill>
+                  <a:srgbClr val="94A3B8"/>
+                </a:solidFill>
+              </a:defRPr>
+            </a:pPr>
+            <a:r>
+              <a:t>80点以上 → 自動確定、50-79点 → 要確認、50点未満 → 未マッチ</a:t>
+            </a:r>
+          </a:p>
+          <a:p>
+            <a:pPr>
+              <a:spcAft>
+                <a:spcPts val="400"/>
+              </a:spcAft>
+              <a:defRPr sz="800"/>
+            </a:pPr>
+          </a:p>
+          <a:p>
+            <a:pPr>
+              <a:spcAft>
+                <a:spcPts val="400"/>
+              </a:spcAft>
+              <a:defRPr sz="2000">
+                <a:solidFill>
+                  <a:srgbClr val="E2E8F0"/>
+                </a:solidFill>
+              </a:defRPr>
+            </a:pPr>
+            <a:r>
+              <a:t>引落照合:</a:t>
+            </a:r>
+          </a:p>
+          <a:p>
+            <a:pPr lvl="1">
+              <a:spcAft>
+                <a:spcPts val="400"/>
+              </a:spcAft>
+              <a:defRPr sz="1500">
+                <a:solidFill>
+                  <a:srgbClr val="94A3B8"/>
+                </a:solidFill>
+              </a:defRPr>
+            </a:pPr>
+            <a:r>
+              <a:t>MF会計Plusの未払金(請求)仕訳をカード別に集計 → CSVの引落額と突合</a:t>
+            </a:r>
+          </a:p>
+          <a:p>
+            <a:pPr lvl="1">
+              <a:spcAft>
+                <a:spcPts val="400"/>
+              </a:spcAft>
+              <a:defRPr sz="1500">
+                <a:solidFill>
+                  <a:srgbClr val="94A3B8"/>
+                </a:solidFill>
+              </a:defRPr>
+            </a:pPr>
+            <a:r>
+              <a:t>差額がある場合: 月末繰越・返品・年会費等のガイドを表示</a:t>
+            </a:r>
+          </a:p>
+        </p:txBody>
+      </p:sp>
+    </p:spTree>
+  </p:cSld>
+  <p:clrMapOvr>
+    <a:masterClrMapping/>
+  </p:clrMapOvr>
+</p:sld>
+</file>
+
+<file path=ppt/slides/slide28.xml><?xml version="1.0" encoding="utf-8"?>
+<p:sld xmlns:a="http://schemas.openxmlformats.org/drawingml/2006/main" xmlns:p="http://schemas.openxmlformats.org/presentationml/2006/main" xmlns:r="http://schemas.openxmlformats.org/officeDocument/2006/relationships">
+  <p:cSld>
+    <p:bg>
+      <p:bgPr>
+        <a:solidFill>
+          <a:srgbClr val="0F0F1A"/>
+        </a:solidFill>
+        <a:effectLst/>
+      </p:bgPr>
+    </p:bg>
+    <p:spTree>
+      <p:nvGrpSpPr>
+        <p:cNvPr id="1" name=""/>
+        <p:cNvGrpSpPr/>
+        <p:nvPr/>
+      </p:nvGrpSpPr>
+      <p:grpSpPr/>
+      <p:sp>
+        <p:nvSpPr>
+          <p:cNvPr id="2" name="TextBox 1"/>
+          <p:cNvSpPr txBox="1"/>
+          <p:nvPr/>
+        </p:nvSpPr>
+        <p:spPr>
+          <a:xfrm>
+            <a:off x="1371600" y="1371600"/>
+            <a:ext cx="2743200" cy="2743200"/>
+          </a:xfrm>
+          <a:prstGeom prst="rect">
+            <a:avLst/>
+          </a:prstGeom>
+          <a:noFill/>
+        </p:spPr>
+        <p:txBody>
+          <a:bodyPr wrap="none">
+            <a:spAutoFit/>
+          </a:bodyPr>
+          <a:lstStyle/>
+          <a:p>
+            <a:pPr>
+              <a:defRPr sz="12000" b="1">
+                <a:solidFill>
+                  <a:srgbClr val="10B981"/>
+                </a:solidFill>
+              </a:defRPr>
+            </a:pPr>
+            <a:r>
+              <a:t>10</a:t>
+            </a:r>
+          </a:p>
+        </p:txBody>
+      </p:sp>
+      <p:sp>
+        <p:nvSpPr>
+          <p:cNvPr id="3" name="TextBox 2"/>
+          <p:cNvSpPr txBox="1"/>
+          <p:nvPr/>
+        </p:nvSpPr>
+        <p:spPr>
+          <a:xfrm>
+            <a:off x="1371600" y="3840480"/>
+            <a:ext cx="9144000" cy="1371600"/>
+          </a:xfrm>
+          <a:prstGeom prst="rect">
+            <a:avLst/>
+          </a:prstGeom>
+          <a:noFill/>
+        </p:spPr>
+        <p:txBody>
+          <a:bodyPr wrap="none">
+            <a:spAutoFit/>
+          </a:bodyPr>
+          <a:lstStyle/>
+          <a:p>
+            <a:pPr>
+              <a:defRPr sz="4000" b="1">
+                <a:solidFill>
+                  <a:srgbClr val="FFFFFF"/>
+                </a:solidFill>
+              </a:defRPr>
+            </a:pPr>
+            <a:r>
+              <a:t>定期タスク</a:t>
+            </a:r>
+          </a:p>
+        </p:txBody>
+      </p:sp>
+    </p:spTree>
+  </p:cSld>
+  <p:clrMapOvr>
+    <a:masterClrMapping/>
+  </p:clrMapOvr>
+</p:sld>
+</file>
+
+<file path=ppt/slides/slide29.xml><?xml version="1.0" encoding="utf-8"?>
+<p:sld xmlns:a="http://schemas.openxmlformats.org/drawingml/2006/main" xmlns:p="http://schemas.openxmlformats.org/presentationml/2006/main" xmlns:r="http://schemas.openxmlformats.org/officeDocument/2006/relationships">
+  <p:cSld>
+    <p:bg>
+      <p:bgPr>
+        <a:solidFill>
+          <a:srgbClr val="0F0F1A"/>
+        </a:solidFill>
+        <a:effectLst/>
+      </p:bgPr>
+    </p:bg>
+    <p:spTree>
+      <p:nvGrpSpPr>
+        <p:cNvPr id="1" name=""/>
+        <p:cNvGrpSpPr/>
+        <p:nvPr/>
+      </p:nvGrpSpPr>
+      <p:grpSpPr/>
+      <p:sp>
+        <p:nvSpPr>
+          <p:cNvPr id="2" name="TextBox 1"/>
+          <p:cNvSpPr txBox="1"/>
+          <p:nvPr/>
+        </p:nvSpPr>
+        <p:spPr>
+          <a:xfrm>
+            <a:off x="1371600" y="640080"/>
+            <a:ext cx="9144000" cy="914400"/>
+          </a:xfrm>
+          <a:prstGeom prst="rect">
+            <a:avLst/>
+          </a:prstGeom>
+          <a:noFill/>
+        </p:spPr>
+        <p:txBody>
+          <a:bodyPr wrap="none">
+            <a:spAutoFit/>
+          </a:bodyPr>
+          <a:lstStyle/>
+          <a:p>
+            <a:pPr>
+              <a:defRPr sz="3200" b="1">
+                <a:solidFill>
+                  <a:srgbClr val="FFFFFF"/>
+                </a:solidFill>
+              </a:defRPr>
+            </a:pPr>
+            <a:r>
+              <a:t>オペレーションカレンダー</a:t>
+            </a:r>
+          </a:p>
+        </p:txBody>
+      </p:sp>
+      <p:graphicFrame>
+        <p:nvGraphicFramePr>
+          <p:cNvPr id="3" name="Table 2"/>
+          <p:cNvGraphicFramePr>
+            <a:graphicFrameLocks noGrp="1"/>
+          </p:cNvGraphicFramePr>
+          <p:nvPr/>
+        </p:nvGraphicFramePr>
+        <p:xfrm>
+          <a:off x="1097280" y="1554480"/>
+          <a:ext cx="9966960" cy="3703320"/>
         </p:xfrm>
         <a:graphic>
           <a:graphicData uri="http://schemas.openxmlformats.org/drawingml/2006/table">
@@ -9046,7 +11220,7 @@
                         </a:defRPr>
                       </a:pPr>
                       <a:r>
-                        <a:t>カード明細突合バッチ</a:t>
+                        <a:t>カード明細突合バッチ → Slack通知</a:t>
                       </a:r>
                     </a:p>
                   </a:txBody>
@@ -9094,7 +11268,7 @@
                         </a:defRPr>
                       </a:pPr>
                       <a:r>
-                        <a:t>~15日</a:t>
+                        <a:t>月初</a:t>
                       </a:r>
                     </a:p>
                   </a:txBody>
@@ -9140,7 +11314,7 @@
                         </a:defRPr>
                       </a:pPr>
                       <a:r>
-                        <a:t>じゃらんCSV取込</a:t>
+                        <a:t>カード明細照合UI → 4タブ処理 + 引落照合</a:t>
                       </a:r>
                     </a:p>
                   </a:txBody>
@@ -9188,7 +11362,7 @@
                         </a:defRPr>
                       </a:pPr>
                       <a:r>
-                        <a:t>月末</a:t>
+                        <a:t>~15日</a:t>
                       </a:r>
                     </a:p>
                   </a:txBody>
@@ -9234,7 +11408,7 @@
                         </a:defRPr>
                       </a:pPr>
                       <a:r>
-                        <a:t>仕訳一括・コンプライアンスレビュー</a:t>
+                        <a:t>じゃらんCSV取込</a:t>
                       </a:r>
                     </a:p>
                   </a:txBody>
@@ -9245,2076 +11419,104 @@
                   </a:tcPr>
                 </a:tc>
               </a:tr>
+              <a:tr h="411480">
+                <a:tc>
+                  <a:txBody>
+                    <a:bodyPr/>
+                    <a:lstStyle/>
+                    <a:p>
+                      <a:pPr>
+                        <a:defRPr sz="1200">
+                          <a:solidFill>
+                            <a:srgbClr val="E2E8F0"/>
+                          </a:solidFill>
+                        </a:defRPr>
+                      </a:pPr>
+                      <a:r>
+                        <a:t>月次</a:t>
+                      </a:r>
+                    </a:p>
+                  </a:txBody>
+                  <a:tcPr>
+                    <a:solidFill>
+                      <a:srgbClr val="0F0F1A"/>
+                    </a:solidFill>
+                  </a:tcPr>
+                </a:tc>
+                <a:tc>
+                  <a:txBody>
+                    <a:bodyPr/>
+                    <a:lstStyle/>
+                    <a:p>
+                      <a:pPr>
+                        <a:defRPr sz="1200">
+                          <a:solidFill>
+                            <a:srgbClr val="E2E8F0"/>
+                          </a:solidFill>
+                        </a:defRPr>
+                      </a:pPr>
+                      <a:r>
+                        <a:t>月末</a:t>
+                      </a:r>
+                    </a:p>
+                  </a:txBody>
+                  <a:tcPr>
+                    <a:solidFill>
+                      <a:srgbClr val="0F0F1A"/>
+                    </a:solidFill>
+                  </a:tcPr>
+                </a:tc>
+                <a:tc>
+                  <a:txBody>
+                    <a:bodyPr/>
+                    <a:lstStyle/>
+                    <a:p>
+                      <a:pPr>
+                        <a:defRPr sz="1200">
+                          <a:solidFill>
+                            <a:srgbClr val="E2E8F0"/>
+                          </a:solidFill>
+                        </a:defRPr>
+                      </a:pPr>
+                      <a:r>
+                        <a:t>管理本部</a:t>
+                      </a:r>
+                    </a:p>
+                  </a:txBody>
+                  <a:tcPr>
+                    <a:solidFill>
+                      <a:srgbClr val="0F0F1A"/>
+                    </a:solidFill>
+                  </a:tcPr>
+                </a:tc>
+                <a:tc>
+                  <a:txBody>
+                    <a:bodyPr/>
+                    <a:lstStyle/>
+                    <a:p>
+                      <a:pPr>
+                        <a:defRPr sz="1200">
+                          <a:solidFill>
+                            <a:srgbClr val="E2E8F0"/>
+                          </a:solidFill>
+                        </a:defRPr>
+                      </a:pPr>
+                      <a:r>
+                        <a:t>仕訳一括・コンプライアンスレビュー</a:t>
+                      </a:r>
+                    </a:p>
+                  </a:txBody>
+                  <a:tcPr>
+                    <a:solidFill>
+                      <a:srgbClr val="0F0F1A"/>
+                    </a:solidFill>
+                  </a:tcPr>
+                </a:tc>
+              </a:tr>
             </a:tbl>
           </a:graphicData>
         </a:graphic>
       </p:graphicFrame>
-    </p:spTree>
-  </p:cSld>
-  <p:clrMapOvr>
-    <a:masterClrMapping/>
-  </p:clrMapOvr>
-</p:sld>
-</file>
-
-<file path=ppt/slides/slide26.xml><?xml version="1.0" encoding="utf-8"?>
-<p:sld xmlns:a="http://schemas.openxmlformats.org/drawingml/2006/main" xmlns:p="http://schemas.openxmlformats.org/presentationml/2006/main" xmlns:r="http://schemas.openxmlformats.org/officeDocument/2006/relationships">
-  <p:cSld>
-    <p:bg>
-      <p:bgPr>
-        <a:solidFill>
-          <a:srgbClr val="0F0F1A"/>
-        </a:solidFill>
-        <a:effectLst/>
-      </p:bgPr>
-    </p:bg>
-    <p:spTree>
-      <p:nvGrpSpPr>
-        <p:cNvPr id="1" name=""/>
-        <p:cNvGrpSpPr/>
-        <p:nvPr/>
-      </p:nvGrpSpPr>
-      <p:grpSpPr/>
-      <p:sp>
-        <p:nvSpPr>
-          <p:cNvPr id="2" name="TextBox 1"/>
-          <p:cNvSpPr txBox="1"/>
-          <p:nvPr/>
-        </p:nvSpPr>
-        <p:spPr>
-          <a:xfrm>
-            <a:off x="1371600" y="1371600"/>
-            <a:ext cx="2743200" cy="2743200"/>
-          </a:xfrm>
-          <a:prstGeom prst="rect">
-            <a:avLst/>
-          </a:prstGeom>
-          <a:noFill/>
-        </p:spPr>
-        <p:txBody>
-          <a:bodyPr wrap="none">
-            <a:spAutoFit/>
-          </a:bodyPr>
-          <a:lstStyle/>
-          <a:p>
-            <a:pPr>
-              <a:defRPr sz="12000" b="1">
-                <a:solidFill>
-                  <a:srgbClr val="00D4FF"/>
-                </a:solidFill>
-              </a:defRPr>
-            </a:pPr>
-            <a:r>
-              <a:t>10</a:t>
-            </a:r>
-          </a:p>
-        </p:txBody>
-      </p:sp>
-      <p:sp>
-        <p:nvSpPr>
-          <p:cNvPr id="3" name="TextBox 2"/>
-          <p:cNvSpPr txBox="1"/>
-          <p:nvPr/>
-        </p:nvSpPr>
-        <p:spPr>
-          <a:xfrm>
-            <a:off x="1371600" y="3840480"/>
-            <a:ext cx="9144000" cy="1371600"/>
-          </a:xfrm>
-          <a:prstGeom prst="rect">
-            <a:avLst/>
-          </a:prstGeom>
-          <a:noFill/>
-        </p:spPr>
-        <p:txBody>
-          <a:bodyPr wrap="none">
-            <a:spAutoFit/>
-          </a:bodyPr>
-          <a:lstStyle/>
-          <a:p>
-            <a:pPr>
-              <a:defRPr sz="4000" b="1">
-                <a:solidFill>
-                  <a:srgbClr val="FFFFFF"/>
-                </a:solidFill>
-              </a:defRPr>
-            </a:pPr>
-            <a:r>
-              <a:t>ステータス遷移</a:t>
-            </a:r>
-          </a:p>
-        </p:txBody>
-      </p:sp>
-    </p:spTree>
-  </p:cSld>
-  <p:clrMapOvr>
-    <a:masterClrMapping/>
-  </p:clrMapOvr>
-</p:sld>
-</file>
-
-<file path=ppt/slides/slide27.xml><?xml version="1.0" encoding="utf-8"?>
-<p:sld xmlns:a="http://schemas.openxmlformats.org/drawingml/2006/main" xmlns:p="http://schemas.openxmlformats.org/presentationml/2006/main" xmlns:r="http://schemas.openxmlformats.org/officeDocument/2006/relationships">
-  <p:cSld>
-    <p:bg>
-      <p:bgPr>
-        <a:solidFill>
-          <a:srgbClr val="0F0F1A"/>
-        </a:solidFill>
-        <a:effectLst/>
-      </p:bgPr>
-    </p:bg>
-    <p:spTree>
-      <p:nvGrpSpPr>
-        <p:cNvPr id="1" name=""/>
-        <p:cNvGrpSpPr/>
-        <p:nvPr/>
-      </p:nvGrpSpPr>
-      <p:grpSpPr/>
-      <p:sp>
-        <p:nvSpPr>
-          <p:cNvPr id="2" name="TextBox 1"/>
-          <p:cNvSpPr txBox="1"/>
-          <p:nvPr/>
-        </p:nvSpPr>
-        <p:spPr>
-          <a:xfrm>
-            <a:off x="1371600" y="640080"/>
-            <a:ext cx="9144000" cy="914400"/>
-          </a:xfrm>
-          <a:prstGeom prst="rect">
-            <a:avLst/>
-          </a:prstGeom>
-          <a:noFill/>
-        </p:spPr>
-        <p:txBody>
-          <a:bodyPr wrap="none">
-            <a:spAutoFit/>
-          </a:bodyPr>
-          <a:lstStyle/>
-          <a:p>
-            <a:pPr>
-              <a:defRPr sz="3200" b="1">
-                <a:solidFill>
-                  <a:srgbClr val="FFFFFF"/>
-                </a:solidFill>
-              </a:defRPr>
-            </a:pPr>
-            <a:r>
-              <a:t>通常フロー（カード 10万未満）</a:t>
-            </a:r>
-          </a:p>
-        </p:txBody>
-      </p:sp>
-      <p:sp>
-        <p:nvSpPr>
-          <p:cNvPr id="3" name="Rounded Rectangle 2"/>
-          <p:cNvSpPr/>
-          <p:nvPr/>
-        </p:nvSpPr>
-        <p:spPr>
-          <a:xfrm>
-            <a:off x="883767" y="2926080"/>
-            <a:ext cx="1371600" cy="1005840"/>
-          </a:xfrm>
-          <a:prstGeom prst="roundRect">
-            <a:avLst/>
-          </a:prstGeom>
-          <a:solidFill>
-            <a:srgbClr val="00D4FF"/>
-          </a:solidFill>
-          <a:ln>
-            <a:noFill/>
-          </a:ln>
-        </p:spPr>
-        <p:style>
-          <a:lnRef idx="1">
-            <a:schemeClr val="accent1"/>
-          </a:lnRef>
-          <a:fillRef idx="3">
-            <a:schemeClr val="accent1"/>
-          </a:fillRef>
-          <a:effectRef idx="2">
-            <a:schemeClr val="accent1"/>
-          </a:effectRef>
-          <a:fontRef idx="minor">
-            <a:schemeClr val="lt1"/>
-          </a:fontRef>
-        </p:style>
-        <p:txBody>
-          <a:bodyPr rtlCol="0" anchor="ctr" wrap="square"/>
-          <a:lstStyle/>
-          <a:p>
-            <a:pPr algn="ctr">
-              <a:defRPr sz="1300" b="1">
-                <a:solidFill>
-                  <a:srgbClr val="FFFFFF"/>
-                </a:solidFill>
-              </a:defRPr>
-            </a:pPr>
-            <a:r>
-              <a:t>申請済</a:t>
-            </a:r>
-          </a:p>
-        </p:txBody>
-      </p:sp>
-      <p:sp>
-        <p:nvSpPr>
-          <p:cNvPr id="4" name="Rectangle 3"/>
-          <p:cNvSpPr/>
-          <p:nvPr/>
-        </p:nvSpPr>
-        <p:spPr>
-          <a:xfrm>
-            <a:off x="2255367" y="3403600"/>
-            <a:ext cx="137160" cy="50800"/>
-          </a:xfrm>
-          <a:prstGeom prst="rect">
-            <a:avLst/>
-          </a:prstGeom>
-          <a:solidFill>
-            <a:srgbClr val="334055"/>
-          </a:solidFill>
-          <a:ln>
-            <a:noFill/>
-          </a:ln>
-        </p:spPr>
-        <p:style>
-          <a:lnRef idx="1">
-            <a:schemeClr val="accent1"/>
-          </a:lnRef>
-          <a:fillRef idx="3">
-            <a:schemeClr val="accent1"/>
-          </a:fillRef>
-          <a:effectRef idx="2">
-            <a:schemeClr val="accent1"/>
-          </a:effectRef>
-          <a:fontRef idx="minor">
-            <a:schemeClr val="lt1"/>
-          </a:fontRef>
-        </p:style>
-        <p:txBody>
-          <a:bodyPr rtlCol="0" anchor="ctr"/>
-          <a:lstStyle/>
-          <a:p>
-            <a:pPr algn="ctr"/>
-          </a:p>
-        </p:txBody>
-      </p:sp>
-      <p:sp>
-        <p:nvSpPr>
-          <p:cNvPr id="5" name="Rounded Rectangle 4"/>
-          <p:cNvSpPr/>
-          <p:nvPr/>
-        </p:nvSpPr>
-        <p:spPr>
-          <a:xfrm>
-            <a:off x="2392527" y="2926080"/>
-            <a:ext cx="1371600" cy="1005840"/>
-          </a:xfrm>
-          <a:prstGeom prst="roundRect">
-            <a:avLst/>
-          </a:prstGeom>
-          <a:solidFill>
-            <a:srgbClr val="7C3AED"/>
-          </a:solidFill>
-          <a:ln>
-            <a:noFill/>
-          </a:ln>
-        </p:spPr>
-        <p:style>
-          <a:lnRef idx="1">
-            <a:schemeClr val="accent1"/>
-          </a:lnRef>
-          <a:fillRef idx="3">
-            <a:schemeClr val="accent1"/>
-          </a:fillRef>
-          <a:effectRef idx="2">
-            <a:schemeClr val="accent1"/>
-          </a:effectRef>
-          <a:fontRef idx="minor">
-            <a:schemeClr val="lt1"/>
-          </a:fontRef>
-        </p:style>
-        <p:txBody>
-          <a:bodyPr rtlCol="0" anchor="ctr" wrap="square"/>
-          <a:lstStyle/>
-          <a:p>
-            <a:pPr algn="ctr">
-              <a:defRPr sz="1300" b="1">
-                <a:solidFill>
-                  <a:srgbClr val="FFFFFF"/>
-                </a:solidFill>
-              </a:defRPr>
-            </a:pPr>
-            <a:r>
-              <a:t>承認済</a:t>
-            </a:r>
-          </a:p>
-        </p:txBody>
-      </p:sp>
-      <p:sp>
-        <p:nvSpPr>
-          <p:cNvPr id="6" name="Rectangle 5"/>
-          <p:cNvSpPr/>
-          <p:nvPr/>
-        </p:nvSpPr>
-        <p:spPr>
-          <a:xfrm>
-            <a:off x="3764127" y="3403600"/>
-            <a:ext cx="137160" cy="50800"/>
-          </a:xfrm>
-          <a:prstGeom prst="rect">
-            <a:avLst/>
-          </a:prstGeom>
-          <a:solidFill>
-            <a:srgbClr val="334055"/>
-          </a:solidFill>
-          <a:ln>
-            <a:noFill/>
-          </a:ln>
-        </p:spPr>
-        <p:style>
-          <a:lnRef idx="1">
-            <a:schemeClr val="accent1"/>
-          </a:lnRef>
-          <a:fillRef idx="3">
-            <a:schemeClr val="accent1"/>
-          </a:fillRef>
-          <a:effectRef idx="2">
-            <a:schemeClr val="accent1"/>
-          </a:effectRef>
-          <a:fontRef idx="minor">
-            <a:schemeClr val="lt1"/>
-          </a:fontRef>
-        </p:style>
-        <p:txBody>
-          <a:bodyPr rtlCol="0" anchor="ctr"/>
-          <a:lstStyle/>
-          <a:p>
-            <a:pPr algn="ctr"/>
-          </a:p>
-        </p:txBody>
-      </p:sp>
-      <p:sp>
-        <p:nvSpPr>
-          <p:cNvPr id="7" name="Rounded Rectangle 6"/>
-          <p:cNvSpPr/>
-          <p:nvPr/>
-        </p:nvSpPr>
-        <p:spPr>
-          <a:xfrm>
-            <a:off x="3901287" y="2926080"/>
-            <a:ext cx="1371600" cy="1005840"/>
-          </a:xfrm>
-          <a:prstGeom prst="roundRect">
-            <a:avLst/>
-          </a:prstGeom>
-          <a:solidFill>
-            <a:srgbClr val="EC4899"/>
-          </a:solidFill>
-          <a:ln>
-            <a:noFill/>
-          </a:ln>
-        </p:spPr>
-        <p:style>
-          <a:lnRef idx="1">
-            <a:schemeClr val="accent1"/>
-          </a:lnRef>
-          <a:fillRef idx="3">
-            <a:schemeClr val="accent1"/>
-          </a:fillRef>
-          <a:effectRef idx="2">
-            <a:schemeClr val="accent1"/>
-          </a:effectRef>
-          <a:fontRef idx="minor">
-            <a:schemeClr val="lt1"/>
-          </a:fontRef>
-        </p:style>
-        <p:txBody>
-          <a:bodyPr rtlCol="0" anchor="ctr" wrap="square"/>
-          <a:lstStyle/>
-          <a:p>
-            <a:pPr algn="ctr">
-              <a:defRPr sz="1300" b="1">
-                <a:solidFill>
-                  <a:srgbClr val="FFFFFF"/>
-                </a:solidFill>
-              </a:defRPr>
-            </a:pPr>
-            <a:r>
-              <a:t>発注済</a:t>
-            </a:r>
-          </a:p>
-        </p:txBody>
-      </p:sp>
-      <p:sp>
-        <p:nvSpPr>
-          <p:cNvPr id="8" name="Rectangle 7"/>
-          <p:cNvSpPr/>
-          <p:nvPr/>
-        </p:nvSpPr>
-        <p:spPr>
-          <a:xfrm>
-            <a:off x="5272887" y="3403600"/>
-            <a:ext cx="137160" cy="50800"/>
-          </a:xfrm>
-          <a:prstGeom prst="rect">
-            <a:avLst/>
-          </a:prstGeom>
-          <a:solidFill>
-            <a:srgbClr val="334055"/>
-          </a:solidFill>
-          <a:ln>
-            <a:noFill/>
-          </a:ln>
-        </p:spPr>
-        <p:style>
-          <a:lnRef idx="1">
-            <a:schemeClr val="accent1"/>
-          </a:lnRef>
-          <a:fillRef idx="3">
-            <a:schemeClr val="accent1"/>
-          </a:fillRef>
-          <a:effectRef idx="2">
-            <a:schemeClr val="accent1"/>
-          </a:effectRef>
-          <a:fontRef idx="minor">
-            <a:schemeClr val="lt1"/>
-          </a:fontRef>
-        </p:style>
-        <p:txBody>
-          <a:bodyPr rtlCol="0" anchor="ctr"/>
-          <a:lstStyle/>
-          <a:p>
-            <a:pPr algn="ctr"/>
-          </a:p>
-        </p:txBody>
-      </p:sp>
-      <p:sp>
-        <p:nvSpPr>
-          <p:cNvPr id="9" name="Rounded Rectangle 8"/>
-          <p:cNvSpPr/>
-          <p:nvPr/>
-        </p:nvSpPr>
-        <p:spPr>
-          <a:xfrm>
-            <a:off x="5410047" y="2926080"/>
-            <a:ext cx="1371600" cy="1005840"/>
-          </a:xfrm>
-          <a:prstGeom prst="roundRect">
-            <a:avLst/>
-          </a:prstGeom>
-          <a:solidFill>
-            <a:srgbClr val="10B981"/>
-          </a:solidFill>
-          <a:ln>
-            <a:noFill/>
-          </a:ln>
-        </p:spPr>
-        <p:style>
-          <a:lnRef idx="1">
-            <a:schemeClr val="accent1"/>
-          </a:lnRef>
-          <a:fillRef idx="3">
-            <a:schemeClr val="accent1"/>
-          </a:fillRef>
-          <a:effectRef idx="2">
-            <a:schemeClr val="accent1"/>
-          </a:effectRef>
-          <a:fontRef idx="minor">
-            <a:schemeClr val="lt1"/>
-          </a:fontRef>
-        </p:style>
-        <p:txBody>
-          <a:bodyPr rtlCol="0" anchor="ctr" wrap="square"/>
-          <a:lstStyle/>
-          <a:p>
-            <a:pPr algn="ctr">
-              <a:defRPr sz="1300" b="1">
-                <a:solidFill>
-                  <a:srgbClr val="FFFFFF"/>
-                </a:solidFill>
-              </a:defRPr>
-            </a:pPr>
-            <a:r>
-              <a:t>検収済</a:t>
-            </a:r>
-          </a:p>
-        </p:txBody>
-      </p:sp>
-      <p:sp>
-        <p:nvSpPr>
-          <p:cNvPr id="10" name="Rectangle 9"/>
-          <p:cNvSpPr/>
-          <p:nvPr/>
-        </p:nvSpPr>
-        <p:spPr>
-          <a:xfrm>
-            <a:off x="6781647" y="3403600"/>
-            <a:ext cx="137160" cy="50800"/>
-          </a:xfrm>
-          <a:prstGeom prst="rect">
-            <a:avLst/>
-          </a:prstGeom>
-          <a:solidFill>
-            <a:srgbClr val="334055"/>
-          </a:solidFill>
-          <a:ln>
-            <a:noFill/>
-          </a:ln>
-        </p:spPr>
-        <p:style>
-          <a:lnRef idx="1">
-            <a:schemeClr val="accent1"/>
-          </a:lnRef>
-          <a:fillRef idx="3">
-            <a:schemeClr val="accent1"/>
-          </a:fillRef>
-          <a:effectRef idx="2">
-            <a:schemeClr val="accent1"/>
-          </a:effectRef>
-          <a:fontRef idx="minor">
-            <a:schemeClr val="lt1"/>
-          </a:fontRef>
-        </p:style>
-        <p:txBody>
-          <a:bodyPr rtlCol="0" anchor="ctr"/>
-          <a:lstStyle/>
-          <a:p>
-            <a:pPr algn="ctr"/>
-          </a:p>
-        </p:txBody>
-      </p:sp>
-      <p:sp>
-        <p:nvSpPr>
-          <p:cNvPr id="11" name="Rounded Rectangle 10"/>
-          <p:cNvSpPr/>
-          <p:nvPr/>
-        </p:nvSpPr>
-        <p:spPr>
-          <a:xfrm>
-            <a:off x="6918807" y="2926080"/>
-            <a:ext cx="1371600" cy="1005840"/>
-          </a:xfrm>
-          <a:prstGeom prst="roundRect">
-            <a:avLst/>
-          </a:prstGeom>
-          <a:solidFill>
-            <a:srgbClr val="F59E0B"/>
-          </a:solidFill>
-          <a:ln>
-            <a:noFill/>
-          </a:ln>
-        </p:spPr>
-        <p:style>
-          <a:lnRef idx="1">
-            <a:schemeClr val="accent1"/>
-          </a:lnRef>
-          <a:fillRef idx="3">
-            <a:schemeClr val="accent1"/>
-          </a:fillRef>
-          <a:effectRef idx="2">
-            <a:schemeClr val="accent1"/>
-          </a:effectRef>
-          <a:fontRef idx="minor">
-            <a:schemeClr val="lt1"/>
-          </a:fontRef>
-        </p:style>
-        <p:txBody>
-          <a:bodyPr rtlCol="0" anchor="ctr" wrap="square"/>
-          <a:lstStyle/>
-          <a:p>
-            <a:pPr algn="ctr">
-              <a:defRPr sz="1300" b="1">
-                <a:solidFill>
-                  <a:srgbClr val="FFFFFF"/>
-                </a:solidFill>
-              </a:defRPr>
-            </a:pPr>
-            <a:r>
-              <a:t>証憑完了</a:t>
-            </a:r>
-          </a:p>
-        </p:txBody>
-      </p:sp>
-      <p:sp>
-        <p:nvSpPr>
-          <p:cNvPr id="12" name="Rectangle 11"/>
-          <p:cNvSpPr/>
-          <p:nvPr/>
-        </p:nvSpPr>
-        <p:spPr>
-          <a:xfrm>
-            <a:off x="8290407" y="3403600"/>
-            <a:ext cx="137160" cy="50800"/>
-          </a:xfrm>
-          <a:prstGeom prst="rect">
-            <a:avLst/>
-          </a:prstGeom>
-          <a:solidFill>
-            <a:srgbClr val="334055"/>
-          </a:solidFill>
-          <a:ln>
-            <a:noFill/>
-          </a:ln>
-        </p:spPr>
-        <p:style>
-          <a:lnRef idx="1">
-            <a:schemeClr val="accent1"/>
-          </a:lnRef>
-          <a:fillRef idx="3">
-            <a:schemeClr val="accent1"/>
-          </a:fillRef>
-          <a:effectRef idx="2">
-            <a:schemeClr val="accent1"/>
-          </a:effectRef>
-          <a:fontRef idx="minor">
-            <a:schemeClr val="lt1"/>
-          </a:fontRef>
-        </p:style>
-        <p:txBody>
-          <a:bodyPr rtlCol="0" anchor="ctr"/>
-          <a:lstStyle/>
-          <a:p>
-            <a:pPr algn="ctr"/>
-          </a:p>
-        </p:txBody>
-      </p:sp>
-      <p:sp>
-        <p:nvSpPr>
-          <p:cNvPr id="13" name="Rounded Rectangle 12"/>
-          <p:cNvSpPr/>
-          <p:nvPr/>
-        </p:nvSpPr>
-        <p:spPr>
-          <a:xfrm>
-            <a:off x="8427567" y="2926080"/>
-            <a:ext cx="1371600" cy="1005840"/>
-          </a:xfrm>
-          <a:prstGeom prst="roundRect">
-            <a:avLst/>
-          </a:prstGeom>
-          <a:solidFill>
-            <a:srgbClr val="00D4FF"/>
-          </a:solidFill>
-          <a:ln>
-            <a:noFill/>
-          </a:ln>
-        </p:spPr>
-        <p:style>
-          <a:lnRef idx="1">
-            <a:schemeClr val="accent1"/>
-          </a:lnRef>
-          <a:fillRef idx="3">
-            <a:schemeClr val="accent1"/>
-          </a:fillRef>
-          <a:effectRef idx="2">
-            <a:schemeClr val="accent1"/>
-          </a:effectRef>
-          <a:fontRef idx="minor">
-            <a:schemeClr val="lt1"/>
-          </a:fontRef>
-        </p:style>
-        <p:txBody>
-          <a:bodyPr rtlCol="0" anchor="ctr" wrap="square"/>
-          <a:lstStyle/>
-          <a:p>
-            <a:pPr algn="ctr">
-              <a:defRPr sz="1300" b="1">
-                <a:solidFill>
-                  <a:srgbClr val="FFFFFF"/>
-                </a:solidFill>
-              </a:defRPr>
-            </a:pPr>
-            <a:r>
-              <a:t>計上済</a:t>
-            </a:r>
-          </a:p>
-        </p:txBody>
-      </p:sp>
-      <p:sp>
-        <p:nvSpPr>
-          <p:cNvPr id="14" name="Rectangle 13"/>
-          <p:cNvSpPr/>
-          <p:nvPr/>
-        </p:nvSpPr>
-        <p:spPr>
-          <a:xfrm>
-            <a:off x="9799167" y="3403600"/>
-            <a:ext cx="137160" cy="50800"/>
-          </a:xfrm>
-          <a:prstGeom prst="rect">
-            <a:avLst/>
-          </a:prstGeom>
-          <a:solidFill>
-            <a:srgbClr val="334055"/>
-          </a:solidFill>
-          <a:ln>
-            <a:noFill/>
-          </a:ln>
-        </p:spPr>
-        <p:style>
-          <a:lnRef idx="1">
-            <a:schemeClr val="accent1"/>
-          </a:lnRef>
-          <a:fillRef idx="3">
-            <a:schemeClr val="accent1"/>
-          </a:fillRef>
-          <a:effectRef idx="2">
-            <a:schemeClr val="accent1"/>
-          </a:effectRef>
-          <a:fontRef idx="minor">
-            <a:schemeClr val="lt1"/>
-          </a:fontRef>
-        </p:style>
-        <p:txBody>
-          <a:bodyPr rtlCol="0" anchor="ctr"/>
-          <a:lstStyle/>
-          <a:p>
-            <a:pPr algn="ctr"/>
-          </a:p>
-        </p:txBody>
-      </p:sp>
-      <p:sp>
-        <p:nvSpPr>
-          <p:cNvPr id="15" name="Rounded Rectangle 14"/>
-          <p:cNvSpPr/>
-          <p:nvPr/>
-        </p:nvSpPr>
-        <p:spPr>
-          <a:xfrm>
-            <a:off x="9936327" y="2926080"/>
-            <a:ext cx="1371600" cy="1005840"/>
-          </a:xfrm>
-          <a:prstGeom prst="roundRect">
-            <a:avLst/>
-          </a:prstGeom>
-          <a:solidFill>
-            <a:srgbClr val="7C3AED"/>
-          </a:solidFill>
-          <a:ln>
-            <a:noFill/>
-          </a:ln>
-        </p:spPr>
-        <p:style>
-          <a:lnRef idx="1">
-            <a:schemeClr val="accent1"/>
-          </a:lnRef>
-          <a:fillRef idx="3">
-            <a:schemeClr val="accent1"/>
-          </a:fillRef>
-          <a:effectRef idx="2">
-            <a:schemeClr val="accent1"/>
-          </a:effectRef>
-          <a:fontRef idx="minor">
-            <a:schemeClr val="lt1"/>
-          </a:fontRef>
-        </p:style>
-        <p:txBody>
-          <a:bodyPr rtlCol="0" anchor="ctr" wrap="square"/>
-          <a:lstStyle/>
-          <a:p>
-            <a:pPr algn="ctr">
-              <a:defRPr sz="1300" b="1">
-                <a:solidFill>
-                  <a:srgbClr val="FFFFFF"/>
-                </a:solidFill>
-              </a:defRPr>
-            </a:pPr>
-            <a:r>
-              <a:t>支払済</a:t>
-            </a:r>
-          </a:p>
-        </p:txBody>
-      </p:sp>
-    </p:spTree>
-  </p:cSld>
-  <p:clrMapOvr>
-    <a:masterClrMapping/>
-  </p:clrMapOvr>
-</p:sld>
-</file>
-
-<file path=ppt/slides/slide28.xml><?xml version="1.0" encoding="utf-8"?>
-<p:sld xmlns:a="http://schemas.openxmlformats.org/drawingml/2006/main" xmlns:p="http://schemas.openxmlformats.org/presentationml/2006/main" xmlns:r="http://schemas.openxmlformats.org/officeDocument/2006/relationships">
-  <p:cSld>
-    <p:bg>
-      <p:bgPr>
-        <a:solidFill>
-          <a:srgbClr val="0F0F1A"/>
-        </a:solidFill>
-        <a:effectLst/>
-      </p:bgPr>
-    </p:bg>
-    <p:spTree>
-      <p:nvGrpSpPr>
-        <p:cNvPr id="1" name=""/>
-        <p:cNvGrpSpPr/>
-        <p:nvPr/>
-      </p:nvGrpSpPr>
-      <p:grpSpPr/>
-      <p:sp>
-        <p:nvSpPr>
-          <p:cNvPr id="2" name="TextBox 1"/>
-          <p:cNvSpPr txBox="1"/>
-          <p:nvPr/>
-        </p:nvSpPr>
-        <p:spPr>
-          <a:xfrm>
-            <a:off x="1371600" y="640080"/>
-            <a:ext cx="9144000" cy="914400"/>
-          </a:xfrm>
-          <a:prstGeom prst="rect">
-            <a:avLst/>
-          </a:prstGeom>
-          <a:noFill/>
-        </p:spPr>
-        <p:txBody>
-          <a:bodyPr wrap="none">
-            <a:spAutoFit/>
-          </a:bodyPr>
-          <a:lstStyle/>
-          <a:p>
-            <a:pPr>
-              <a:defRPr sz="3200" b="1">
-                <a:solidFill>
-                  <a:srgbClr val="FFFFFF"/>
-                </a:solidFill>
-              </a:defRPr>
-            </a:pPr>
-            <a:r>
-              <a:t>高額フロー（10万以上）</a:t>
-            </a:r>
-          </a:p>
-        </p:txBody>
-      </p:sp>
-      <p:sp>
-        <p:nvSpPr>
-          <p:cNvPr id="3" name="Rounded Rectangle 2"/>
-          <p:cNvSpPr/>
-          <p:nvPr/>
-        </p:nvSpPr>
-        <p:spPr>
-          <a:xfrm>
-            <a:off x="883767" y="2926080"/>
-            <a:ext cx="1371600" cy="1005840"/>
-          </a:xfrm>
-          <a:prstGeom prst="roundRect">
-            <a:avLst/>
-          </a:prstGeom>
-          <a:solidFill>
-            <a:srgbClr val="00D4FF"/>
-          </a:solidFill>
-          <a:ln>
-            <a:noFill/>
-          </a:ln>
-        </p:spPr>
-        <p:style>
-          <a:lnRef idx="1">
-            <a:schemeClr val="accent1"/>
-          </a:lnRef>
-          <a:fillRef idx="3">
-            <a:schemeClr val="accent1"/>
-          </a:fillRef>
-          <a:effectRef idx="2">
-            <a:schemeClr val="accent1"/>
-          </a:effectRef>
-          <a:fontRef idx="minor">
-            <a:schemeClr val="lt1"/>
-          </a:fontRef>
-        </p:style>
-        <p:txBody>
-          <a:bodyPr rtlCol="0" anchor="ctr" wrap="square"/>
-          <a:lstStyle/>
-          <a:p>
-            <a:pPr algn="ctr">
-              <a:defRPr sz="1300" b="1">
-                <a:solidFill>
-                  <a:srgbClr val="FFFFFF"/>
-                </a:solidFill>
-              </a:defRPr>
-            </a:pPr>
-            <a:r>
-              <a:t>申請済</a:t>
-            </a:r>
-          </a:p>
-        </p:txBody>
-      </p:sp>
-      <p:sp>
-        <p:nvSpPr>
-          <p:cNvPr id="4" name="Rectangle 3"/>
-          <p:cNvSpPr/>
-          <p:nvPr/>
-        </p:nvSpPr>
-        <p:spPr>
-          <a:xfrm>
-            <a:off x="2255367" y="3403600"/>
-            <a:ext cx="137160" cy="50800"/>
-          </a:xfrm>
-          <a:prstGeom prst="rect">
-            <a:avLst/>
-          </a:prstGeom>
-          <a:solidFill>
-            <a:srgbClr val="334055"/>
-          </a:solidFill>
-          <a:ln>
-            <a:noFill/>
-          </a:ln>
-        </p:spPr>
-        <p:style>
-          <a:lnRef idx="1">
-            <a:schemeClr val="accent1"/>
-          </a:lnRef>
-          <a:fillRef idx="3">
-            <a:schemeClr val="accent1"/>
-          </a:fillRef>
-          <a:effectRef idx="2">
-            <a:schemeClr val="accent1"/>
-          </a:effectRef>
-          <a:fontRef idx="minor">
-            <a:schemeClr val="lt1"/>
-          </a:fontRef>
-        </p:style>
-        <p:txBody>
-          <a:bodyPr rtlCol="0" anchor="ctr"/>
-          <a:lstStyle/>
-          <a:p>
-            <a:pPr algn="ctr"/>
-          </a:p>
-        </p:txBody>
-      </p:sp>
-      <p:sp>
-        <p:nvSpPr>
-          <p:cNvPr id="5" name="Rounded Rectangle 4"/>
-          <p:cNvSpPr/>
-          <p:nvPr/>
-        </p:nvSpPr>
-        <p:spPr>
-          <a:xfrm>
-            <a:off x="2392527" y="2926080"/>
-            <a:ext cx="1371600" cy="1005840"/>
-          </a:xfrm>
-          <a:prstGeom prst="roundRect">
-            <a:avLst/>
-          </a:prstGeom>
-          <a:solidFill>
-            <a:srgbClr val="7C3AED"/>
-          </a:solidFill>
-          <a:ln>
-            <a:noFill/>
-          </a:ln>
-        </p:spPr>
-        <p:style>
-          <a:lnRef idx="1">
-            <a:schemeClr val="accent1"/>
-          </a:lnRef>
-          <a:fillRef idx="3">
-            <a:schemeClr val="accent1"/>
-          </a:fillRef>
-          <a:effectRef idx="2">
-            <a:schemeClr val="accent1"/>
-          </a:effectRef>
-          <a:fontRef idx="minor">
-            <a:schemeClr val="lt1"/>
-          </a:fontRef>
-        </p:style>
-        <p:txBody>
-          <a:bodyPr rtlCol="0" anchor="ctr" wrap="square"/>
-          <a:lstStyle/>
-          <a:p>
-            <a:pPr algn="ctr">
-              <a:defRPr sz="1300" b="1">
-                <a:solidFill>
-                  <a:srgbClr val="FFFFFF"/>
-                </a:solidFill>
-              </a:defRPr>
-            </a:pPr>
-            <a:r>
-              <a:t>部門長</a:t>
-            </a:r>
-            <a:br/>
-            <a:r>
-              <a:t>承認済</a:t>
-            </a:r>
-          </a:p>
-        </p:txBody>
-      </p:sp>
-      <p:sp>
-        <p:nvSpPr>
-          <p:cNvPr id="6" name="Rectangle 5"/>
-          <p:cNvSpPr/>
-          <p:nvPr/>
-        </p:nvSpPr>
-        <p:spPr>
-          <a:xfrm>
-            <a:off x="3764127" y="3403600"/>
-            <a:ext cx="137160" cy="50800"/>
-          </a:xfrm>
-          <a:prstGeom prst="rect">
-            <a:avLst/>
-          </a:prstGeom>
-          <a:solidFill>
-            <a:srgbClr val="334055"/>
-          </a:solidFill>
-          <a:ln>
-            <a:noFill/>
-          </a:ln>
-        </p:spPr>
-        <p:style>
-          <a:lnRef idx="1">
-            <a:schemeClr val="accent1"/>
-          </a:lnRef>
-          <a:fillRef idx="3">
-            <a:schemeClr val="accent1"/>
-          </a:fillRef>
-          <a:effectRef idx="2">
-            <a:schemeClr val="accent1"/>
-          </a:effectRef>
-          <a:fontRef idx="minor">
-            <a:schemeClr val="lt1"/>
-          </a:fontRef>
-        </p:style>
-        <p:txBody>
-          <a:bodyPr rtlCol="0" anchor="ctr"/>
-          <a:lstStyle/>
-          <a:p>
-            <a:pPr algn="ctr"/>
-          </a:p>
-        </p:txBody>
-      </p:sp>
-      <p:sp>
-        <p:nvSpPr>
-          <p:cNvPr id="7" name="Rounded Rectangle 6"/>
-          <p:cNvSpPr/>
-          <p:nvPr/>
-        </p:nvSpPr>
-        <p:spPr>
-          <a:xfrm>
-            <a:off x="3901287" y="2926080"/>
-            <a:ext cx="1371600" cy="1005840"/>
-          </a:xfrm>
-          <a:prstGeom prst="roundRect">
-            <a:avLst/>
-          </a:prstGeom>
-          <a:solidFill>
-            <a:srgbClr val="EC4899"/>
-          </a:solidFill>
-          <a:ln>
-            <a:noFill/>
-          </a:ln>
-        </p:spPr>
-        <p:style>
-          <a:lnRef idx="1">
-            <a:schemeClr val="accent1"/>
-          </a:lnRef>
-          <a:fillRef idx="3">
-            <a:schemeClr val="accent1"/>
-          </a:fillRef>
-          <a:effectRef idx="2">
-            <a:schemeClr val="accent1"/>
-          </a:effectRef>
-          <a:fontRef idx="minor">
-            <a:schemeClr val="lt1"/>
-          </a:fontRef>
-        </p:style>
-        <p:txBody>
-          <a:bodyPr rtlCol="0" anchor="ctr" wrap="square"/>
-          <a:lstStyle/>
-          <a:p>
-            <a:pPr algn="ctr">
-              <a:defRPr sz="1300" b="1">
-                <a:solidFill>
-                  <a:srgbClr val="FFFFFF"/>
-                </a:solidFill>
-              </a:defRPr>
-            </a:pPr>
-            <a:r>
-              <a:t>管理本部</a:t>
-            </a:r>
-            <a:br/>
-            <a:r>
-              <a:t>承認済</a:t>
-            </a:r>
-          </a:p>
-        </p:txBody>
-      </p:sp>
-      <p:sp>
-        <p:nvSpPr>
-          <p:cNvPr id="8" name="Rectangle 7"/>
-          <p:cNvSpPr/>
-          <p:nvPr/>
-        </p:nvSpPr>
-        <p:spPr>
-          <a:xfrm>
-            <a:off x="5272887" y="3403600"/>
-            <a:ext cx="137160" cy="50800"/>
-          </a:xfrm>
-          <a:prstGeom prst="rect">
-            <a:avLst/>
-          </a:prstGeom>
-          <a:solidFill>
-            <a:srgbClr val="334055"/>
-          </a:solidFill>
-          <a:ln>
-            <a:noFill/>
-          </a:ln>
-        </p:spPr>
-        <p:style>
-          <a:lnRef idx="1">
-            <a:schemeClr val="accent1"/>
-          </a:lnRef>
-          <a:fillRef idx="3">
-            <a:schemeClr val="accent1"/>
-          </a:fillRef>
-          <a:effectRef idx="2">
-            <a:schemeClr val="accent1"/>
-          </a:effectRef>
-          <a:fontRef idx="minor">
-            <a:schemeClr val="lt1"/>
-          </a:fontRef>
-        </p:style>
-        <p:txBody>
-          <a:bodyPr rtlCol="0" anchor="ctr"/>
-          <a:lstStyle/>
-          <a:p>
-            <a:pPr algn="ctr"/>
-          </a:p>
-        </p:txBody>
-      </p:sp>
-      <p:sp>
-        <p:nvSpPr>
-          <p:cNvPr id="9" name="Rounded Rectangle 8"/>
-          <p:cNvSpPr/>
-          <p:nvPr/>
-        </p:nvSpPr>
-        <p:spPr>
-          <a:xfrm>
-            <a:off x="5410047" y="2926080"/>
-            <a:ext cx="1371600" cy="1005840"/>
-          </a:xfrm>
-          <a:prstGeom prst="roundRect">
-            <a:avLst/>
-          </a:prstGeom>
-          <a:solidFill>
-            <a:srgbClr val="10B981"/>
-          </a:solidFill>
-          <a:ln>
-            <a:noFill/>
-          </a:ln>
-        </p:spPr>
-        <p:style>
-          <a:lnRef idx="1">
-            <a:schemeClr val="accent1"/>
-          </a:lnRef>
-          <a:fillRef idx="3">
-            <a:schemeClr val="accent1"/>
-          </a:fillRef>
-          <a:effectRef idx="2">
-            <a:schemeClr val="accent1"/>
-          </a:effectRef>
-          <a:fontRef idx="minor">
-            <a:schemeClr val="lt1"/>
-          </a:fontRef>
-        </p:style>
-        <p:txBody>
-          <a:bodyPr rtlCol="0" anchor="ctr" wrap="square"/>
-          <a:lstStyle/>
-          <a:p>
-            <a:pPr algn="ctr">
-              <a:defRPr sz="1300" b="1">
-                <a:solidFill>
-                  <a:srgbClr val="FFFFFF"/>
-                </a:solidFill>
-              </a:defRPr>
-            </a:pPr>
-            <a:r>
-              <a:t>発注済</a:t>
-            </a:r>
-          </a:p>
-        </p:txBody>
-      </p:sp>
-      <p:sp>
-        <p:nvSpPr>
-          <p:cNvPr id="10" name="Rectangle 9"/>
-          <p:cNvSpPr/>
-          <p:nvPr/>
-        </p:nvSpPr>
-        <p:spPr>
-          <a:xfrm>
-            <a:off x="6781647" y="3403600"/>
-            <a:ext cx="137160" cy="50800"/>
-          </a:xfrm>
-          <a:prstGeom prst="rect">
-            <a:avLst/>
-          </a:prstGeom>
-          <a:solidFill>
-            <a:srgbClr val="334055"/>
-          </a:solidFill>
-          <a:ln>
-            <a:noFill/>
-          </a:ln>
-        </p:spPr>
-        <p:style>
-          <a:lnRef idx="1">
-            <a:schemeClr val="accent1"/>
-          </a:lnRef>
-          <a:fillRef idx="3">
-            <a:schemeClr val="accent1"/>
-          </a:fillRef>
-          <a:effectRef idx="2">
-            <a:schemeClr val="accent1"/>
-          </a:effectRef>
-          <a:fontRef idx="minor">
-            <a:schemeClr val="lt1"/>
-          </a:fontRef>
-        </p:style>
-        <p:txBody>
-          <a:bodyPr rtlCol="0" anchor="ctr"/>
-          <a:lstStyle/>
-          <a:p>
-            <a:pPr algn="ctr"/>
-          </a:p>
-        </p:txBody>
-      </p:sp>
-      <p:sp>
-        <p:nvSpPr>
-          <p:cNvPr id="11" name="Rounded Rectangle 10"/>
-          <p:cNvSpPr/>
-          <p:nvPr/>
-        </p:nvSpPr>
-        <p:spPr>
-          <a:xfrm>
-            <a:off x="6918807" y="2926080"/>
-            <a:ext cx="1371600" cy="1005840"/>
-          </a:xfrm>
-          <a:prstGeom prst="roundRect">
-            <a:avLst/>
-          </a:prstGeom>
-          <a:solidFill>
-            <a:srgbClr val="10B981"/>
-          </a:solidFill>
-          <a:ln>
-            <a:noFill/>
-          </a:ln>
-        </p:spPr>
-        <p:style>
-          <a:lnRef idx="1">
-            <a:schemeClr val="accent1"/>
-          </a:lnRef>
-          <a:fillRef idx="3">
-            <a:schemeClr val="accent1"/>
-          </a:fillRef>
-          <a:effectRef idx="2">
-            <a:schemeClr val="accent1"/>
-          </a:effectRef>
-          <a:fontRef idx="minor">
-            <a:schemeClr val="lt1"/>
-          </a:fontRef>
-        </p:style>
-        <p:txBody>
-          <a:bodyPr rtlCol="0" anchor="ctr" wrap="square"/>
-          <a:lstStyle/>
-          <a:p>
-            <a:pPr algn="ctr">
-              <a:defRPr sz="1300" b="1">
-                <a:solidFill>
-                  <a:srgbClr val="FFFFFF"/>
-                </a:solidFill>
-              </a:defRPr>
-            </a:pPr>
-            <a:r>
-              <a:t>検収済</a:t>
-            </a:r>
-          </a:p>
-        </p:txBody>
-      </p:sp>
-      <p:sp>
-        <p:nvSpPr>
-          <p:cNvPr id="12" name="Rectangle 11"/>
-          <p:cNvSpPr/>
-          <p:nvPr/>
-        </p:nvSpPr>
-        <p:spPr>
-          <a:xfrm>
-            <a:off x="8290407" y="3403600"/>
-            <a:ext cx="137160" cy="50800"/>
-          </a:xfrm>
-          <a:prstGeom prst="rect">
-            <a:avLst/>
-          </a:prstGeom>
-          <a:solidFill>
-            <a:srgbClr val="334055"/>
-          </a:solidFill>
-          <a:ln>
-            <a:noFill/>
-          </a:ln>
-        </p:spPr>
-        <p:style>
-          <a:lnRef idx="1">
-            <a:schemeClr val="accent1"/>
-          </a:lnRef>
-          <a:fillRef idx="3">
-            <a:schemeClr val="accent1"/>
-          </a:fillRef>
-          <a:effectRef idx="2">
-            <a:schemeClr val="accent1"/>
-          </a:effectRef>
-          <a:fontRef idx="minor">
-            <a:schemeClr val="lt1"/>
-          </a:fontRef>
-        </p:style>
-        <p:txBody>
-          <a:bodyPr rtlCol="0" anchor="ctr"/>
-          <a:lstStyle/>
-          <a:p>
-            <a:pPr algn="ctr"/>
-          </a:p>
-        </p:txBody>
-      </p:sp>
-      <p:sp>
-        <p:nvSpPr>
-          <p:cNvPr id="13" name="Rounded Rectangle 12"/>
-          <p:cNvSpPr/>
-          <p:nvPr/>
-        </p:nvSpPr>
-        <p:spPr>
-          <a:xfrm>
-            <a:off x="8427567" y="2926080"/>
-            <a:ext cx="1371600" cy="1005840"/>
-          </a:xfrm>
-          <a:prstGeom prst="roundRect">
-            <a:avLst/>
-          </a:prstGeom>
-          <a:solidFill>
-            <a:srgbClr val="F59E0B"/>
-          </a:solidFill>
-          <a:ln>
-            <a:noFill/>
-          </a:ln>
-        </p:spPr>
-        <p:style>
-          <a:lnRef idx="1">
-            <a:schemeClr val="accent1"/>
-          </a:lnRef>
-          <a:fillRef idx="3">
-            <a:schemeClr val="accent1"/>
-          </a:fillRef>
-          <a:effectRef idx="2">
-            <a:schemeClr val="accent1"/>
-          </a:effectRef>
-          <a:fontRef idx="minor">
-            <a:schemeClr val="lt1"/>
-          </a:fontRef>
-        </p:style>
-        <p:txBody>
-          <a:bodyPr rtlCol="0" anchor="ctr" wrap="square"/>
-          <a:lstStyle/>
-          <a:p>
-            <a:pPr algn="ctr">
-              <a:defRPr sz="1300" b="1">
-                <a:solidFill>
-                  <a:srgbClr val="FFFFFF"/>
-                </a:solidFill>
-              </a:defRPr>
-            </a:pPr>
-            <a:r>
-              <a:t>証憑完了</a:t>
-            </a:r>
-          </a:p>
-        </p:txBody>
-      </p:sp>
-      <p:sp>
-        <p:nvSpPr>
-          <p:cNvPr id="14" name="Rectangle 13"/>
-          <p:cNvSpPr/>
-          <p:nvPr/>
-        </p:nvSpPr>
-        <p:spPr>
-          <a:xfrm>
-            <a:off x="9799167" y="3403600"/>
-            <a:ext cx="137160" cy="50800"/>
-          </a:xfrm>
-          <a:prstGeom prst="rect">
-            <a:avLst/>
-          </a:prstGeom>
-          <a:solidFill>
-            <a:srgbClr val="334055"/>
-          </a:solidFill>
-          <a:ln>
-            <a:noFill/>
-          </a:ln>
-        </p:spPr>
-        <p:style>
-          <a:lnRef idx="1">
-            <a:schemeClr val="accent1"/>
-          </a:lnRef>
-          <a:fillRef idx="3">
-            <a:schemeClr val="accent1"/>
-          </a:fillRef>
-          <a:effectRef idx="2">
-            <a:schemeClr val="accent1"/>
-          </a:effectRef>
-          <a:fontRef idx="minor">
-            <a:schemeClr val="lt1"/>
-          </a:fontRef>
-        </p:style>
-        <p:txBody>
-          <a:bodyPr rtlCol="0" anchor="ctr"/>
-          <a:lstStyle/>
-          <a:p>
-            <a:pPr algn="ctr"/>
-          </a:p>
-        </p:txBody>
-      </p:sp>
-      <p:sp>
-        <p:nvSpPr>
-          <p:cNvPr id="15" name="Rounded Rectangle 14"/>
-          <p:cNvSpPr/>
-          <p:nvPr/>
-        </p:nvSpPr>
-        <p:spPr>
-          <a:xfrm>
-            <a:off x="9936327" y="2926080"/>
-            <a:ext cx="1371600" cy="1005840"/>
-          </a:xfrm>
-          <a:prstGeom prst="roundRect">
-            <a:avLst/>
-          </a:prstGeom>
-          <a:solidFill>
-            <a:srgbClr val="10B981"/>
-          </a:solidFill>
-          <a:ln>
-            <a:noFill/>
-          </a:ln>
-        </p:spPr>
-        <p:style>
-          <a:lnRef idx="1">
-            <a:schemeClr val="accent1"/>
-          </a:lnRef>
-          <a:fillRef idx="3">
-            <a:schemeClr val="accent1"/>
-          </a:fillRef>
-          <a:effectRef idx="2">
-            <a:schemeClr val="accent1"/>
-          </a:effectRef>
-          <a:fontRef idx="minor">
-            <a:schemeClr val="lt1"/>
-          </a:fontRef>
-        </p:style>
-        <p:txBody>
-          <a:bodyPr rtlCol="0" anchor="ctr" wrap="square"/>
-          <a:lstStyle/>
-          <a:p>
-            <a:pPr algn="ctr">
-              <a:defRPr sz="1300" b="1">
-                <a:solidFill>
-                  <a:srgbClr val="FFFFFF"/>
-                </a:solidFill>
-              </a:defRPr>
-            </a:pPr>
-            <a:r>
-              <a:t>計上済</a:t>
-            </a:r>
-          </a:p>
-        </p:txBody>
-      </p:sp>
-    </p:spTree>
-  </p:cSld>
-  <p:clrMapOvr>
-    <a:masterClrMapping/>
-  </p:clrMapOvr>
-</p:sld>
-</file>
-
-<file path=ppt/slides/slide29.xml><?xml version="1.0" encoding="utf-8"?>
-<p:sld xmlns:a="http://schemas.openxmlformats.org/drawingml/2006/main" xmlns:p="http://schemas.openxmlformats.org/presentationml/2006/main" xmlns:r="http://schemas.openxmlformats.org/officeDocument/2006/relationships">
-  <p:cSld>
-    <p:bg>
-      <p:bgPr>
-        <a:solidFill>
-          <a:srgbClr val="0F0F1A"/>
-        </a:solidFill>
-        <a:effectLst/>
-      </p:bgPr>
-    </p:bg>
-    <p:spTree>
-      <p:nvGrpSpPr>
-        <p:cNvPr id="1" name=""/>
-        <p:cNvGrpSpPr/>
-        <p:nvPr/>
-      </p:nvGrpSpPr>
-      <p:grpSpPr/>
-      <p:sp>
-        <p:nvSpPr>
-          <p:cNvPr id="2" name="TextBox 1"/>
-          <p:cNvSpPr txBox="1"/>
-          <p:nvPr/>
-        </p:nvSpPr>
-        <p:spPr>
-          <a:xfrm>
-            <a:off x="1371600" y="640080"/>
-            <a:ext cx="9144000" cy="914400"/>
-          </a:xfrm>
-          <a:prstGeom prst="rect">
-            <a:avLst/>
-          </a:prstGeom>
-          <a:noFill/>
-        </p:spPr>
-        <p:txBody>
-          <a:bodyPr wrap="none">
-            <a:spAutoFit/>
-          </a:bodyPr>
-          <a:lstStyle/>
-          <a:p>
-            <a:pPr>
-              <a:defRPr sz="3200" b="1">
-                <a:solidFill>
-                  <a:srgbClr val="FFFFFF"/>
-                </a:solidFill>
-              </a:defRPr>
-            </a:pPr>
-            <a:r>
-              <a:t>購入済フロー（立替）</a:t>
-            </a:r>
-          </a:p>
-        </p:txBody>
-      </p:sp>
-      <p:sp>
-        <p:nvSpPr>
-          <p:cNvPr id="3" name="Rounded Rectangle 2"/>
-          <p:cNvSpPr/>
-          <p:nvPr/>
-        </p:nvSpPr>
-        <p:spPr>
-          <a:xfrm>
-            <a:off x="1638147" y="2926080"/>
-            <a:ext cx="1371600" cy="1005840"/>
-          </a:xfrm>
-          <a:prstGeom prst="roundRect">
-            <a:avLst/>
-          </a:prstGeom>
-          <a:solidFill>
-            <a:srgbClr val="EC4899"/>
-          </a:solidFill>
-          <a:ln>
-            <a:noFill/>
-          </a:ln>
-        </p:spPr>
-        <p:style>
-          <a:lnRef idx="1">
-            <a:schemeClr val="accent1"/>
-          </a:lnRef>
-          <a:fillRef idx="3">
-            <a:schemeClr val="accent1"/>
-          </a:fillRef>
-          <a:effectRef idx="2">
-            <a:schemeClr val="accent1"/>
-          </a:effectRef>
-          <a:fontRef idx="minor">
-            <a:schemeClr val="lt1"/>
-          </a:fontRef>
-        </p:style>
-        <p:txBody>
-          <a:bodyPr rtlCol="0" anchor="ctr" wrap="square"/>
-          <a:lstStyle/>
-          <a:p>
-            <a:pPr algn="ctr">
-              <a:defRPr sz="1300" b="1">
-                <a:solidFill>
-                  <a:srgbClr val="FFFFFF"/>
-                </a:solidFill>
-              </a:defRPr>
-            </a:pPr>
-            <a:r>
-              <a:t>申請済</a:t>
-            </a:r>
-            <a:br/>
-            <a:r>
-              <a:t>+証憑</a:t>
-            </a:r>
-          </a:p>
-        </p:txBody>
-      </p:sp>
-      <p:sp>
-        <p:nvSpPr>
-          <p:cNvPr id="4" name="Rectangle 3"/>
-          <p:cNvSpPr/>
-          <p:nvPr/>
-        </p:nvSpPr>
-        <p:spPr>
-          <a:xfrm>
-            <a:off x="3009747" y="3403600"/>
-            <a:ext cx="137160" cy="50800"/>
-          </a:xfrm>
-          <a:prstGeom prst="rect">
-            <a:avLst/>
-          </a:prstGeom>
-          <a:solidFill>
-            <a:srgbClr val="334055"/>
-          </a:solidFill>
-          <a:ln>
-            <a:noFill/>
-          </a:ln>
-        </p:spPr>
-        <p:style>
-          <a:lnRef idx="1">
-            <a:schemeClr val="accent1"/>
-          </a:lnRef>
-          <a:fillRef idx="3">
-            <a:schemeClr val="accent1"/>
-          </a:fillRef>
-          <a:effectRef idx="2">
-            <a:schemeClr val="accent1"/>
-          </a:effectRef>
-          <a:fontRef idx="minor">
-            <a:schemeClr val="lt1"/>
-          </a:fontRef>
-        </p:style>
-        <p:txBody>
-          <a:bodyPr rtlCol="0" anchor="ctr"/>
-          <a:lstStyle/>
-          <a:p>
-            <a:pPr algn="ctr"/>
-          </a:p>
-        </p:txBody>
-      </p:sp>
-      <p:sp>
-        <p:nvSpPr>
-          <p:cNvPr id="5" name="Rounded Rectangle 4"/>
-          <p:cNvSpPr/>
-          <p:nvPr/>
-        </p:nvSpPr>
-        <p:spPr>
-          <a:xfrm>
-            <a:off x="3146907" y="2926080"/>
-            <a:ext cx="1371600" cy="1005840"/>
-          </a:xfrm>
-          <a:prstGeom prst="roundRect">
-            <a:avLst/>
-          </a:prstGeom>
-          <a:solidFill>
-            <a:srgbClr val="7C3AED"/>
-          </a:solidFill>
-          <a:ln>
-            <a:noFill/>
-          </a:ln>
-        </p:spPr>
-        <p:style>
-          <a:lnRef idx="1">
-            <a:schemeClr val="accent1"/>
-          </a:lnRef>
-          <a:fillRef idx="3">
-            <a:schemeClr val="accent1"/>
-          </a:fillRef>
-          <a:effectRef idx="2">
-            <a:schemeClr val="accent1"/>
-          </a:effectRef>
-          <a:fontRef idx="minor">
-            <a:schemeClr val="lt1"/>
-          </a:fontRef>
-        </p:style>
-        <p:txBody>
-          <a:bodyPr rtlCol="0" anchor="ctr" wrap="square"/>
-          <a:lstStyle/>
-          <a:p>
-            <a:pPr algn="ctr">
-              <a:defRPr sz="1300" b="1">
-                <a:solidFill>
-                  <a:srgbClr val="FFFFFF"/>
-                </a:solidFill>
-              </a:defRPr>
-            </a:pPr>
-            <a:r>
-              <a:t>承認済</a:t>
-            </a:r>
-          </a:p>
-        </p:txBody>
-      </p:sp>
-      <p:sp>
-        <p:nvSpPr>
-          <p:cNvPr id="6" name="Rectangle 5"/>
-          <p:cNvSpPr/>
-          <p:nvPr/>
-        </p:nvSpPr>
-        <p:spPr>
-          <a:xfrm>
-            <a:off x="4518507" y="3403600"/>
-            <a:ext cx="137160" cy="50800"/>
-          </a:xfrm>
-          <a:prstGeom prst="rect">
-            <a:avLst/>
-          </a:prstGeom>
-          <a:solidFill>
-            <a:srgbClr val="334055"/>
-          </a:solidFill>
-          <a:ln>
-            <a:noFill/>
-          </a:ln>
-        </p:spPr>
-        <p:style>
-          <a:lnRef idx="1">
-            <a:schemeClr val="accent1"/>
-          </a:lnRef>
-          <a:fillRef idx="3">
-            <a:schemeClr val="accent1"/>
-          </a:fillRef>
-          <a:effectRef idx="2">
-            <a:schemeClr val="accent1"/>
-          </a:effectRef>
-          <a:fontRef idx="minor">
-            <a:schemeClr val="lt1"/>
-          </a:fontRef>
-        </p:style>
-        <p:txBody>
-          <a:bodyPr rtlCol="0" anchor="ctr"/>
-          <a:lstStyle/>
-          <a:p>
-            <a:pPr algn="ctr"/>
-          </a:p>
-        </p:txBody>
-      </p:sp>
-      <p:sp>
-        <p:nvSpPr>
-          <p:cNvPr id="7" name="Rounded Rectangle 6"/>
-          <p:cNvSpPr/>
-          <p:nvPr/>
-        </p:nvSpPr>
-        <p:spPr>
-          <a:xfrm>
-            <a:off x="4655667" y="2926080"/>
-            <a:ext cx="1371600" cy="1005840"/>
-          </a:xfrm>
-          <a:prstGeom prst="roundRect">
-            <a:avLst/>
-          </a:prstGeom>
-          <a:solidFill>
-            <a:srgbClr val="10B981"/>
-          </a:solidFill>
-          <a:ln>
-            <a:noFill/>
-          </a:ln>
-        </p:spPr>
-        <p:style>
-          <a:lnRef idx="1">
-            <a:schemeClr val="accent1"/>
-          </a:lnRef>
-          <a:fillRef idx="3">
-            <a:schemeClr val="accent1"/>
-          </a:fillRef>
-          <a:effectRef idx="2">
-            <a:schemeClr val="accent1"/>
-          </a:effectRef>
-          <a:fontRef idx="minor">
-            <a:schemeClr val="lt1"/>
-          </a:fontRef>
-        </p:style>
-        <p:txBody>
-          <a:bodyPr rtlCol="0" anchor="ctr" wrap="square"/>
-          <a:lstStyle/>
-          <a:p>
-            <a:pPr algn="ctr">
-              <a:defRPr sz="1300" b="1">
-                <a:solidFill>
-                  <a:srgbClr val="FFFFFF"/>
-                </a:solidFill>
-              </a:defRPr>
-            </a:pPr>
-            <a:r>
-              <a:t>検収済</a:t>
-            </a:r>
-            <a:br/>
-            <a:r>
-              <a:t>（即時）</a:t>
-            </a:r>
-          </a:p>
-        </p:txBody>
-      </p:sp>
-      <p:sp>
-        <p:nvSpPr>
-          <p:cNvPr id="8" name="Rectangle 7"/>
-          <p:cNvSpPr/>
-          <p:nvPr/>
-        </p:nvSpPr>
-        <p:spPr>
-          <a:xfrm>
-            <a:off x="6027267" y="3403600"/>
-            <a:ext cx="137160" cy="50800"/>
-          </a:xfrm>
-          <a:prstGeom prst="rect">
-            <a:avLst/>
-          </a:prstGeom>
-          <a:solidFill>
-            <a:srgbClr val="334055"/>
-          </a:solidFill>
-          <a:ln>
-            <a:noFill/>
-          </a:ln>
-        </p:spPr>
-        <p:style>
-          <a:lnRef idx="1">
-            <a:schemeClr val="accent1"/>
-          </a:lnRef>
-          <a:fillRef idx="3">
-            <a:schemeClr val="accent1"/>
-          </a:fillRef>
-          <a:effectRef idx="2">
-            <a:schemeClr val="accent1"/>
-          </a:effectRef>
-          <a:fontRef idx="minor">
-            <a:schemeClr val="lt1"/>
-          </a:fontRef>
-        </p:style>
-        <p:txBody>
-          <a:bodyPr rtlCol="0" anchor="ctr"/>
-          <a:lstStyle/>
-          <a:p>
-            <a:pPr algn="ctr"/>
-          </a:p>
-        </p:txBody>
-      </p:sp>
-      <p:sp>
-        <p:nvSpPr>
-          <p:cNvPr id="9" name="Rounded Rectangle 8"/>
-          <p:cNvSpPr/>
-          <p:nvPr/>
-        </p:nvSpPr>
-        <p:spPr>
-          <a:xfrm>
-            <a:off x="6164427" y="2926080"/>
-            <a:ext cx="1371600" cy="1005840"/>
-          </a:xfrm>
-          <a:prstGeom prst="roundRect">
-            <a:avLst/>
-          </a:prstGeom>
-          <a:solidFill>
-            <a:srgbClr val="F59E0B"/>
-          </a:solidFill>
-          <a:ln>
-            <a:noFill/>
-          </a:ln>
-        </p:spPr>
-        <p:style>
-          <a:lnRef idx="1">
-            <a:schemeClr val="accent1"/>
-          </a:lnRef>
-          <a:fillRef idx="3">
-            <a:schemeClr val="accent1"/>
-          </a:fillRef>
-          <a:effectRef idx="2">
-            <a:schemeClr val="accent1"/>
-          </a:effectRef>
-          <a:fontRef idx="minor">
-            <a:schemeClr val="lt1"/>
-          </a:fontRef>
-        </p:style>
-        <p:txBody>
-          <a:bodyPr rtlCol="0" anchor="ctr" wrap="square"/>
-          <a:lstStyle/>
-          <a:p>
-            <a:pPr algn="ctr">
-              <a:defRPr sz="1300" b="1">
-                <a:solidFill>
-                  <a:srgbClr val="FFFFFF"/>
-                </a:solidFill>
-              </a:defRPr>
-            </a:pPr>
-            <a:r>
-              <a:t>証憑完了</a:t>
-            </a:r>
-          </a:p>
-        </p:txBody>
-      </p:sp>
-      <p:sp>
-        <p:nvSpPr>
-          <p:cNvPr id="10" name="Rectangle 9"/>
-          <p:cNvSpPr/>
-          <p:nvPr/>
-        </p:nvSpPr>
-        <p:spPr>
-          <a:xfrm>
-            <a:off x="7536027" y="3403600"/>
-            <a:ext cx="137160" cy="50800"/>
-          </a:xfrm>
-          <a:prstGeom prst="rect">
-            <a:avLst/>
-          </a:prstGeom>
-          <a:solidFill>
-            <a:srgbClr val="334055"/>
-          </a:solidFill>
-          <a:ln>
-            <a:noFill/>
-          </a:ln>
-        </p:spPr>
-        <p:style>
-          <a:lnRef idx="1">
-            <a:schemeClr val="accent1"/>
-          </a:lnRef>
-          <a:fillRef idx="3">
-            <a:schemeClr val="accent1"/>
-          </a:fillRef>
-          <a:effectRef idx="2">
-            <a:schemeClr val="accent1"/>
-          </a:effectRef>
-          <a:fontRef idx="minor">
-            <a:schemeClr val="lt1"/>
-          </a:fontRef>
-        </p:style>
-        <p:txBody>
-          <a:bodyPr rtlCol="0" anchor="ctr"/>
-          <a:lstStyle/>
-          <a:p>
-            <a:pPr algn="ctr"/>
-          </a:p>
-        </p:txBody>
-      </p:sp>
-      <p:sp>
-        <p:nvSpPr>
-          <p:cNvPr id="11" name="Rounded Rectangle 10"/>
-          <p:cNvSpPr/>
-          <p:nvPr/>
-        </p:nvSpPr>
-        <p:spPr>
-          <a:xfrm>
-            <a:off x="7673187" y="2926080"/>
-            <a:ext cx="1371600" cy="1005840"/>
-          </a:xfrm>
-          <a:prstGeom prst="roundRect">
-            <a:avLst/>
-          </a:prstGeom>
-          <a:solidFill>
-            <a:srgbClr val="10B981"/>
-          </a:solidFill>
-          <a:ln>
-            <a:noFill/>
-          </a:ln>
-        </p:spPr>
-        <p:style>
-          <a:lnRef idx="1">
-            <a:schemeClr val="accent1"/>
-          </a:lnRef>
-          <a:fillRef idx="3">
-            <a:schemeClr val="accent1"/>
-          </a:fillRef>
-          <a:effectRef idx="2">
-            <a:schemeClr val="accent1"/>
-          </a:effectRef>
-          <a:fontRef idx="minor">
-            <a:schemeClr val="lt1"/>
-          </a:fontRef>
-        </p:style>
-        <p:txBody>
-          <a:bodyPr rtlCol="0" anchor="ctr" wrap="square"/>
-          <a:lstStyle/>
-          <a:p>
-            <a:pPr algn="ctr">
-              <a:defRPr sz="1300" b="1">
-                <a:solidFill>
-                  <a:srgbClr val="FFFFFF"/>
-                </a:solidFill>
-              </a:defRPr>
-            </a:pPr>
-            <a:r>
-              <a:t>計上済</a:t>
-            </a:r>
-          </a:p>
-        </p:txBody>
-      </p:sp>
-      <p:sp>
-        <p:nvSpPr>
-          <p:cNvPr id="12" name="Rectangle 11"/>
-          <p:cNvSpPr/>
-          <p:nvPr/>
-        </p:nvSpPr>
-        <p:spPr>
-          <a:xfrm>
-            <a:off x="9044787" y="3403600"/>
-            <a:ext cx="137160" cy="50800"/>
-          </a:xfrm>
-          <a:prstGeom prst="rect">
-            <a:avLst/>
-          </a:prstGeom>
-          <a:solidFill>
-            <a:srgbClr val="334055"/>
-          </a:solidFill>
-          <a:ln>
-            <a:noFill/>
-          </a:ln>
-        </p:spPr>
-        <p:style>
-          <a:lnRef idx="1">
-            <a:schemeClr val="accent1"/>
-          </a:lnRef>
-          <a:fillRef idx="3">
-            <a:schemeClr val="accent1"/>
-          </a:fillRef>
-          <a:effectRef idx="2">
-            <a:schemeClr val="accent1"/>
-          </a:effectRef>
-          <a:fontRef idx="minor">
-            <a:schemeClr val="lt1"/>
-          </a:fontRef>
-        </p:style>
-        <p:txBody>
-          <a:bodyPr rtlCol="0" anchor="ctr"/>
-          <a:lstStyle/>
-          <a:p>
-            <a:pPr algn="ctr"/>
-          </a:p>
-        </p:txBody>
-      </p:sp>
-      <p:sp>
-        <p:nvSpPr>
-          <p:cNvPr id="13" name="Rounded Rectangle 12"/>
-          <p:cNvSpPr/>
-          <p:nvPr/>
-        </p:nvSpPr>
-        <p:spPr>
-          <a:xfrm>
-            <a:off x="9181947" y="2926080"/>
-            <a:ext cx="1371600" cy="1005840"/>
-          </a:xfrm>
-          <a:prstGeom prst="roundRect">
-            <a:avLst/>
-          </a:prstGeom>
-          <a:solidFill>
-            <a:srgbClr val="10B981"/>
-          </a:solidFill>
-          <a:ln>
-            <a:noFill/>
-          </a:ln>
-        </p:spPr>
-        <p:style>
-          <a:lnRef idx="1">
-            <a:schemeClr val="accent1"/>
-          </a:lnRef>
-          <a:fillRef idx="3">
-            <a:schemeClr val="accent1"/>
-          </a:fillRef>
-          <a:effectRef idx="2">
-            <a:schemeClr val="accent1"/>
-          </a:effectRef>
-          <a:fontRef idx="minor">
-            <a:schemeClr val="lt1"/>
-          </a:fontRef>
-        </p:style>
-        <p:txBody>
-          <a:bodyPr rtlCol="0" anchor="ctr" wrap="square"/>
-          <a:lstStyle/>
-          <a:p>
-            <a:pPr algn="ctr">
-              <a:defRPr sz="1300" b="1">
-                <a:solidFill>
-                  <a:srgbClr val="FFFFFF"/>
-                </a:solidFill>
-              </a:defRPr>
-            </a:pPr>
-            <a:r>
-              <a:t>支払済</a:t>
-            </a:r>
-          </a:p>
-        </p:txBody>
-      </p:sp>
     </p:spTree>
   </p:cSld>
   <p:clrMapOvr>
@@ -11865,6 +12067,2072 @@
 </file>
 
 <file path=ppt/slides/slide30.xml><?xml version="1.0" encoding="utf-8"?>
+<p:sld xmlns:a="http://schemas.openxmlformats.org/drawingml/2006/main" xmlns:p="http://schemas.openxmlformats.org/presentationml/2006/main" xmlns:r="http://schemas.openxmlformats.org/officeDocument/2006/relationships">
+  <p:cSld>
+    <p:bg>
+      <p:bgPr>
+        <a:solidFill>
+          <a:srgbClr val="0F0F1A"/>
+        </a:solidFill>
+        <a:effectLst/>
+      </p:bgPr>
+    </p:bg>
+    <p:spTree>
+      <p:nvGrpSpPr>
+        <p:cNvPr id="1" name=""/>
+        <p:cNvGrpSpPr/>
+        <p:nvPr/>
+      </p:nvGrpSpPr>
+      <p:grpSpPr/>
+      <p:sp>
+        <p:nvSpPr>
+          <p:cNvPr id="2" name="TextBox 1"/>
+          <p:cNvSpPr txBox="1"/>
+          <p:nvPr/>
+        </p:nvSpPr>
+        <p:spPr>
+          <a:xfrm>
+            <a:off x="1371600" y="1371600"/>
+            <a:ext cx="2743200" cy="2743200"/>
+          </a:xfrm>
+          <a:prstGeom prst="rect">
+            <a:avLst/>
+          </a:prstGeom>
+          <a:noFill/>
+        </p:spPr>
+        <p:txBody>
+          <a:bodyPr wrap="none">
+            <a:spAutoFit/>
+          </a:bodyPr>
+          <a:lstStyle/>
+          <a:p>
+            <a:pPr>
+              <a:defRPr sz="12000" b="1">
+                <a:solidFill>
+                  <a:srgbClr val="00D4FF"/>
+                </a:solidFill>
+              </a:defRPr>
+            </a:pPr>
+            <a:r>
+              <a:t>11</a:t>
+            </a:r>
+          </a:p>
+        </p:txBody>
+      </p:sp>
+      <p:sp>
+        <p:nvSpPr>
+          <p:cNvPr id="3" name="TextBox 2"/>
+          <p:cNvSpPr txBox="1"/>
+          <p:nvPr/>
+        </p:nvSpPr>
+        <p:spPr>
+          <a:xfrm>
+            <a:off x="1371600" y="3840480"/>
+            <a:ext cx="9144000" cy="1371600"/>
+          </a:xfrm>
+          <a:prstGeom prst="rect">
+            <a:avLst/>
+          </a:prstGeom>
+          <a:noFill/>
+        </p:spPr>
+        <p:txBody>
+          <a:bodyPr wrap="none">
+            <a:spAutoFit/>
+          </a:bodyPr>
+          <a:lstStyle/>
+          <a:p>
+            <a:pPr>
+              <a:defRPr sz="4000" b="1">
+                <a:solidFill>
+                  <a:srgbClr val="FFFFFF"/>
+                </a:solidFill>
+              </a:defRPr>
+            </a:pPr>
+            <a:r>
+              <a:t>ステータス遷移</a:t>
+            </a:r>
+          </a:p>
+        </p:txBody>
+      </p:sp>
+    </p:spTree>
+  </p:cSld>
+  <p:clrMapOvr>
+    <a:masterClrMapping/>
+  </p:clrMapOvr>
+</p:sld>
+</file>
+
+<file path=ppt/slides/slide31.xml><?xml version="1.0" encoding="utf-8"?>
+<p:sld xmlns:a="http://schemas.openxmlformats.org/drawingml/2006/main" xmlns:p="http://schemas.openxmlformats.org/presentationml/2006/main" xmlns:r="http://schemas.openxmlformats.org/officeDocument/2006/relationships">
+  <p:cSld>
+    <p:bg>
+      <p:bgPr>
+        <a:solidFill>
+          <a:srgbClr val="0F0F1A"/>
+        </a:solidFill>
+        <a:effectLst/>
+      </p:bgPr>
+    </p:bg>
+    <p:spTree>
+      <p:nvGrpSpPr>
+        <p:cNvPr id="1" name=""/>
+        <p:cNvGrpSpPr/>
+        <p:nvPr/>
+      </p:nvGrpSpPr>
+      <p:grpSpPr/>
+      <p:sp>
+        <p:nvSpPr>
+          <p:cNvPr id="2" name="TextBox 1"/>
+          <p:cNvSpPr txBox="1"/>
+          <p:nvPr/>
+        </p:nvSpPr>
+        <p:spPr>
+          <a:xfrm>
+            <a:off x="1371600" y="640080"/>
+            <a:ext cx="9144000" cy="914400"/>
+          </a:xfrm>
+          <a:prstGeom prst="rect">
+            <a:avLst/>
+          </a:prstGeom>
+          <a:noFill/>
+        </p:spPr>
+        <p:txBody>
+          <a:bodyPr wrap="none">
+            <a:spAutoFit/>
+          </a:bodyPr>
+          <a:lstStyle/>
+          <a:p>
+            <a:pPr>
+              <a:defRPr sz="3200" b="1">
+                <a:solidFill>
+                  <a:srgbClr val="FFFFFF"/>
+                </a:solidFill>
+              </a:defRPr>
+            </a:pPr>
+            <a:r>
+              <a:t>通常フロー（カード 10万未満）</a:t>
+            </a:r>
+          </a:p>
+        </p:txBody>
+      </p:sp>
+      <p:sp>
+        <p:nvSpPr>
+          <p:cNvPr id="3" name="Rounded Rectangle 2"/>
+          <p:cNvSpPr/>
+          <p:nvPr/>
+        </p:nvSpPr>
+        <p:spPr>
+          <a:xfrm>
+            <a:off x="883767" y="2926080"/>
+            <a:ext cx="1371600" cy="1005840"/>
+          </a:xfrm>
+          <a:prstGeom prst="roundRect">
+            <a:avLst/>
+          </a:prstGeom>
+          <a:solidFill>
+            <a:srgbClr val="00D4FF"/>
+          </a:solidFill>
+          <a:ln>
+            <a:noFill/>
+          </a:ln>
+        </p:spPr>
+        <p:style>
+          <a:lnRef idx="1">
+            <a:schemeClr val="accent1"/>
+          </a:lnRef>
+          <a:fillRef idx="3">
+            <a:schemeClr val="accent1"/>
+          </a:fillRef>
+          <a:effectRef idx="2">
+            <a:schemeClr val="accent1"/>
+          </a:effectRef>
+          <a:fontRef idx="minor">
+            <a:schemeClr val="lt1"/>
+          </a:fontRef>
+        </p:style>
+        <p:txBody>
+          <a:bodyPr rtlCol="0" anchor="ctr" wrap="square"/>
+          <a:lstStyle/>
+          <a:p>
+            <a:pPr algn="ctr">
+              <a:defRPr sz="1300" b="1">
+                <a:solidFill>
+                  <a:srgbClr val="FFFFFF"/>
+                </a:solidFill>
+              </a:defRPr>
+            </a:pPr>
+            <a:r>
+              <a:t>申請済</a:t>
+            </a:r>
+          </a:p>
+        </p:txBody>
+      </p:sp>
+      <p:sp>
+        <p:nvSpPr>
+          <p:cNvPr id="4" name="Rectangle 3"/>
+          <p:cNvSpPr/>
+          <p:nvPr/>
+        </p:nvSpPr>
+        <p:spPr>
+          <a:xfrm>
+            <a:off x="2255367" y="3403600"/>
+            <a:ext cx="137160" cy="50800"/>
+          </a:xfrm>
+          <a:prstGeom prst="rect">
+            <a:avLst/>
+          </a:prstGeom>
+          <a:solidFill>
+            <a:srgbClr val="334055"/>
+          </a:solidFill>
+          <a:ln>
+            <a:noFill/>
+          </a:ln>
+        </p:spPr>
+        <p:style>
+          <a:lnRef idx="1">
+            <a:schemeClr val="accent1"/>
+          </a:lnRef>
+          <a:fillRef idx="3">
+            <a:schemeClr val="accent1"/>
+          </a:fillRef>
+          <a:effectRef idx="2">
+            <a:schemeClr val="accent1"/>
+          </a:effectRef>
+          <a:fontRef idx="minor">
+            <a:schemeClr val="lt1"/>
+          </a:fontRef>
+        </p:style>
+        <p:txBody>
+          <a:bodyPr rtlCol="0" anchor="ctr"/>
+          <a:lstStyle/>
+          <a:p>
+            <a:pPr algn="ctr"/>
+          </a:p>
+        </p:txBody>
+      </p:sp>
+      <p:sp>
+        <p:nvSpPr>
+          <p:cNvPr id="5" name="Rounded Rectangle 4"/>
+          <p:cNvSpPr/>
+          <p:nvPr/>
+        </p:nvSpPr>
+        <p:spPr>
+          <a:xfrm>
+            <a:off x="2392527" y="2926080"/>
+            <a:ext cx="1371600" cy="1005840"/>
+          </a:xfrm>
+          <a:prstGeom prst="roundRect">
+            <a:avLst/>
+          </a:prstGeom>
+          <a:solidFill>
+            <a:srgbClr val="7C3AED"/>
+          </a:solidFill>
+          <a:ln>
+            <a:noFill/>
+          </a:ln>
+        </p:spPr>
+        <p:style>
+          <a:lnRef idx="1">
+            <a:schemeClr val="accent1"/>
+          </a:lnRef>
+          <a:fillRef idx="3">
+            <a:schemeClr val="accent1"/>
+          </a:fillRef>
+          <a:effectRef idx="2">
+            <a:schemeClr val="accent1"/>
+          </a:effectRef>
+          <a:fontRef idx="minor">
+            <a:schemeClr val="lt1"/>
+          </a:fontRef>
+        </p:style>
+        <p:txBody>
+          <a:bodyPr rtlCol="0" anchor="ctr" wrap="square"/>
+          <a:lstStyle/>
+          <a:p>
+            <a:pPr algn="ctr">
+              <a:defRPr sz="1300" b="1">
+                <a:solidFill>
+                  <a:srgbClr val="FFFFFF"/>
+                </a:solidFill>
+              </a:defRPr>
+            </a:pPr>
+            <a:r>
+              <a:t>承認済</a:t>
+            </a:r>
+          </a:p>
+        </p:txBody>
+      </p:sp>
+      <p:sp>
+        <p:nvSpPr>
+          <p:cNvPr id="6" name="Rectangle 5"/>
+          <p:cNvSpPr/>
+          <p:nvPr/>
+        </p:nvSpPr>
+        <p:spPr>
+          <a:xfrm>
+            <a:off x="3764127" y="3403600"/>
+            <a:ext cx="137160" cy="50800"/>
+          </a:xfrm>
+          <a:prstGeom prst="rect">
+            <a:avLst/>
+          </a:prstGeom>
+          <a:solidFill>
+            <a:srgbClr val="334055"/>
+          </a:solidFill>
+          <a:ln>
+            <a:noFill/>
+          </a:ln>
+        </p:spPr>
+        <p:style>
+          <a:lnRef idx="1">
+            <a:schemeClr val="accent1"/>
+          </a:lnRef>
+          <a:fillRef idx="3">
+            <a:schemeClr val="accent1"/>
+          </a:fillRef>
+          <a:effectRef idx="2">
+            <a:schemeClr val="accent1"/>
+          </a:effectRef>
+          <a:fontRef idx="minor">
+            <a:schemeClr val="lt1"/>
+          </a:fontRef>
+        </p:style>
+        <p:txBody>
+          <a:bodyPr rtlCol="0" anchor="ctr"/>
+          <a:lstStyle/>
+          <a:p>
+            <a:pPr algn="ctr"/>
+          </a:p>
+        </p:txBody>
+      </p:sp>
+      <p:sp>
+        <p:nvSpPr>
+          <p:cNvPr id="7" name="Rounded Rectangle 6"/>
+          <p:cNvSpPr/>
+          <p:nvPr/>
+        </p:nvSpPr>
+        <p:spPr>
+          <a:xfrm>
+            <a:off x="3901287" y="2926080"/>
+            <a:ext cx="1371600" cy="1005840"/>
+          </a:xfrm>
+          <a:prstGeom prst="roundRect">
+            <a:avLst/>
+          </a:prstGeom>
+          <a:solidFill>
+            <a:srgbClr val="EC4899"/>
+          </a:solidFill>
+          <a:ln>
+            <a:noFill/>
+          </a:ln>
+        </p:spPr>
+        <p:style>
+          <a:lnRef idx="1">
+            <a:schemeClr val="accent1"/>
+          </a:lnRef>
+          <a:fillRef idx="3">
+            <a:schemeClr val="accent1"/>
+          </a:fillRef>
+          <a:effectRef idx="2">
+            <a:schemeClr val="accent1"/>
+          </a:effectRef>
+          <a:fontRef idx="minor">
+            <a:schemeClr val="lt1"/>
+          </a:fontRef>
+        </p:style>
+        <p:txBody>
+          <a:bodyPr rtlCol="0" anchor="ctr" wrap="square"/>
+          <a:lstStyle/>
+          <a:p>
+            <a:pPr algn="ctr">
+              <a:defRPr sz="1300" b="1">
+                <a:solidFill>
+                  <a:srgbClr val="FFFFFF"/>
+                </a:solidFill>
+              </a:defRPr>
+            </a:pPr>
+            <a:r>
+              <a:t>発注済</a:t>
+            </a:r>
+          </a:p>
+        </p:txBody>
+      </p:sp>
+      <p:sp>
+        <p:nvSpPr>
+          <p:cNvPr id="8" name="Rectangle 7"/>
+          <p:cNvSpPr/>
+          <p:nvPr/>
+        </p:nvSpPr>
+        <p:spPr>
+          <a:xfrm>
+            <a:off x="5272887" y="3403600"/>
+            <a:ext cx="137160" cy="50800"/>
+          </a:xfrm>
+          <a:prstGeom prst="rect">
+            <a:avLst/>
+          </a:prstGeom>
+          <a:solidFill>
+            <a:srgbClr val="334055"/>
+          </a:solidFill>
+          <a:ln>
+            <a:noFill/>
+          </a:ln>
+        </p:spPr>
+        <p:style>
+          <a:lnRef idx="1">
+            <a:schemeClr val="accent1"/>
+          </a:lnRef>
+          <a:fillRef idx="3">
+            <a:schemeClr val="accent1"/>
+          </a:fillRef>
+          <a:effectRef idx="2">
+            <a:schemeClr val="accent1"/>
+          </a:effectRef>
+          <a:fontRef idx="minor">
+            <a:schemeClr val="lt1"/>
+          </a:fontRef>
+        </p:style>
+        <p:txBody>
+          <a:bodyPr rtlCol="0" anchor="ctr"/>
+          <a:lstStyle/>
+          <a:p>
+            <a:pPr algn="ctr"/>
+          </a:p>
+        </p:txBody>
+      </p:sp>
+      <p:sp>
+        <p:nvSpPr>
+          <p:cNvPr id="9" name="Rounded Rectangle 8"/>
+          <p:cNvSpPr/>
+          <p:nvPr/>
+        </p:nvSpPr>
+        <p:spPr>
+          <a:xfrm>
+            <a:off x="5410047" y="2926080"/>
+            <a:ext cx="1371600" cy="1005840"/>
+          </a:xfrm>
+          <a:prstGeom prst="roundRect">
+            <a:avLst/>
+          </a:prstGeom>
+          <a:solidFill>
+            <a:srgbClr val="10B981"/>
+          </a:solidFill>
+          <a:ln>
+            <a:noFill/>
+          </a:ln>
+        </p:spPr>
+        <p:style>
+          <a:lnRef idx="1">
+            <a:schemeClr val="accent1"/>
+          </a:lnRef>
+          <a:fillRef idx="3">
+            <a:schemeClr val="accent1"/>
+          </a:fillRef>
+          <a:effectRef idx="2">
+            <a:schemeClr val="accent1"/>
+          </a:effectRef>
+          <a:fontRef idx="minor">
+            <a:schemeClr val="lt1"/>
+          </a:fontRef>
+        </p:style>
+        <p:txBody>
+          <a:bodyPr rtlCol="0" anchor="ctr" wrap="square"/>
+          <a:lstStyle/>
+          <a:p>
+            <a:pPr algn="ctr">
+              <a:defRPr sz="1300" b="1">
+                <a:solidFill>
+                  <a:srgbClr val="FFFFFF"/>
+                </a:solidFill>
+              </a:defRPr>
+            </a:pPr>
+            <a:r>
+              <a:t>検収済</a:t>
+            </a:r>
+          </a:p>
+        </p:txBody>
+      </p:sp>
+      <p:sp>
+        <p:nvSpPr>
+          <p:cNvPr id="10" name="Rectangle 9"/>
+          <p:cNvSpPr/>
+          <p:nvPr/>
+        </p:nvSpPr>
+        <p:spPr>
+          <a:xfrm>
+            <a:off x="6781647" y="3403600"/>
+            <a:ext cx="137160" cy="50800"/>
+          </a:xfrm>
+          <a:prstGeom prst="rect">
+            <a:avLst/>
+          </a:prstGeom>
+          <a:solidFill>
+            <a:srgbClr val="334055"/>
+          </a:solidFill>
+          <a:ln>
+            <a:noFill/>
+          </a:ln>
+        </p:spPr>
+        <p:style>
+          <a:lnRef idx="1">
+            <a:schemeClr val="accent1"/>
+          </a:lnRef>
+          <a:fillRef idx="3">
+            <a:schemeClr val="accent1"/>
+          </a:fillRef>
+          <a:effectRef idx="2">
+            <a:schemeClr val="accent1"/>
+          </a:effectRef>
+          <a:fontRef idx="minor">
+            <a:schemeClr val="lt1"/>
+          </a:fontRef>
+        </p:style>
+        <p:txBody>
+          <a:bodyPr rtlCol="0" anchor="ctr"/>
+          <a:lstStyle/>
+          <a:p>
+            <a:pPr algn="ctr"/>
+          </a:p>
+        </p:txBody>
+      </p:sp>
+      <p:sp>
+        <p:nvSpPr>
+          <p:cNvPr id="11" name="Rounded Rectangle 10"/>
+          <p:cNvSpPr/>
+          <p:nvPr/>
+        </p:nvSpPr>
+        <p:spPr>
+          <a:xfrm>
+            <a:off x="6918807" y="2926080"/>
+            <a:ext cx="1371600" cy="1005840"/>
+          </a:xfrm>
+          <a:prstGeom prst="roundRect">
+            <a:avLst/>
+          </a:prstGeom>
+          <a:solidFill>
+            <a:srgbClr val="F59E0B"/>
+          </a:solidFill>
+          <a:ln>
+            <a:noFill/>
+          </a:ln>
+        </p:spPr>
+        <p:style>
+          <a:lnRef idx="1">
+            <a:schemeClr val="accent1"/>
+          </a:lnRef>
+          <a:fillRef idx="3">
+            <a:schemeClr val="accent1"/>
+          </a:fillRef>
+          <a:effectRef idx="2">
+            <a:schemeClr val="accent1"/>
+          </a:effectRef>
+          <a:fontRef idx="minor">
+            <a:schemeClr val="lt1"/>
+          </a:fontRef>
+        </p:style>
+        <p:txBody>
+          <a:bodyPr rtlCol="0" anchor="ctr" wrap="square"/>
+          <a:lstStyle/>
+          <a:p>
+            <a:pPr algn="ctr">
+              <a:defRPr sz="1300" b="1">
+                <a:solidFill>
+                  <a:srgbClr val="FFFFFF"/>
+                </a:solidFill>
+              </a:defRPr>
+            </a:pPr>
+            <a:r>
+              <a:t>証憑完了</a:t>
+            </a:r>
+          </a:p>
+        </p:txBody>
+      </p:sp>
+      <p:sp>
+        <p:nvSpPr>
+          <p:cNvPr id="12" name="Rectangle 11"/>
+          <p:cNvSpPr/>
+          <p:nvPr/>
+        </p:nvSpPr>
+        <p:spPr>
+          <a:xfrm>
+            <a:off x="8290407" y="3403600"/>
+            <a:ext cx="137160" cy="50800"/>
+          </a:xfrm>
+          <a:prstGeom prst="rect">
+            <a:avLst/>
+          </a:prstGeom>
+          <a:solidFill>
+            <a:srgbClr val="334055"/>
+          </a:solidFill>
+          <a:ln>
+            <a:noFill/>
+          </a:ln>
+        </p:spPr>
+        <p:style>
+          <a:lnRef idx="1">
+            <a:schemeClr val="accent1"/>
+          </a:lnRef>
+          <a:fillRef idx="3">
+            <a:schemeClr val="accent1"/>
+          </a:fillRef>
+          <a:effectRef idx="2">
+            <a:schemeClr val="accent1"/>
+          </a:effectRef>
+          <a:fontRef idx="minor">
+            <a:schemeClr val="lt1"/>
+          </a:fontRef>
+        </p:style>
+        <p:txBody>
+          <a:bodyPr rtlCol="0" anchor="ctr"/>
+          <a:lstStyle/>
+          <a:p>
+            <a:pPr algn="ctr"/>
+          </a:p>
+        </p:txBody>
+      </p:sp>
+      <p:sp>
+        <p:nvSpPr>
+          <p:cNvPr id="13" name="Rounded Rectangle 12"/>
+          <p:cNvSpPr/>
+          <p:nvPr/>
+        </p:nvSpPr>
+        <p:spPr>
+          <a:xfrm>
+            <a:off x="8427567" y="2926080"/>
+            <a:ext cx="1371600" cy="1005840"/>
+          </a:xfrm>
+          <a:prstGeom prst="roundRect">
+            <a:avLst/>
+          </a:prstGeom>
+          <a:solidFill>
+            <a:srgbClr val="00D4FF"/>
+          </a:solidFill>
+          <a:ln>
+            <a:noFill/>
+          </a:ln>
+        </p:spPr>
+        <p:style>
+          <a:lnRef idx="1">
+            <a:schemeClr val="accent1"/>
+          </a:lnRef>
+          <a:fillRef idx="3">
+            <a:schemeClr val="accent1"/>
+          </a:fillRef>
+          <a:effectRef idx="2">
+            <a:schemeClr val="accent1"/>
+          </a:effectRef>
+          <a:fontRef idx="minor">
+            <a:schemeClr val="lt1"/>
+          </a:fontRef>
+        </p:style>
+        <p:txBody>
+          <a:bodyPr rtlCol="0" anchor="ctr" wrap="square"/>
+          <a:lstStyle/>
+          <a:p>
+            <a:pPr algn="ctr">
+              <a:defRPr sz="1300" b="1">
+                <a:solidFill>
+                  <a:srgbClr val="FFFFFF"/>
+                </a:solidFill>
+              </a:defRPr>
+            </a:pPr>
+            <a:r>
+              <a:t>計上済</a:t>
+            </a:r>
+          </a:p>
+        </p:txBody>
+      </p:sp>
+      <p:sp>
+        <p:nvSpPr>
+          <p:cNvPr id="14" name="Rectangle 13"/>
+          <p:cNvSpPr/>
+          <p:nvPr/>
+        </p:nvSpPr>
+        <p:spPr>
+          <a:xfrm>
+            <a:off x="9799167" y="3403600"/>
+            <a:ext cx="137160" cy="50800"/>
+          </a:xfrm>
+          <a:prstGeom prst="rect">
+            <a:avLst/>
+          </a:prstGeom>
+          <a:solidFill>
+            <a:srgbClr val="334055"/>
+          </a:solidFill>
+          <a:ln>
+            <a:noFill/>
+          </a:ln>
+        </p:spPr>
+        <p:style>
+          <a:lnRef idx="1">
+            <a:schemeClr val="accent1"/>
+          </a:lnRef>
+          <a:fillRef idx="3">
+            <a:schemeClr val="accent1"/>
+          </a:fillRef>
+          <a:effectRef idx="2">
+            <a:schemeClr val="accent1"/>
+          </a:effectRef>
+          <a:fontRef idx="minor">
+            <a:schemeClr val="lt1"/>
+          </a:fontRef>
+        </p:style>
+        <p:txBody>
+          <a:bodyPr rtlCol="0" anchor="ctr"/>
+          <a:lstStyle/>
+          <a:p>
+            <a:pPr algn="ctr"/>
+          </a:p>
+        </p:txBody>
+      </p:sp>
+      <p:sp>
+        <p:nvSpPr>
+          <p:cNvPr id="15" name="Rounded Rectangle 14"/>
+          <p:cNvSpPr/>
+          <p:nvPr/>
+        </p:nvSpPr>
+        <p:spPr>
+          <a:xfrm>
+            <a:off x="9936327" y="2926080"/>
+            <a:ext cx="1371600" cy="1005840"/>
+          </a:xfrm>
+          <a:prstGeom prst="roundRect">
+            <a:avLst/>
+          </a:prstGeom>
+          <a:solidFill>
+            <a:srgbClr val="7C3AED"/>
+          </a:solidFill>
+          <a:ln>
+            <a:noFill/>
+          </a:ln>
+        </p:spPr>
+        <p:style>
+          <a:lnRef idx="1">
+            <a:schemeClr val="accent1"/>
+          </a:lnRef>
+          <a:fillRef idx="3">
+            <a:schemeClr val="accent1"/>
+          </a:fillRef>
+          <a:effectRef idx="2">
+            <a:schemeClr val="accent1"/>
+          </a:effectRef>
+          <a:fontRef idx="minor">
+            <a:schemeClr val="lt1"/>
+          </a:fontRef>
+        </p:style>
+        <p:txBody>
+          <a:bodyPr rtlCol="0" anchor="ctr" wrap="square"/>
+          <a:lstStyle/>
+          <a:p>
+            <a:pPr algn="ctr">
+              <a:defRPr sz="1300" b="1">
+                <a:solidFill>
+                  <a:srgbClr val="FFFFFF"/>
+                </a:solidFill>
+              </a:defRPr>
+            </a:pPr>
+            <a:r>
+              <a:t>支払済</a:t>
+            </a:r>
+          </a:p>
+        </p:txBody>
+      </p:sp>
+    </p:spTree>
+  </p:cSld>
+  <p:clrMapOvr>
+    <a:masterClrMapping/>
+  </p:clrMapOvr>
+</p:sld>
+</file>
+
+<file path=ppt/slides/slide32.xml><?xml version="1.0" encoding="utf-8"?>
+<p:sld xmlns:a="http://schemas.openxmlformats.org/drawingml/2006/main" xmlns:p="http://schemas.openxmlformats.org/presentationml/2006/main" xmlns:r="http://schemas.openxmlformats.org/officeDocument/2006/relationships">
+  <p:cSld>
+    <p:bg>
+      <p:bgPr>
+        <a:solidFill>
+          <a:srgbClr val="0F0F1A"/>
+        </a:solidFill>
+        <a:effectLst/>
+      </p:bgPr>
+    </p:bg>
+    <p:spTree>
+      <p:nvGrpSpPr>
+        <p:cNvPr id="1" name=""/>
+        <p:cNvGrpSpPr/>
+        <p:nvPr/>
+      </p:nvGrpSpPr>
+      <p:grpSpPr/>
+      <p:sp>
+        <p:nvSpPr>
+          <p:cNvPr id="2" name="TextBox 1"/>
+          <p:cNvSpPr txBox="1"/>
+          <p:nvPr/>
+        </p:nvSpPr>
+        <p:spPr>
+          <a:xfrm>
+            <a:off x="1371600" y="640080"/>
+            <a:ext cx="9144000" cy="914400"/>
+          </a:xfrm>
+          <a:prstGeom prst="rect">
+            <a:avLst/>
+          </a:prstGeom>
+          <a:noFill/>
+        </p:spPr>
+        <p:txBody>
+          <a:bodyPr wrap="none">
+            <a:spAutoFit/>
+          </a:bodyPr>
+          <a:lstStyle/>
+          <a:p>
+            <a:pPr>
+              <a:defRPr sz="3200" b="1">
+                <a:solidFill>
+                  <a:srgbClr val="FFFFFF"/>
+                </a:solidFill>
+              </a:defRPr>
+            </a:pPr>
+            <a:r>
+              <a:t>高額フロー（10万以上）</a:t>
+            </a:r>
+          </a:p>
+        </p:txBody>
+      </p:sp>
+      <p:sp>
+        <p:nvSpPr>
+          <p:cNvPr id="3" name="Rounded Rectangle 2"/>
+          <p:cNvSpPr/>
+          <p:nvPr/>
+        </p:nvSpPr>
+        <p:spPr>
+          <a:xfrm>
+            <a:off x="883767" y="2926080"/>
+            <a:ext cx="1371600" cy="1005840"/>
+          </a:xfrm>
+          <a:prstGeom prst="roundRect">
+            <a:avLst/>
+          </a:prstGeom>
+          <a:solidFill>
+            <a:srgbClr val="00D4FF"/>
+          </a:solidFill>
+          <a:ln>
+            <a:noFill/>
+          </a:ln>
+        </p:spPr>
+        <p:style>
+          <a:lnRef idx="1">
+            <a:schemeClr val="accent1"/>
+          </a:lnRef>
+          <a:fillRef idx="3">
+            <a:schemeClr val="accent1"/>
+          </a:fillRef>
+          <a:effectRef idx="2">
+            <a:schemeClr val="accent1"/>
+          </a:effectRef>
+          <a:fontRef idx="minor">
+            <a:schemeClr val="lt1"/>
+          </a:fontRef>
+        </p:style>
+        <p:txBody>
+          <a:bodyPr rtlCol="0" anchor="ctr" wrap="square"/>
+          <a:lstStyle/>
+          <a:p>
+            <a:pPr algn="ctr">
+              <a:defRPr sz="1300" b="1">
+                <a:solidFill>
+                  <a:srgbClr val="FFFFFF"/>
+                </a:solidFill>
+              </a:defRPr>
+            </a:pPr>
+            <a:r>
+              <a:t>申請済</a:t>
+            </a:r>
+          </a:p>
+        </p:txBody>
+      </p:sp>
+      <p:sp>
+        <p:nvSpPr>
+          <p:cNvPr id="4" name="Rectangle 3"/>
+          <p:cNvSpPr/>
+          <p:nvPr/>
+        </p:nvSpPr>
+        <p:spPr>
+          <a:xfrm>
+            <a:off x="2255367" y="3403600"/>
+            <a:ext cx="137160" cy="50800"/>
+          </a:xfrm>
+          <a:prstGeom prst="rect">
+            <a:avLst/>
+          </a:prstGeom>
+          <a:solidFill>
+            <a:srgbClr val="334055"/>
+          </a:solidFill>
+          <a:ln>
+            <a:noFill/>
+          </a:ln>
+        </p:spPr>
+        <p:style>
+          <a:lnRef idx="1">
+            <a:schemeClr val="accent1"/>
+          </a:lnRef>
+          <a:fillRef idx="3">
+            <a:schemeClr val="accent1"/>
+          </a:fillRef>
+          <a:effectRef idx="2">
+            <a:schemeClr val="accent1"/>
+          </a:effectRef>
+          <a:fontRef idx="minor">
+            <a:schemeClr val="lt1"/>
+          </a:fontRef>
+        </p:style>
+        <p:txBody>
+          <a:bodyPr rtlCol="0" anchor="ctr"/>
+          <a:lstStyle/>
+          <a:p>
+            <a:pPr algn="ctr"/>
+          </a:p>
+        </p:txBody>
+      </p:sp>
+      <p:sp>
+        <p:nvSpPr>
+          <p:cNvPr id="5" name="Rounded Rectangle 4"/>
+          <p:cNvSpPr/>
+          <p:nvPr/>
+        </p:nvSpPr>
+        <p:spPr>
+          <a:xfrm>
+            <a:off x="2392527" y="2926080"/>
+            <a:ext cx="1371600" cy="1005840"/>
+          </a:xfrm>
+          <a:prstGeom prst="roundRect">
+            <a:avLst/>
+          </a:prstGeom>
+          <a:solidFill>
+            <a:srgbClr val="7C3AED"/>
+          </a:solidFill>
+          <a:ln>
+            <a:noFill/>
+          </a:ln>
+        </p:spPr>
+        <p:style>
+          <a:lnRef idx="1">
+            <a:schemeClr val="accent1"/>
+          </a:lnRef>
+          <a:fillRef idx="3">
+            <a:schemeClr val="accent1"/>
+          </a:fillRef>
+          <a:effectRef idx="2">
+            <a:schemeClr val="accent1"/>
+          </a:effectRef>
+          <a:fontRef idx="minor">
+            <a:schemeClr val="lt1"/>
+          </a:fontRef>
+        </p:style>
+        <p:txBody>
+          <a:bodyPr rtlCol="0" anchor="ctr" wrap="square"/>
+          <a:lstStyle/>
+          <a:p>
+            <a:pPr algn="ctr">
+              <a:defRPr sz="1300" b="1">
+                <a:solidFill>
+                  <a:srgbClr val="FFFFFF"/>
+                </a:solidFill>
+              </a:defRPr>
+            </a:pPr>
+            <a:r>
+              <a:t>部門長</a:t>
+            </a:r>
+            <a:br/>
+            <a:r>
+              <a:t>承認済</a:t>
+            </a:r>
+          </a:p>
+        </p:txBody>
+      </p:sp>
+      <p:sp>
+        <p:nvSpPr>
+          <p:cNvPr id="6" name="Rectangle 5"/>
+          <p:cNvSpPr/>
+          <p:nvPr/>
+        </p:nvSpPr>
+        <p:spPr>
+          <a:xfrm>
+            <a:off x="3764127" y="3403600"/>
+            <a:ext cx="137160" cy="50800"/>
+          </a:xfrm>
+          <a:prstGeom prst="rect">
+            <a:avLst/>
+          </a:prstGeom>
+          <a:solidFill>
+            <a:srgbClr val="334055"/>
+          </a:solidFill>
+          <a:ln>
+            <a:noFill/>
+          </a:ln>
+        </p:spPr>
+        <p:style>
+          <a:lnRef idx="1">
+            <a:schemeClr val="accent1"/>
+          </a:lnRef>
+          <a:fillRef idx="3">
+            <a:schemeClr val="accent1"/>
+          </a:fillRef>
+          <a:effectRef idx="2">
+            <a:schemeClr val="accent1"/>
+          </a:effectRef>
+          <a:fontRef idx="minor">
+            <a:schemeClr val="lt1"/>
+          </a:fontRef>
+        </p:style>
+        <p:txBody>
+          <a:bodyPr rtlCol="0" anchor="ctr"/>
+          <a:lstStyle/>
+          <a:p>
+            <a:pPr algn="ctr"/>
+          </a:p>
+        </p:txBody>
+      </p:sp>
+      <p:sp>
+        <p:nvSpPr>
+          <p:cNvPr id="7" name="Rounded Rectangle 6"/>
+          <p:cNvSpPr/>
+          <p:nvPr/>
+        </p:nvSpPr>
+        <p:spPr>
+          <a:xfrm>
+            <a:off x="3901287" y="2926080"/>
+            <a:ext cx="1371600" cy="1005840"/>
+          </a:xfrm>
+          <a:prstGeom prst="roundRect">
+            <a:avLst/>
+          </a:prstGeom>
+          <a:solidFill>
+            <a:srgbClr val="EC4899"/>
+          </a:solidFill>
+          <a:ln>
+            <a:noFill/>
+          </a:ln>
+        </p:spPr>
+        <p:style>
+          <a:lnRef idx="1">
+            <a:schemeClr val="accent1"/>
+          </a:lnRef>
+          <a:fillRef idx="3">
+            <a:schemeClr val="accent1"/>
+          </a:fillRef>
+          <a:effectRef idx="2">
+            <a:schemeClr val="accent1"/>
+          </a:effectRef>
+          <a:fontRef idx="minor">
+            <a:schemeClr val="lt1"/>
+          </a:fontRef>
+        </p:style>
+        <p:txBody>
+          <a:bodyPr rtlCol="0" anchor="ctr" wrap="square"/>
+          <a:lstStyle/>
+          <a:p>
+            <a:pPr algn="ctr">
+              <a:defRPr sz="1300" b="1">
+                <a:solidFill>
+                  <a:srgbClr val="FFFFFF"/>
+                </a:solidFill>
+              </a:defRPr>
+            </a:pPr>
+            <a:r>
+              <a:t>管理本部</a:t>
+            </a:r>
+            <a:br/>
+            <a:r>
+              <a:t>承認済</a:t>
+            </a:r>
+          </a:p>
+        </p:txBody>
+      </p:sp>
+      <p:sp>
+        <p:nvSpPr>
+          <p:cNvPr id="8" name="Rectangle 7"/>
+          <p:cNvSpPr/>
+          <p:nvPr/>
+        </p:nvSpPr>
+        <p:spPr>
+          <a:xfrm>
+            <a:off x="5272887" y="3403600"/>
+            <a:ext cx="137160" cy="50800"/>
+          </a:xfrm>
+          <a:prstGeom prst="rect">
+            <a:avLst/>
+          </a:prstGeom>
+          <a:solidFill>
+            <a:srgbClr val="334055"/>
+          </a:solidFill>
+          <a:ln>
+            <a:noFill/>
+          </a:ln>
+        </p:spPr>
+        <p:style>
+          <a:lnRef idx="1">
+            <a:schemeClr val="accent1"/>
+          </a:lnRef>
+          <a:fillRef idx="3">
+            <a:schemeClr val="accent1"/>
+          </a:fillRef>
+          <a:effectRef idx="2">
+            <a:schemeClr val="accent1"/>
+          </a:effectRef>
+          <a:fontRef idx="minor">
+            <a:schemeClr val="lt1"/>
+          </a:fontRef>
+        </p:style>
+        <p:txBody>
+          <a:bodyPr rtlCol="0" anchor="ctr"/>
+          <a:lstStyle/>
+          <a:p>
+            <a:pPr algn="ctr"/>
+          </a:p>
+        </p:txBody>
+      </p:sp>
+      <p:sp>
+        <p:nvSpPr>
+          <p:cNvPr id="9" name="Rounded Rectangle 8"/>
+          <p:cNvSpPr/>
+          <p:nvPr/>
+        </p:nvSpPr>
+        <p:spPr>
+          <a:xfrm>
+            <a:off x="5410047" y="2926080"/>
+            <a:ext cx="1371600" cy="1005840"/>
+          </a:xfrm>
+          <a:prstGeom prst="roundRect">
+            <a:avLst/>
+          </a:prstGeom>
+          <a:solidFill>
+            <a:srgbClr val="10B981"/>
+          </a:solidFill>
+          <a:ln>
+            <a:noFill/>
+          </a:ln>
+        </p:spPr>
+        <p:style>
+          <a:lnRef idx="1">
+            <a:schemeClr val="accent1"/>
+          </a:lnRef>
+          <a:fillRef idx="3">
+            <a:schemeClr val="accent1"/>
+          </a:fillRef>
+          <a:effectRef idx="2">
+            <a:schemeClr val="accent1"/>
+          </a:effectRef>
+          <a:fontRef idx="minor">
+            <a:schemeClr val="lt1"/>
+          </a:fontRef>
+        </p:style>
+        <p:txBody>
+          <a:bodyPr rtlCol="0" anchor="ctr" wrap="square"/>
+          <a:lstStyle/>
+          <a:p>
+            <a:pPr algn="ctr">
+              <a:defRPr sz="1300" b="1">
+                <a:solidFill>
+                  <a:srgbClr val="FFFFFF"/>
+                </a:solidFill>
+              </a:defRPr>
+            </a:pPr>
+            <a:r>
+              <a:t>発注済</a:t>
+            </a:r>
+          </a:p>
+        </p:txBody>
+      </p:sp>
+      <p:sp>
+        <p:nvSpPr>
+          <p:cNvPr id="10" name="Rectangle 9"/>
+          <p:cNvSpPr/>
+          <p:nvPr/>
+        </p:nvSpPr>
+        <p:spPr>
+          <a:xfrm>
+            <a:off x="6781647" y="3403600"/>
+            <a:ext cx="137160" cy="50800"/>
+          </a:xfrm>
+          <a:prstGeom prst="rect">
+            <a:avLst/>
+          </a:prstGeom>
+          <a:solidFill>
+            <a:srgbClr val="334055"/>
+          </a:solidFill>
+          <a:ln>
+            <a:noFill/>
+          </a:ln>
+        </p:spPr>
+        <p:style>
+          <a:lnRef idx="1">
+            <a:schemeClr val="accent1"/>
+          </a:lnRef>
+          <a:fillRef idx="3">
+            <a:schemeClr val="accent1"/>
+          </a:fillRef>
+          <a:effectRef idx="2">
+            <a:schemeClr val="accent1"/>
+          </a:effectRef>
+          <a:fontRef idx="minor">
+            <a:schemeClr val="lt1"/>
+          </a:fontRef>
+        </p:style>
+        <p:txBody>
+          <a:bodyPr rtlCol="0" anchor="ctr"/>
+          <a:lstStyle/>
+          <a:p>
+            <a:pPr algn="ctr"/>
+          </a:p>
+        </p:txBody>
+      </p:sp>
+      <p:sp>
+        <p:nvSpPr>
+          <p:cNvPr id="11" name="Rounded Rectangle 10"/>
+          <p:cNvSpPr/>
+          <p:nvPr/>
+        </p:nvSpPr>
+        <p:spPr>
+          <a:xfrm>
+            <a:off x="6918807" y="2926080"/>
+            <a:ext cx="1371600" cy="1005840"/>
+          </a:xfrm>
+          <a:prstGeom prst="roundRect">
+            <a:avLst/>
+          </a:prstGeom>
+          <a:solidFill>
+            <a:srgbClr val="10B981"/>
+          </a:solidFill>
+          <a:ln>
+            <a:noFill/>
+          </a:ln>
+        </p:spPr>
+        <p:style>
+          <a:lnRef idx="1">
+            <a:schemeClr val="accent1"/>
+          </a:lnRef>
+          <a:fillRef idx="3">
+            <a:schemeClr val="accent1"/>
+          </a:fillRef>
+          <a:effectRef idx="2">
+            <a:schemeClr val="accent1"/>
+          </a:effectRef>
+          <a:fontRef idx="minor">
+            <a:schemeClr val="lt1"/>
+          </a:fontRef>
+        </p:style>
+        <p:txBody>
+          <a:bodyPr rtlCol="0" anchor="ctr" wrap="square"/>
+          <a:lstStyle/>
+          <a:p>
+            <a:pPr algn="ctr">
+              <a:defRPr sz="1300" b="1">
+                <a:solidFill>
+                  <a:srgbClr val="FFFFFF"/>
+                </a:solidFill>
+              </a:defRPr>
+            </a:pPr>
+            <a:r>
+              <a:t>検収済</a:t>
+            </a:r>
+          </a:p>
+        </p:txBody>
+      </p:sp>
+      <p:sp>
+        <p:nvSpPr>
+          <p:cNvPr id="12" name="Rectangle 11"/>
+          <p:cNvSpPr/>
+          <p:nvPr/>
+        </p:nvSpPr>
+        <p:spPr>
+          <a:xfrm>
+            <a:off x="8290407" y="3403600"/>
+            <a:ext cx="137160" cy="50800"/>
+          </a:xfrm>
+          <a:prstGeom prst="rect">
+            <a:avLst/>
+          </a:prstGeom>
+          <a:solidFill>
+            <a:srgbClr val="334055"/>
+          </a:solidFill>
+          <a:ln>
+            <a:noFill/>
+          </a:ln>
+        </p:spPr>
+        <p:style>
+          <a:lnRef idx="1">
+            <a:schemeClr val="accent1"/>
+          </a:lnRef>
+          <a:fillRef idx="3">
+            <a:schemeClr val="accent1"/>
+          </a:fillRef>
+          <a:effectRef idx="2">
+            <a:schemeClr val="accent1"/>
+          </a:effectRef>
+          <a:fontRef idx="minor">
+            <a:schemeClr val="lt1"/>
+          </a:fontRef>
+        </p:style>
+        <p:txBody>
+          <a:bodyPr rtlCol="0" anchor="ctr"/>
+          <a:lstStyle/>
+          <a:p>
+            <a:pPr algn="ctr"/>
+          </a:p>
+        </p:txBody>
+      </p:sp>
+      <p:sp>
+        <p:nvSpPr>
+          <p:cNvPr id="13" name="Rounded Rectangle 12"/>
+          <p:cNvSpPr/>
+          <p:nvPr/>
+        </p:nvSpPr>
+        <p:spPr>
+          <a:xfrm>
+            <a:off x="8427567" y="2926080"/>
+            <a:ext cx="1371600" cy="1005840"/>
+          </a:xfrm>
+          <a:prstGeom prst="roundRect">
+            <a:avLst/>
+          </a:prstGeom>
+          <a:solidFill>
+            <a:srgbClr val="F59E0B"/>
+          </a:solidFill>
+          <a:ln>
+            <a:noFill/>
+          </a:ln>
+        </p:spPr>
+        <p:style>
+          <a:lnRef idx="1">
+            <a:schemeClr val="accent1"/>
+          </a:lnRef>
+          <a:fillRef idx="3">
+            <a:schemeClr val="accent1"/>
+          </a:fillRef>
+          <a:effectRef idx="2">
+            <a:schemeClr val="accent1"/>
+          </a:effectRef>
+          <a:fontRef idx="minor">
+            <a:schemeClr val="lt1"/>
+          </a:fontRef>
+        </p:style>
+        <p:txBody>
+          <a:bodyPr rtlCol="0" anchor="ctr" wrap="square"/>
+          <a:lstStyle/>
+          <a:p>
+            <a:pPr algn="ctr">
+              <a:defRPr sz="1300" b="1">
+                <a:solidFill>
+                  <a:srgbClr val="FFFFFF"/>
+                </a:solidFill>
+              </a:defRPr>
+            </a:pPr>
+            <a:r>
+              <a:t>証憑完了</a:t>
+            </a:r>
+          </a:p>
+        </p:txBody>
+      </p:sp>
+      <p:sp>
+        <p:nvSpPr>
+          <p:cNvPr id="14" name="Rectangle 13"/>
+          <p:cNvSpPr/>
+          <p:nvPr/>
+        </p:nvSpPr>
+        <p:spPr>
+          <a:xfrm>
+            <a:off x="9799167" y="3403600"/>
+            <a:ext cx="137160" cy="50800"/>
+          </a:xfrm>
+          <a:prstGeom prst="rect">
+            <a:avLst/>
+          </a:prstGeom>
+          <a:solidFill>
+            <a:srgbClr val="334055"/>
+          </a:solidFill>
+          <a:ln>
+            <a:noFill/>
+          </a:ln>
+        </p:spPr>
+        <p:style>
+          <a:lnRef idx="1">
+            <a:schemeClr val="accent1"/>
+          </a:lnRef>
+          <a:fillRef idx="3">
+            <a:schemeClr val="accent1"/>
+          </a:fillRef>
+          <a:effectRef idx="2">
+            <a:schemeClr val="accent1"/>
+          </a:effectRef>
+          <a:fontRef idx="minor">
+            <a:schemeClr val="lt1"/>
+          </a:fontRef>
+        </p:style>
+        <p:txBody>
+          <a:bodyPr rtlCol="0" anchor="ctr"/>
+          <a:lstStyle/>
+          <a:p>
+            <a:pPr algn="ctr"/>
+          </a:p>
+        </p:txBody>
+      </p:sp>
+      <p:sp>
+        <p:nvSpPr>
+          <p:cNvPr id="15" name="Rounded Rectangle 14"/>
+          <p:cNvSpPr/>
+          <p:nvPr/>
+        </p:nvSpPr>
+        <p:spPr>
+          <a:xfrm>
+            <a:off x="9936327" y="2926080"/>
+            <a:ext cx="1371600" cy="1005840"/>
+          </a:xfrm>
+          <a:prstGeom prst="roundRect">
+            <a:avLst/>
+          </a:prstGeom>
+          <a:solidFill>
+            <a:srgbClr val="10B981"/>
+          </a:solidFill>
+          <a:ln>
+            <a:noFill/>
+          </a:ln>
+        </p:spPr>
+        <p:style>
+          <a:lnRef idx="1">
+            <a:schemeClr val="accent1"/>
+          </a:lnRef>
+          <a:fillRef idx="3">
+            <a:schemeClr val="accent1"/>
+          </a:fillRef>
+          <a:effectRef idx="2">
+            <a:schemeClr val="accent1"/>
+          </a:effectRef>
+          <a:fontRef idx="minor">
+            <a:schemeClr val="lt1"/>
+          </a:fontRef>
+        </p:style>
+        <p:txBody>
+          <a:bodyPr rtlCol="0" anchor="ctr" wrap="square"/>
+          <a:lstStyle/>
+          <a:p>
+            <a:pPr algn="ctr">
+              <a:defRPr sz="1300" b="1">
+                <a:solidFill>
+                  <a:srgbClr val="FFFFFF"/>
+                </a:solidFill>
+              </a:defRPr>
+            </a:pPr>
+            <a:r>
+              <a:t>計上済</a:t>
+            </a:r>
+          </a:p>
+        </p:txBody>
+      </p:sp>
+    </p:spTree>
+  </p:cSld>
+  <p:clrMapOvr>
+    <a:masterClrMapping/>
+  </p:clrMapOvr>
+</p:sld>
+</file>
+
+<file path=ppt/slides/slide33.xml><?xml version="1.0" encoding="utf-8"?>
+<p:sld xmlns:a="http://schemas.openxmlformats.org/drawingml/2006/main" xmlns:p="http://schemas.openxmlformats.org/presentationml/2006/main" xmlns:r="http://schemas.openxmlformats.org/officeDocument/2006/relationships">
+  <p:cSld>
+    <p:bg>
+      <p:bgPr>
+        <a:solidFill>
+          <a:srgbClr val="0F0F1A"/>
+        </a:solidFill>
+        <a:effectLst/>
+      </p:bgPr>
+    </p:bg>
+    <p:spTree>
+      <p:nvGrpSpPr>
+        <p:cNvPr id="1" name=""/>
+        <p:cNvGrpSpPr/>
+        <p:nvPr/>
+      </p:nvGrpSpPr>
+      <p:grpSpPr/>
+      <p:sp>
+        <p:nvSpPr>
+          <p:cNvPr id="2" name="TextBox 1"/>
+          <p:cNvSpPr txBox="1"/>
+          <p:nvPr/>
+        </p:nvSpPr>
+        <p:spPr>
+          <a:xfrm>
+            <a:off x="1371600" y="640080"/>
+            <a:ext cx="9144000" cy="914400"/>
+          </a:xfrm>
+          <a:prstGeom prst="rect">
+            <a:avLst/>
+          </a:prstGeom>
+          <a:noFill/>
+        </p:spPr>
+        <p:txBody>
+          <a:bodyPr wrap="none">
+            <a:spAutoFit/>
+          </a:bodyPr>
+          <a:lstStyle/>
+          <a:p>
+            <a:pPr>
+              <a:defRPr sz="3200" b="1">
+                <a:solidFill>
+                  <a:srgbClr val="FFFFFF"/>
+                </a:solidFill>
+              </a:defRPr>
+            </a:pPr>
+            <a:r>
+              <a:t>購入済フロー（立替）</a:t>
+            </a:r>
+          </a:p>
+        </p:txBody>
+      </p:sp>
+      <p:sp>
+        <p:nvSpPr>
+          <p:cNvPr id="3" name="Rounded Rectangle 2"/>
+          <p:cNvSpPr/>
+          <p:nvPr/>
+        </p:nvSpPr>
+        <p:spPr>
+          <a:xfrm>
+            <a:off x="1638147" y="2926080"/>
+            <a:ext cx="1371600" cy="1005840"/>
+          </a:xfrm>
+          <a:prstGeom prst="roundRect">
+            <a:avLst/>
+          </a:prstGeom>
+          <a:solidFill>
+            <a:srgbClr val="EC4899"/>
+          </a:solidFill>
+          <a:ln>
+            <a:noFill/>
+          </a:ln>
+        </p:spPr>
+        <p:style>
+          <a:lnRef idx="1">
+            <a:schemeClr val="accent1"/>
+          </a:lnRef>
+          <a:fillRef idx="3">
+            <a:schemeClr val="accent1"/>
+          </a:fillRef>
+          <a:effectRef idx="2">
+            <a:schemeClr val="accent1"/>
+          </a:effectRef>
+          <a:fontRef idx="minor">
+            <a:schemeClr val="lt1"/>
+          </a:fontRef>
+        </p:style>
+        <p:txBody>
+          <a:bodyPr rtlCol="0" anchor="ctr" wrap="square"/>
+          <a:lstStyle/>
+          <a:p>
+            <a:pPr algn="ctr">
+              <a:defRPr sz="1300" b="1">
+                <a:solidFill>
+                  <a:srgbClr val="FFFFFF"/>
+                </a:solidFill>
+              </a:defRPr>
+            </a:pPr>
+            <a:r>
+              <a:t>申請済</a:t>
+            </a:r>
+            <a:br/>
+            <a:r>
+              <a:t>+証憑</a:t>
+            </a:r>
+          </a:p>
+        </p:txBody>
+      </p:sp>
+      <p:sp>
+        <p:nvSpPr>
+          <p:cNvPr id="4" name="Rectangle 3"/>
+          <p:cNvSpPr/>
+          <p:nvPr/>
+        </p:nvSpPr>
+        <p:spPr>
+          <a:xfrm>
+            <a:off x="3009747" y="3403600"/>
+            <a:ext cx="137160" cy="50800"/>
+          </a:xfrm>
+          <a:prstGeom prst="rect">
+            <a:avLst/>
+          </a:prstGeom>
+          <a:solidFill>
+            <a:srgbClr val="334055"/>
+          </a:solidFill>
+          <a:ln>
+            <a:noFill/>
+          </a:ln>
+        </p:spPr>
+        <p:style>
+          <a:lnRef idx="1">
+            <a:schemeClr val="accent1"/>
+          </a:lnRef>
+          <a:fillRef idx="3">
+            <a:schemeClr val="accent1"/>
+          </a:fillRef>
+          <a:effectRef idx="2">
+            <a:schemeClr val="accent1"/>
+          </a:effectRef>
+          <a:fontRef idx="minor">
+            <a:schemeClr val="lt1"/>
+          </a:fontRef>
+        </p:style>
+        <p:txBody>
+          <a:bodyPr rtlCol="0" anchor="ctr"/>
+          <a:lstStyle/>
+          <a:p>
+            <a:pPr algn="ctr"/>
+          </a:p>
+        </p:txBody>
+      </p:sp>
+      <p:sp>
+        <p:nvSpPr>
+          <p:cNvPr id="5" name="Rounded Rectangle 4"/>
+          <p:cNvSpPr/>
+          <p:nvPr/>
+        </p:nvSpPr>
+        <p:spPr>
+          <a:xfrm>
+            <a:off x="3146907" y="2926080"/>
+            <a:ext cx="1371600" cy="1005840"/>
+          </a:xfrm>
+          <a:prstGeom prst="roundRect">
+            <a:avLst/>
+          </a:prstGeom>
+          <a:solidFill>
+            <a:srgbClr val="7C3AED"/>
+          </a:solidFill>
+          <a:ln>
+            <a:noFill/>
+          </a:ln>
+        </p:spPr>
+        <p:style>
+          <a:lnRef idx="1">
+            <a:schemeClr val="accent1"/>
+          </a:lnRef>
+          <a:fillRef idx="3">
+            <a:schemeClr val="accent1"/>
+          </a:fillRef>
+          <a:effectRef idx="2">
+            <a:schemeClr val="accent1"/>
+          </a:effectRef>
+          <a:fontRef idx="minor">
+            <a:schemeClr val="lt1"/>
+          </a:fontRef>
+        </p:style>
+        <p:txBody>
+          <a:bodyPr rtlCol="0" anchor="ctr" wrap="square"/>
+          <a:lstStyle/>
+          <a:p>
+            <a:pPr algn="ctr">
+              <a:defRPr sz="1300" b="1">
+                <a:solidFill>
+                  <a:srgbClr val="FFFFFF"/>
+                </a:solidFill>
+              </a:defRPr>
+            </a:pPr>
+            <a:r>
+              <a:t>承認済</a:t>
+            </a:r>
+          </a:p>
+        </p:txBody>
+      </p:sp>
+      <p:sp>
+        <p:nvSpPr>
+          <p:cNvPr id="6" name="Rectangle 5"/>
+          <p:cNvSpPr/>
+          <p:nvPr/>
+        </p:nvSpPr>
+        <p:spPr>
+          <a:xfrm>
+            <a:off x="4518507" y="3403600"/>
+            <a:ext cx="137160" cy="50800"/>
+          </a:xfrm>
+          <a:prstGeom prst="rect">
+            <a:avLst/>
+          </a:prstGeom>
+          <a:solidFill>
+            <a:srgbClr val="334055"/>
+          </a:solidFill>
+          <a:ln>
+            <a:noFill/>
+          </a:ln>
+        </p:spPr>
+        <p:style>
+          <a:lnRef idx="1">
+            <a:schemeClr val="accent1"/>
+          </a:lnRef>
+          <a:fillRef idx="3">
+            <a:schemeClr val="accent1"/>
+          </a:fillRef>
+          <a:effectRef idx="2">
+            <a:schemeClr val="accent1"/>
+          </a:effectRef>
+          <a:fontRef idx="minor">
+            <a:schemeClr val="lt1"/>
+          </a:fontRef>
+        </p:style>
+        <p:txBody>
+          <a:bodyPr rtlCol="0" anchor="ctr"/>
+          <a:lstStyle/>
+          <a:p>
+            <a:pPr algn="ctr"/>
+          </a:p>
+        </p:txBody>
+      </p:sp>
+      <p:sp>
+        <p:nvSpPr>
+          <p:cNvPr id="7" name="Rounded Rectangle 6"/>
+          <p:cNvSpPr/>
+          <p:nvPr/>
+        </p:nvSpPr>
+        <p:spPr>
+          <a:xfrm>
+            <a:off x="4655667" y="2926080"/>
+            <a:ext cx="1371600" cy="1005840"/>
+          </a:xfrm>
+          <a:prstGeom prst="roundRect">
+            <a:avLst/>
+          </a:prstGeom>
+          <a:solidFill>
+            <a:srgbClr val="10B981"/>
+          </a:solidFill>
+          <a:ln>
+            <a:noFill/>
+          </a:ln>
+        </p:spPr>
+        <p:style>
+          <a:lnRef idx="1">
+            <a:schemeClr val="accent1"/>
+          </a:lnRef>
+          <a:fillRef idx="3">
+            <a:schemeClr val="accent1"/>
+          </a:fillRef>
+          <a:effectRef idx="2">
+            <a:schemeClr val="accent1"/>
+          </a:effectRef>
+          <a:fontRef idx="minor">
+            <a:schemeClr val="lt1"/>
+          </a:fontRef>
+        </p:style>
+        <p:txBody>
+          <a:bodyPr rtlCol="0" anchor="ctr" wrap="square"/>
+          <a:lstStyle/>
+          <a:p>
+            <a:pPr algn="ctr">
+              <a:defRPr sz="1300" b="1">
+                <a:solidFill>
+                  <a:srgbClr val="FFFFFF"/>
+                </a:solidFill>
+              </a:defRPr>
+            </a:pPr>
+            <a:r>
+              <a:t>検収済</a:t>
+            </a:r>
+            <a:br/>
+            <a:r>
+              <a:t>（即時）</a:t>
+            </a:r>
+          </a:p>
+        </p:txBody>
+      </p:sp>
+      <p:sp>
+        <p:nvSpPr>
+          <p:cNvPr id="8" name="Rectangle 7"/>
+          <p:cNvSpPr/>
+          <p:nvPr/>
+        </p:nvSpPr>
+        <p:spPr>
+          <a:xfrm>
+            <a:off x="6027267" y="3403600"/>
+            <a:ext cx="137160" cy="50800"/>
+          </a:xfrm>
+          <a:prstGeom prst="rect">
+            <a:avLst/>
+          </a:prstGeom>
+          <a:solidFill>
+            <a:srgbClr val="334055"/>
+          </a:solidFill>
+          <a:ln>
+            <a:noFill/>
+          </a:ln>
+        </p:spPr>
+        <p:style>
+          <a:lnRef idx="1">
+            <a:schemeClr val="accent1"/>
+          </a:lnRef>
+          <a:fillRef idx="3">
+            <a:schemeClr val="accent1"/>
+          </a:fillRef>
+          <a:effectRef idx="2">
+            <a:schemeClr val="accent1"/>
+          </a:effectRef>
+          <a:fontRef idx="minor">
+            <a:schemeClr val="lt1"/>
+          </a:fontRef>
+        </p:style>
+        <p:txBody>
+          <a:bodyPr rtlCol="0" anchor="ctr"/>
+          <a:lstStyle/>
+          <a:p>
+            <a:pPr algn="ctr"/>
+          </a:p>
+        </p:txBody>
+      </p:sp>
+      <p:sp>
+        <p:nvSpPr>
+          <p:cNvPr id="9" name="Rounded Rectangle 8"/>
+          <p:cNvSpPr/>
+          <p:nvPr/>
+        </p:nvSpPr>
+        <p:spPr>
+          <a:xfrm>
+            <a:off x="6164427" y="2926080"/>
+            <a:ext cx="1371600" cy="1005840"/>
+          </a:xfrm>
+          <a:prstGeom prst="roundRect">
+            <a:avLst/>
+          </a:prstGeom>
+          <a:solidFill>
+            <a:srgbClr val="F59E0B"/>
+          </a:solidFill>
+          <a:ln>
+            <a:noFill/>
+          </a:ln>
+        </p:spPr>
+        <p:style>
+          <a:lnRef idx="1">
+            <a:schemeClr val="accent1"/>
+          </a:lnRef>
+          <a:fillRef idx="3">
+            <a:schemeClr val="accent1"/>
+          </a:fillRef>
+          <a:effectRef idx="2">
+            <a:schemeClr val="accent1"/>
+          </a:effectRef>
+          <a:fontRef idx="minor">
+            <a:schemeClr val="lt1"/>
+          </a:fontRef>
+        </p:style>
+        <p:txBody>
+          <a:bodyPr rtlCol="0" anchor="ctr" wrap="square"/>
+          <a:lstStyle/>
+          <a:p>
+            <a:pPr algn="ctr">
+              <a:defRPr sz="1300" b="1">
+                <a:solidFill>
+                  <a:srgbClr val="FFFFFF"/>
+                </a:solidFill>
+              </a:defRPr>
+            </a:pPr>
+            <a:r>
+              <a:t>証憑完了</a:t>
+            </a:r>
+          </a:p>
+        </p:txBody>
+      </p:sp>
+      <p:sp>
+        <p:nvSpPr>
+          <p:cNvPr id="10" name="Rectangle 9"/>
+          <p:cNvSpPr/>
+          <p:nvPr/>
+        </p:nvSpPr>
+        <p:spPr>
+          <a:xfrm>
+            <a:off x="7536027" y="3403600"/>
+            <a:ext cx="137160" cy="50800"/>
+          </a:xfrm>
+          <a:prstGeom prst="rect">
+            <a:avLst/>
+          </a:prstGeom>
+          <a:solidFill>
+            <a:srgbClr val="334055"/>
+          </a:solidFill>
+          <a:ln>
+            <a:noFill/>
+          </a:ln>
+        </p:spPr>
+        <p:style>
+          <a:lnRef idx="1">
+            <a:schemeClr val="accent1"/>
+          </a:lnRef>
+          <a:fillRef idx="3">
+            <a:schemeClr val="accent1"/>
+          </a:fillRef>
+          <a:effectRef idx="2">
+            <a:schemeClr val="accent1"/>
+          </a:effectRef>
+          <a:fontRef idx="minor">
+            <a:schemeClr val="lt1"/>
+          </a:fontRef>
+        </p:style>
+        <p:txBody>
+          <a:bodyPr rtlCol="0" anchor="ctr"/>
+          <a:lstStyle/>
+          <a:p>
+            <a:pPr algn="ctr"/>
+          </a:p>
+        </p:txBody>
+      </p:sp>
+      <p:sp>
+        <p:nvSpPr>
+          <p:cNvPr id="11" name="Rounded Rectangle 10"/>
+          <p:cNvSpPr/>
+          <p:nvPr/>
+        </p:nvSpPr>
+        <p:spPr>
+          <a:xfrm>
+            <a:off x="7673187" y="2926080"/>
+            <a:ext cx="1371600" cy="1005840"/>
+          </a:xfrm>
+          <a:prstGeom prst="roundRect">
+            <a:avLst/>
+          </a:prstGeom>
+          <a:solidFill>
+            <a:srgbClr val="10B981"/>
+          </a:solidFill>
+          <a:ln>
+            <a:noFill/>
+          </a:ln>
+        </p:spPr>
+        <p:style>
+          <a:lnRef idx="1">
+            <a:schemeClr val="accent1"/>
+          </a:lnRef>
+          <a:fillRef idx="3">
+            <a:schemeClr val="accent1"/>
+          </a:fillRef>
+          <a:effectRef idx="2">
+            <a:schemeClr val="accent1"/>
+          </a:effectRef>
+          <a:fontRef idx="minor">
+            <a:schemeClr val="lt1"/>
+          </a:fontRef>
+        </p:style>
+        <p:txBody>
+          <a:bodyPr rtlCol="0" anchor="ctr" wrap="square"/>
+          <a:lstStyle/>
+          <a:p>
+            <a:pPr algn="ctr">
+              <a:defRPr sz="1300" b="1">
+                <a:solidFill>
+                  <a:srgbClr val="FFFFFF"/>
+                </a:solidFill>
+              </a:defRPr>
+            </a:pPr>
+            <a:r>
+              <a:t>計上済</a:t>
+            </a:r>
+          </a:p>
+        </p:txBody>
+      </p:sp>
+      <p:sp>
+        <p:nvSpPr>
+          <p:cNvPr id="12" name="Rectangle 11"/>
+          <p:cNvSpPr/>
+          <p:nvPr/>
+        </p:nvSpPr>
+        <p:spPr>
+          <a:xfrm>
+            <a:off x="9044787" y="3403600"/>
+            <a:ext cx="137160" cy="50800"/>
+          </a:xfrm>
+          <a:prstGeom prst="rect">
+            <a:avLst/>
+          </a:prstGeom>
+          <a:solidFill>
+            <a:srgbClr val="334055"/>
+          </a:solidFill>
+          <a:ln>
+            <a:noFill/>
+          </a:ln>
+        </p:spPr>
+        <p:style>
+          <a:lnRef idx="1">
+            <a:schemeClr val="accent1"/>
+          </a:lnRef>
+          <a:fillRef idx="3">
+            <a:schemeClr val="accent1"/>
+          </a:fillRef>
+          <a:effectRef idx="2">
+            <a:schemeClr val="accent1"/>
+          </a:effectRef>
+          <a:fontRef idx="minor">
+            <a:schemeClr val="lt1"/>
+          </a:fontRef>
+        </p:style>
+        <p:txBody>
+          <a:bodyPr rtlCol="0" anchor="ctr"/>
+          <a:lstStyle/>
+          <a:p>
+            <a:pPr algn="ctr"/>
+          </a:p>
+        </p:txBody>
+      </p:sp>
+      <p:sp>
+        <p:nvSpPr>
+          <p:cNvPr id="13" name="Rounded Rectangle 12"/>
+          <p:cNvSpPr/>
+          <p:nvPr/>
+        </p:nvSpPr>
+        <p:spPr>
+          <a:xfrm>
+            <a:off x="9181947" y="2926080"/>
+            <a:ext cx="1371600" cy="1005840"/>
+          </a:xfrm>
+          <a:prstGeom prst="roundRect">
+            <a:avLst/>
+          </a:prstGeom>
+          <a:solidFill>
+            <a:srgbClr val="10B981"/>
+          </a:solidFill>
+          <a:ln>
+            <a:noFill/>
+          </a:ln>
+        </p:spPr>
+        <p:style>
+          <a:lnRef idx="1">
+            <a:schemeClr val="accent1"/>
+          </a:lnRef>
+          <a:fillRef idx="3">
+            <a:schemeClr val="accent1"/>
+          </a:fillRef>
+          <a:effectRef idx="2">
+            <a:schemeClr val="accent1"/>
+          </a:effectRef>
+          <a:fontRef idx="minor">
+            <a:schemeClr val="lt1"/>
+          </a:fontRef>
+        </p:style>
+        <p:txBody>
+          <a:bodyPr rtlCol="0" anchor="ctr" wrap="square"/>
+          <a:lstStyle/>
+          <a:p>
+            <a:pPr algn="ctr">
+              <a:defRPr sz="1300" b="1">
+                <a:solidFill>
+                  <a:srgbClr val="FFFFFF"/>
+                </a:solidFill>
+              </a:defRPr>
+            </a:pPr>
+            <a:r>
+              <a:t>支払済</a:t>
+            </a:r>
+          </a:p>
+        </p:txBody>
+      </p:sp>
+    </p:spTree>
+  </p:cSld>
+  <p:clrMapOvr>
+    <a:masterClrMapping/>
+  </p:clrMapOvr>
+</p:sld>
+</file>
+
+<file path=ppt/slides/slide34.xml><?xml version="1.0" encoding="utf-8"?>
 <p:sld xmlns:a="http://schemas.openxmlformats.org/drawingml/2006/main" xmlns:p="http://schemas.openxmlformats.org/presentationml/2006/main" xmlns:r="http://schemas.openxmlformats.org/officeDocument/2006/relationships">
   <p:cSld>
     <p:bg>

--- a/docs/operational-guide.pptx
+++ b/docs/operational-guide.pptx
@@ -38,7 +38,6 @@
     <p:sldId id="286" r:id="rId37"/>
     <p:sldId id="287" r:id="rId38"/>
     <p:sldId id="288" r:id="rId39"/>
-    <p:sldId id="289" r:id="rId40"/>
   </p:sldIdLst>
   <p:sldSz cx="12191695" cy="6858000" type="screen4x3"/>
   <p:notesSz cx="6858000" cy="9144000"/>
@@ -3656,7 +3655,7 @@
               </a:defRPr>
             </a:pPr>
             <a:r>
-              <a:t>承認閾値</a:t>
+              <a:t>承認と発注</a:t>
             </a:r>
           </a:p>
         </p:txBody>
@@ -3777,7 +3776,7 @@
               </a:defRPr>
             </a:pPr>
             <a:r>
-              <a:t>&lt; 10万</a:t>
+              <a:t>承認</a:t>
             </a:r>
           </a:p>
         </p:txBody>
@@ -3816,7 +3815,7 @@
             </a:r>
             <a:br/>
             <a:r>
-              <a:t>1段階承認</a:t>
+              <a:t>金額に関わらず1段階</a:t>
             </a:r>
           </a:p>
         </p:txBody>
@@ -3879,7 +3878,7 @@
             <a:avLst/>
           </a:prstGeom>
           <a:solidFill>
-            <a:srgbClr val="F59E0B"/>
+            <a:srgbClr val="00D4FF"/>
           </a:solidFill>
           <a:ln>
             <a:noFill/>
@@ -3932,12 +3931,12 @@
             <a:pPr>
               <a:defRPr sz="4800" b="1">
                 <a:solidFill>
-                  <a:srgbClr val="F59E0B"/>
-                </a:solidFill>
-              </a:defRPr>
-            </a:pPr>
-            <a:r>
-              <a:t>&gt;= 10万</a:t>
+                  <a:srgbClr val="00D4FF"/>
+                </a:solidFill>
+              </a:defRPr>
+            </a:pPr>
+            <a:r>
+              <a:t>発注</a:t>
             </a:r>
           </a:p>
         </p:txBody>
@@ -3972,11 +3971,11 @@
               </a:defRPr>
             </a:pPr>
             <a:r>
-              <a:t>部門長 + 管理本部</a:t>
+              <a:t>申請者が全件発注</a:t>
             </a:r>
             <a:br/>
             <a:r>
-              <a:t>2段階承認</a:t>
+              <a:t>カード/請求書問わず</a:t>
             </a:r>
           </a:p>
         </p:txBody>
@@ -4097,7 +4096,7 @@
               </a:defRPr>
             </a:pPr>
             <a:r>
-              <a:t>請求書払い</a:t>
+              <a:t>経理</a:t>
             </a:r>
           </a:p>
         </p:txBody>
@@ -4132,11 +4131,11 @@
               </a:defRPr>
             </a:pPr>
             <a:r>
-              <a:t>管理本部が</a:t>
+              <a:t>管理本部</a:t>
             </a:r>
             <a:br/>
             <a:r>
-              <a:t>発注を担当</a:t>
+              <a:t>仕訳・照合・支払</a:t>
             </a:r>
           </a:p>
         </p:txBody>
@@ -4212,7 +4211,7 @@
         </p:nvGraphicFramePr>
         <p:xfrm>
           <a:off x="1097280" y="1554480"/>
-          <a:ext cx="9966960" cy="2880360"/>
+          <a:ext cx="9966960" cy="2468880"/>
         </p:xfrm>
         <a:graphic>
           <a:graphicData uri="http://schemas.openxmlformats.org/drawingml/2006/table">
@@ -4334,7 +4333,7 @@
                         </a:defRPr>
                       </a:pPr>
                       <a:r>
-                        <a:t>承認</a:t>
+                        <a:t>承認 / 差戻し</a:t>
                       </a:r>
                     </a:p>
                   </a:txBody>
@@ -4380,7 +4379,7 @@
                         </a:defRPr>
                       </a:pPr>
                       <a:r>
-                        <a:t>O</a:t>
+                        <a:t>○</a:t>
                       </a:r>
                     </a:p>
                   </a:txBody>
@@ -4403,7 +4402,7 @@
                         </a:defRPr>
                       </a:pPr>
                       <a:r>
-                        <a:t>O（10万以上）</a:t>
+                        <a:t>-</a:t>
                       </a:r>
                     </a:p>
                   </a:txBody>
@@ -4428,7 +4427,218 @@
                         </a:defRPr>
                       </a:pPr>
                       <a:r>
-                        <a:t>差戻し</a:t>
+                        <a:t>発注完了</a:t>
+                      </a:r>
+                    </a:p>
+                  </a:txBody>
+                  <a:tcPr>
+                    <a:solidFill>
+                      <a:srgbClr val="0F0F1A"/>
+                    </a:solidFill>
+                  </a:tcPr>
+                </a:tc>
+                <a:tc>
+                  <a:txBody>
+                    <a:bodyPr/>
+                    <a:lstStyle/>
+                    <a:p>
+                      <a:pPr>
+                        <a:defRPr sz="1200">
+                          <a:solidFill>
+                            <a:srgbClr val="E2E8F0"/>
+                          </a:solidFill>
+                        </a:defRPr>
+                      </a:pPr>
+                      <a:r>
+                        <a:t>○</a:t>
+                      </a:r>
+                    </a:p>
+                  </a:txBody>
+                  <a:tcPr>
+                    <a:solidFill>
+                      <a:srgbClr val="0F0F1A"/>
+                    </a:solidFill>
+                  </a:tcPr>
+                </a:tc>
+                <a:tc>
+                  <a:txBody>
+                    <a:bodyPr/>
+                    <a:lstStyle/>
+                    <a:p>
+                      <a:pPr>
+                        <a:defRPr sz="1200">
+                          <a:solidFill>
+                            <a:srgbClr val="E2E8F0"/>
+                          </a:solidFill>
+                        </a:defRPr>
+                      </a:pPr>
+                      <a:r>
+                        <a:t>○</a:t>
+                      </a:r>
+                    </a:p>
+                  </a:txBody>
+                  <a:tcPr>
+                    <a:solidFill>
+                      <a:srgbClr val="0F0F1A"/>
+                    </a:solidFill>
+                  </a:tcPr>
+                </a:tc>
+                <a:tc>
+                  <a:txBody>
+                    <a:bodyPr/>
+                    <a:lstStyle/>
+                    <a:p>
+                      <a:pPr>
+                        <a:defRPr sz="1200">
+                          <a:solidFill>
+                            <a:srgbClr val="E2E8F0"/>
+                          </a:solidFill>
+                        </a:defRPr>
+                      </a:pPr>
+                      <a:r>
+                        <a:t>○</a:t>
+                      </a:r>
+                    </a:p>
+                  </a:txBody>
+                  <a:tcPr>
+                    <a:solidFill>
+                      <a:srgbClr val="0F0F1A"/>
+                    </a:solidFill>
+                  </a:tcPr>
+                </a:tc>
+              </a:tr>
+              <a:tr h="411480">
+                <a:tc>
+                  <a:txBody>
+                    <a:bodyPr/>
+                    <a:lstStyle/>
+                    <a:p>
+                      <a:pPr>
+                        <a:defRPr sz="1200">
+                          <a:solidFill>
+                            <a:srgbClr val="E2E8F0"/>
+                          </a:solidFill>
+                        </a:defRPr>
+                      </a:pPr>
+                      <a:r>
+                        <a:t>検収完了</a:t>
+                      </a:r>
+                    </a:p>
+                  </a:txBody>
+                  <a:tcPr>
+                    <a:solidFill>
+                      <a:srgbClr val="1E293B"/>
+                    </a:solidFill>
+                  </a:tcPr>
+                </a:tc>
+                <a:tc>
+                  <a:txBody>
+                    <a:bodyPr/>
+                    <a:lstStyle/>
+                    <a:p>
+                      <a:pPr>
+                        <a:defRPr sz="1200">
+                          <a:solidFill>
+                            <a:srgbClr val="E2E8F0"/>
+                          </a:solidFill>
+                        </a:defRPr>
+                      </a:pPr>
+                      <a:r>
+                        <a:t>○</a:t>
+                      </a:r>
+                    </a:p>
+                  </a:txBody>
+                  <a:tcPr>
+                    <a:solidFill>
+                      <a:srgbClr val="1E293B"/>
+                    </a:solidFill>
+                  </a:tcPr>
+                </a:tc>
+                <a:tc>
+                  <a:txBody>
+                    <a:bodyPr/>
+                    <a:lstStyle/>
+                    <a:p>
+                      <a:pPr>
+                        <a:defRPr sz="1200">
+                          <a:solidFill>
+                            <a:srgbClr val="E2E8F0"/>
+                          </a:solidFill>
+                        </a:defRPr>
+                      </a:pPr>
+                      <a:r>
+                        <a:t>-</a:t>
+                      </a:r>
+                    </a:p>
+                  </a:txBody>
+                  <a:tcPr>
+                    <a:solidFill>
+                      <a:srgbClr val="1E293B"/>
+                    </a:solidFill>
+                  </a:tcPr>
+                </a:tc>
+                <a:tc>
+                  <a:txBody>
+                    <a:bodyPr/>
+                    <a:lstStyle/>
+                    <a:p>
+                      <a:pPr>
+                        <a:defRPr sz="1200">
+                          <a:solidFill>
+                            <a:srgbClr val="E2E8F0"/>
+                          </a:solidFill>
+                        </a:defRPr>
+                      </a:pPr>
+                      <a:r>
+                        <a:t>-</a:t>
+                      </a:r>
+                    </a:p>
+                  </a:txBody>
+                  <a:tcPr>
+                    <a:solidFill>
+                      <a:srgbClr val="1E293B"/>
+                    </a:solidFill>
+                  </a:tcPr>
+                </a:tc>
+              </a:tr>
+              <a:tr h="411480">
+                <a:tc>
+                  <a:txBody>
+                    <a:bodyPr/>
+                    <a:lstStyle/>
+                    <a:p>
+                      <a:pPr>
+                        <a:defRPr sz="1200">
+                          <a:solidFill>
+                            <a:srgbClr val="E2E8F0"/>
+                          </a:solidFill>
+                        </a:defRPr>
+                      </a:pPr>
+                      <a:r>
+                        <a:t>取消</a:t>
+                      </a:r>
+                    </a:p>
+                  </a:txBody>
+                  <a:tcPr>
+                    <a:solidFill>
+                      <a:srgbClr val="0F0F1A"/>
+                    </a:solidFill>
+                  </a:tcPr>
+                </a:tc>
+                <a:tc>
+                  <a:txBody>
+                    <a:bodyPr/>
+                    <a:lstStyle/>
+                    <a:p>
+                      <a:pPr>
+                        <a:defRPr sz="1200">
+                          <a:solidFill>
+                            <a:srgbClr val="E2E8F0"/>
+                          </a:solidFill>
+                        </a:defRPr>
+                      </a:pPr>
+                      <a:r>
+                        <a:t>○（発注前のみ）</a:t>
                       </a:r>
                     </a:p>
                   </a:txBody>
@@ -4474,30 +4684,7 @@
                         </a:defRPr>
                       </a:pPr>
                       <a:r>
-                        <a:t>O</a:t>
-                      </a:r>
-                    </a:p>
-                  </a:txBody>
-                  <a:tcPr>
-                    <a:solidFill>
-                      <a:srgbClr val="0F0F1A"/>
-                    </a:solidFill>
-                  </a:tcPr>
-                </a:tc>
-                <a:tc>
-                  <a:txBody>
-                    <a:bodyPr/>
-                    <a:lstStyle/>
-                    <a:p>
-                      <a:pPr>
-                        <a:defRPr sz="1200">
-                          <a:solidFill>
-                            <a:srgbClr val="E2E8F0"/>
-                          </a:solidFill>
-                        </a:defRPr>
-                      </a:pPr>
-                      <a:r>
-                        <a:t>O（10万以上）</a:t>
+                        <a:t>○</a:t>
                       </a:r>
                     </a:p>
                   </a:txBody>
@@ -4522,30 +4709,7 @@
                         </a:defRPr>
                       </a:pPr>
                       <a:r>
-                        <a:t>発注完了</a:t>
-                      </a:r>
-                    </a:p>
-                  </a:txBody>
-                  <a:tcPr>
-                    <a:solidFill>
-                      <a:srgbClr val="1E293B"/>
-                    </a:solidFill>
-                  </a:tcPr>
-                </a:tc>
-                <a:tc>
-                  <a:txBody>
-                    <a:bodyPr/>
-                    <a:lstStyle/>
-                    <a:p>
-                      <a:pPr>
-                        <a:defRPr sz="1200">
-                          <a:solidFill>
-                            <a:srgbClr val="E2E8F0"/>
-                          </a:solidFill>
-                        </a:defRPr>
-                      </a:pPr>
-                      <a:r>
-                        <a:t>O（10万未満カード）</a:t>
+                        <a:t>仕訳登録</a:t>
                       </a:r>
                     </a:p>
                   </a:txBody>
@@ -4591,171 +4755,6 @@
                         </a:defRPr>
                       </a:pPr>
                       <a:r>
-                        <a:t>O（常時）</a:t>
-                      </a:r>
-                    </a:p>
-                  </a:txBody>
-                  <a:tcPr>
-                    <a:solidFill>
-                      <a:srgbClr val="1E293B"/>
-                    </a:solidFill>
-                  </a:tcPr>
-                </a:tc>
-              </a:tr>
-              <a:tr h="411480">
-                <a:tc>
-                  <a:txBody>
-                    <a:bodyPr/>
-                    <a:lstStyle/>
-                    <a:p>
-                      <a:pPr>
-                        <a:defRPr sz="1200">
-                          <a:solidFill>
-                            <a:srgbClr val="E2E8F0"/>
-                          </a:solidFill>
-                        </a:defRPr>
-                      </a:pPr>
-                      <a:r>
-                        <a:t>検収完了</a:t>
-                      </a:r>
-                    </a:p>
-                  </a:txBody>
-                  <a:tcPr>
-                    <a:solidFill>
-                      <a:srgbClr val="0F0F1A"/>
-                    </a:solidFill>
-                  </a:tcPr>
-                </a:tc>
-                <a:tc>
-                  <a:txBody>
-                    <a:bodyPr/>
-                    <a:lstStyle/>
-                    <a:p>
-                      <a:pPr>
-                        <a:defRPr sz="1200">
-                          <a:solidFill>
-                            <a:srgbClr val="E2E8F0"/>
-                          </a:solidFill>
-                        </a:defRPr>
-                      </a:pPr>
-                      <a:r>
-                        <a:t>O</a:t>
-                      </a:r>
-                    </a:p>
-                  </a:txBody>
-                  <a:tcPr>
-                    <a:solidFill>
-                      <a:srgbClr val="0F0F1A"/>
-                    </a:solidFill>
-                  </a:tcPr>
-                </a:tc>
-                <a:tc>
-                  <a:txBody>
-                    <a:bodyPr/>
-                    <a:lstStyle/>
-                    <a:p>
-                      <a:pPr>
-                        <a:defRPr sz="1200">
-                          <a:solidFill>
-                            <a:srgbClr val="E2E8F0"/>
-                          </a:solidFill>
-                        </a:defRPr>
-                      </a:pPr>
-                      <a:r>
-                        <a:t>-</a:t>
-                      </a:r>
-                    </a:p>
-                  </a:txBody>
-                  <a:tcPr>
-                    <a:solidFill>
-                      <a:srgbClr val="0F0F1A"/>
-                    </a:solidFill>
-                  </a:tcPr>
-                </a:tc>
-                <a:tc>
-                  <a:txBody>
-                    <a:bodyPr/>
-                    <a:lstStyle/>
-                    <a:p>
-                      <a:pPr>
-                        <a:defRPr sz="1200">
-                          <a:solidFill>
-                            <a:srgbClr val="E2E8F0"/>
-                          </a:solidFill>
-                        </a:defRPr>
-                      </a:pPr>
-                      <a:r>
-                        <a:t>-</a:t>
-                      </a:r>
-                    </a:p>
-                  </a:txBody>
-                  <a:tcPr>
-                    <a:solidFill>
-                      <a:srgbClr val="0F0F1A"/>
-                    </a:solidFill>
-                  </a:tcPr>
-                </a:tc>
-              </a:tr>
-              <a:tr h="411480">
-                <a:tc>
-                  <a:txBody>
-                    <a:bodyPr/>
-                    <a:lstStyle/>
-                    <a:p>
-                      <a:pPr>
-                        <a:defRPr sz="1200">
-                          <a:solidFill>
-                            <a:srgbClr val="E2E8F0"/>
-                          </a:solidFill>
-                        </a:defRPr>
-                      </a:pPr>
-                      <a:r>
-                        <a:t>取消</a:t>
-                      </a:r>
-                    </a:p>
-                  </a:txBody>
-                  <a:tcPr>
-                    <a:solidFill>
-                      <a:srgbClr val="1E293B"/>
-                    </a:solidFill>
-                  </a:tcPr>
-                </a:tc>
-                <a:tc>
-                  <a:txBody>
-                    <a:bodyPr/>
-                    <a:lstStyle/>
-                    <a:p>
-                      <a:pPr>
-                        <a:defRPr sz="1200">
-                          <a:solidFill>
-                            <a:srgbClr val="E2E8F0"/>
-                          </a:solidFill>
-                        </a:defRPr>
-                      </a:pPr>
-                      <a:r>
-                        <a:t>O（発注前のみ）</a:t>
-                      </a:r>
-                    </a:p>
-                  </a:txBody>
-                  <a:tcPr>
-                    <a:solidFill>
-                      <a:srgbClr val="1E293B"/>
-                    </a:solidFill>
-                  </a:tcPr>
-                </a:tc>
-                <a:tc>
-                  <a:txBody>
-                    <a:bodyPr/>
-                    <a:lstStyle/>
-                    <a:p>
-                      <a:pPr>
-                        <a:defRPr sz="1200">
-                          <a:solidFill>
-                            <a:srgbClr val="E2E8F0"/>
-                          </a:solidFill>
-                        </a:defRPr>
-                      </a:pPr>
-                      <a:r>
                         <a:t>-</a:t>
                       </a:r>
                     </a:p>
@@ -4779,107 +4778,13 @@
                         </a:defRPr>
                       </a:pPr>
                       <a:r>
-                        <a:t>O</a:t>
+                        <a:t>○</a:t>
                       </a:r>
                     </a:p>
                   </a:txBody>
                   <a:tcPr>
                     <a:solidFill>
                       <a:srgbClr val="1E293B"/>
-                    </a:solidFill>
-                  </a:tcPr>
-                </a:tc>
-              </a:tr>
-              <a:tr h="411480">
-                <a:tc>
-                  <a:txBody>
-                    <a:bodyPr/>
-                    <a:lstStyle/>
-                    <a:p>
-                      <a:pPr>
-                        <a:defRPr sz="1200">
-                          <a:solidFill>
-                            <a:srgbClr val="E2E8F0"/>
-                          </a:solidFill>
-                        </a:defRPr>
-                      </a:pPr>
-                      <a:r>
-                        <a:t>仕訳登録</a:t>
-                      </a:r>
-                    </a:p>
-                  </a:txBody>
-                  <a:tcPr>
-                    <a:solidFill>
-                      <a:srgbClr val="0F0F1A"/>
-                    </a:solidFill>
-                  </a:tcPr>
-                </a:tc>
-                <a:tc>
-                  <a:txBody>
-                    <a:bodyPr/>
-                    <a:lstStyle/>
-                    <a:p>
-                      <a:pPr>
-                        <a:defRPr sz="1200">
-                          <a:solidFill>
-                            <a:srgbClr val="E2E8F0"/>
-                          </a:solidFill>
-                        </a:defRPr>
-                      </a:pPr>
-                      <a:r>
-                        <a:t>-</a:t>
-                      </a:r>
-                    </a:p>
-                  </a:txBody>
-                  <a:tcPr>
-                    <a:solidFill>
-                      <a:srgbClr val="0F0F1A"/>
-                    </a:solidFill>
-                  </a:tcPr>
-                </a:tc>
-                <a:tc>
-                  <a:txBody>
-                    <a:bodyPr/>
-                    <a:lstStyle/>
-                    <a:p>
-                      <a:pPr>
-                        <a:defRPr sz="1200">
-                          <a:solidFill>
-                            <a:srgbClr val="E2E8F0"/>
-                          </a:solidFill>
-                        </a:defRPr>
-                      </a:pPr>
-                      <a:r>
-                        <a:t>-</a:t>
-                      </a:r>
-                    </a:p>
-                  </a:txBody>
-                  <a:tcPr>
-                    <a:solidFill>
-                      <a:srgbClr val="0F0F1A"/>
-                    </a:solidFill>
-                  </a:tcPr>
-                </a:tc>
-                <a:tc>
-                  <a:txBody>
-                    <a:bodyPr/>
-                    <a:lstStyle/>
-                    <a:p>
-                      <a:pPr>
-                        <a:defRPr sz="1200">
-                          <a:solidFill>
-                            <a:srgbClr val="E2E8F0"/>
-                          </a:solidFill>
-                        </a:defRPr>
-                      </a:pPr>
-                      <a:r>
-                        <a:t>O</a:t>
-                      </a:r>
-                    </a:p>
-                  </a:txBody>
-                  <a:tcPr>
-                    <a:solidFill>
-                      <a:srgbClr val="0F0F1A"/>
                     </a:solidFill>
                   </a:tcPr>
                 </a:tc>
@@ -6430,7 +6335,7 @@
               </a:defRPr>
             </a:pPr>
             <a:r>
-              <a:t>二段階承認（10万以上）/ 発注権限制御 / 購入済は証憑必須</a:t>
+              <a:t>部門長承認 / 高額品は用途・理由必須 / 購入済は証憑必須</a:t>
             </a:r>
           </a:p>
           <a:p>
@@ -11126,7 +11031,7 @@
                         </a:defRPr>
                       </a:pPr>
                       <a:r>
-                        <a:t>発注待ち・仕訳待ち処理</a:t>
+                        <a:t>証憑確認・仕訳待ち処理</a:t>
                       </a:r>
                     </a:p>
                   </a:txBody>
@@ -11729,11 +11634,11 @@
               </a:defRPr>
             </a:pPr>
             <a:r>
-              <a:t>Slack /purchase で申請</a:t>
+              <a:t>申請・発注・検収・証憑添付</a:t>
             </a:r>
             <a:br/>
             <a:r>
-              <a:t>カード決済・検収・証憑添付</a:t>
+              <a:t>全件自分で発注</a:t>
             </a:r>
           </a:p>
         </p:txBody>
@@ -12049,11 +11954,11 @@
               </a:defRPr>
             </a:pPr>
             <a:r>
-              <a:t>発注・仕訳・支払・統制</a:t>
+              <a:t>仕訳・照合・支払</a:t>
             </a:r>
             <a:br/>
             <a:r>
-              <a:t>Slack + Web</a:t>
+              <a:t>経理処理を専任</a:t>
             </a:r>
           </a:p>
         </p:txBody>
@@ -12210,7 +12115,7 @@
               </a:defRPr>
             </a:pPr>
             <a:r>
-              <a:t>通常フロー（カード 10万未満）</a:t>
+              <a:t>通常フロー（カード・請求書共通）</a:t>
             </a:r>
           </a:p>
         </p:txBody>
@@ -12893,7 +12798,7 @@
               </a:defRPr>
             </a:pPr>
             <a:r>
-              <a:t>高額フロー（10万以上）</a:t>
+              <a:t>購入済フロー（立替）</a:t>
             </a:r>
           </a:p>
         </p:txBody>
@@ -12906,14 +12811,14 @@
         </p:nvSpPr>
         <p:spPr>
           <a:xfrm>
-            <a:off x="883767" y="2926080"/>
+            <a:off x="1638147" y="2926080"/>
             <a:ext cx="1371600" cy="1005840"/>
           </a:xfrm>
           <a:prstGeom prst="roundRect">
             <a:avLst/>
           </a:prstGeom>
           <a:solidFill>
-            <a:srgbClr val="00D4FF"/>
+            <a:srgbClr val="EC4899"/>
           </a:solidFill>
           <a:ln>
             <a:noFill/>
@@ -12947,6 +12852,10 @@
             <a:r>
               <a:t>申請済</a:t>
             </a:r>
+            <a:br/>
+            <a:r>
+              <a:t>+証憑</a:t>
+            </a:r>
           </a:p>
         </p:txBody>
       </p:sp>
@@ -12958,7 +12867,7 @@
         </p:nvSpPr>
         <p:spPr>
           <a:xfrm>
-            <a:off x="2255367" y="3403600"/>
+            <a:off x="3009747" y="3403600"/>
             <a:ext cx="137160" cy="50800"/>
           </a:xfrm>
           <a:prstGeom prst="rect">
@@ -13001,7 +12910,7 @@
         </p:nvSpPr>
         <p:spPr>
           <a:xfrm>
-            <a:off x="2392527" y="2926080"/>
+            <a:off x="3146907" y="2926080"/>
             <a:ext cx="1371600" cy="1005840"/>
           </a:xfrm>
           <a:prstGeom prst="roundRect">
@@ -13040,10 +12949,6 @@
               </a:defRPr>
             </a:pPr>
             <a:r>
-              <a:t>部門長</a:t>
-            </a:r>
-            <a:br/>
-            <a:r>
               <a:t>承認済</a:t>
             </a:r>
           </a:p>
@@ -13057,7 +12962,7 @@
         </p:nvSpPr>
         <p:spPr>
           <a:xfrm>
-            <a:off x="3764127" y="3403600"/>
+            <a:off x="4518507" y="3403600"/>
             <a:ext cx="137160" cy="50800"/>
           </a:xfrm>
           <a:prstGeom prst="rect">
@@ -13100,14 +13005,14 @@
         </p:nvSpPr>
         <p:spPr>
           <a:xfrm>
-            <a:off x="3901287" y="2926080"/>
+            <a:off x="4655667" y="2926080"/>
             <a:ext cx="1371600" cy="1005840"/>
           </a:xfrm>
           <a:prstGeom prst="roundRect">
             <a:avLst/>
           </a:prstGeom>
           <a:solidFill>
-            <a:srgbClr val="EC4899"/>
+            <a:srgbClr val="10B981"/>
           </a:solidFill>
           <a:ln>
             <a:noFill/>
@@ -13139,11 +13044,11 @@
               </a:defRPr>
             </a:pPr>
             <a:r>
-              <a:t>管理本部</a:t>
+              <a:t>検収済</a:t>
             </a:r>
             <a:br/>
             <a:r>
-              <a:t>承認済</a:t>
+              <a:t>（即時）</a:t>
             </a:r>
           </a:p>
         </p:txBody>
@@ -13156,7 +13061,7 @@
         </p:nvSpPr>
         <p:spPr>
           <a:xfrm>
-            <a:off x="5272887" y="3403600"/>
+            <a:off x="6027267" y="3403600"/>
             <a:ext cx="137160" cy="50800"/>
           </a:xfrm>
           <a:prstGeom prst="rect">
@@ -13199,7 +13104,102 @@
         </p:nvSpPr>
         <p:spPr>
           <a:xfrm>
-            <a:off x="5410047" y="2926080"/>
+            <a:off x="6164427" y="2926080"/>
+            <a:ext cx="1371600" cy="1005840"/>
+          </a:xfrm>
+          <a:prstGeom prst="roundRect">
+            <a:avLst/>
+          </a:prstGeom>
+          <a:solidFill>
+            <a:srgbClr val="F59E0B"/>
+          </a:solidFill>
+          <a:ln>
+            <a:noFill/>
+          </a:ln>
+        </p:spPr>
+        <p:style>
+          <a:lnRef idx="1">
+            <a:schemeClr val="accent1"/>
+          </a:lnRef>
+          <a:fillRef idx="3">
+            <a:schemeClr val="accent1"/>
+          </a:fillRef>
+          <a:effectRef idx="2">
+            <a:schemeClr val="accent1"/>
+          </a:effectRef>
+          <a:fontRef idx="minor">
+            <a:schemeClr val="lt1"/>
+          </a:fontRef>
+        </p:style>
+        <p:txBody>
+          <a:bodyPr rtlCol="0" anchor="ctr" wrap="square"/>
+          <a:lstStyle/>
+          <a:p>
+            <a:pPr algn="ctr">
+              <a:defRPr sz="1300" b="1">
+                <a:solidFill>
+                  <a:srgbClr val="FFFFFF"/>
+                </a:solidFill>
+              </a:defRPr>
+            </a:pPr>
+            <a:r>
+              <a:t>証憑完了</a:t>
+            </a:r>
+          </a:p>
+        </p:txBody>
+      </p:sp>
+      <p:sp>
+        <p:nvSpPr>
+          <p:cNvPr id="10" name="Rectangle 9"/>
+          <p:cNvSpPr/>
+          <p:nvPr/>
+        </p:nvSpPr>
+        <p:spPr>
+          <a:xfrm>
+            <a:off x="7536027" y="3403600"/>
+            <a:ext cx="137160" cy="50800"/>
+          </a:xfrm>
+          <a:prstGeom prst="rect">
+            <a:avLst/>
+          </a:prstGeom>
+          <a:solidFill>
+            <a:srgbClr val="334055"/>
+          </a:solidFill>
+          <a:ln>
+            <a:noFill/>
+          </a:ln>
+        </p:spPr>
+        <p:style>
+          <a:lnRef idx="1">
+            <a:schemeClr val="accent1"/>
+          </a:lnRef>
+          <a:fillRef idx="3">
+            <a:schemeClr val="accent1"/>
+          </a:fillRef>
+          <a:effectRef idx="2">
+            <a:schemeClr val="accent1"/>
+          </a:effectRef>
+          <a:fontRef idx="minor">
+            <a:schemeClr val="lt1"/>
+          </a:fontRef>
+        </p:style>
+        <p:txBody>
+          <a:bodyPr rtlCol="0" anchor="ctr"/>
+          <a:lstStyle/>
+          <a:p>
+            <a:pPr algn="ctr"/>
+          </a:p>
+        </p:txBody>
+      </p:sp>
+      <p:sp>
+        <p:nvSpPr>
+          <p:cNvPr id="11" name="Rounded Rectangle 10"/>
+          <p:cNvSpPr/>
+          <p:nvPr/>
+        </p:nvSpPr>
+        <p:spPr>
+          <a:xfrm>
+            <a:off x="7673187" y="2926080"/>
             <a:ext cx="1371600" cy="1005840"/>
           </a:xfrm>
           <a:prstGeom prst="roundRect">
@@ -13238,20 +13238,20 @@
               </a:defRPr>
             </a:pPr>
             <a:r>
-              <a:t>発注済</a:t>
-            </a:r>
-          </a:p>
-        </p:txBody>
-      </p:sp>
-      <p:sp>
-        <p:nvSpPr>
-          <p:cNvPr id="10" name="Rectangle 9"/>
+              <a:t>計上済</a:t>
+            </a:r>
+          </a:p>
+        </p:txBody>
+      </p:sp>
+      <p:sp>
+        <p:nvSpPr>
+          <p:cNvPr id="12" name="Rectangle 11"/>
           <p:cNvSpPr/>
           <p:nvPr/>
         </p:nvSpPr>
         <p:spPr>
           <a:xfrm>
-            <a:off x="6781647" y="3403600"/>
+            <a:off x="9044787" y="3403600"/>
             <a:ext cx="137160" cy="50800"/>
           </a:xfrm>
           <a:prstGeom prst="rect">
@@ -13288,13 +13288,13 @@
       </p:sp>
       <p:sp>
         <p:nvSpPr>
-          <p:cNvPr id="11" name="Rounded Rectangle 10"/>
+          <p:cNvPr id="13" name="Rounded Rectangle 12"/>
           <p:cNvSpPr/>
           <p:nvPr/>
         </p:nvSpPr>
         <p:spPr>
           <a:xfrm>
-            <a:off x="6918807" y="2926080"/>
+            <a:off x="9181947" y="2926080"/>
             <a:ext cx="1371600" cy="1005840"/>
           </a:xfrm>
           <a:prstGeom prst="roundRect">
@@ -13333,197 +13333,7 @@
               </a:defRPr>
             </a:pPr>
             <a:r>
-              <a:t>検収済</a:t>
-            </a:r>
-          </a:p>
-        </p:txBody>
-      </p:sp>
-      <p:sp>
-        <p:nvSpPr>
-          <p:cNvPr id="12" name="Rectangle 11"/>
-          <p:cNvSpPr/>
-          <p:nvPr/>
-        </p:nvSpPr>
-        <p:spPr>
-          <a:xfrm>
-            <a:off x="8290407" y="3403600"/>
-            <a:ext cx="137160" cy="50800"/>
-          </a:xfrm>
-          <a:prstGeom prst="rect">
-            <a:avLst/>
-          </a:prstGeom>
-          <a:solidFill>
-            <a:srgbClr val="334055"/>
-          </a:solidFill>
-          <a:ln>
-            <a:noFill/>
-          </a:ln>
-        </p:spPr>
-        <p:style>
-          <a:lnRef idx="1">
-            <a:schemeClr val="accent1"/>
-          </a:lnRef>
-          <a:fillRef idx="3">
-            <a:schemeClr val="accent1"/>
-          </a:fillRef>
-          <a:effectRef idx="2">
-            <a:schemeClr val="accent1"/>
-          </a:effectRef>
-          <a:fontRef idx="minor">
-            <a:schemeClr val="lt1"/>
-          </a:fontRef>
-        </p:style>
-        <p:txBody>
-          <a:bodyPr rtlCol="0" anchor="ctr"/>
-          <a:lstStyle/>
-          <a:p>
-            <a:pPr algn="ctr"/>
-          </a:p>
-        </p:txBody>
-      </p:sp>
-      <p:sp>
-        <p:nvSpPr>
-          <p:cNvPr id="13" name="Rounded Rectangle 12"/>
-          <p:cNvSpPr/>
-          <p:nvPr/>
-        </p:nvSpPr>
-        <p:spPr>
-          <a:xfrm>
-            <a:off x="8427567" y="2926080"/>
-            <a:ext cx="1371600" cy="1005840"/>
-          </a:xfrm>
-          <a:prstGeom prst="roundRect">
-            <a:avLst/>
-          </a:prstGeom>
-          <a:solidFill>
-            <a:srgbClr val="F59E0B"/>
-          </a:solidFill>
-          <a:ln>
-            <a:noFill/>
-          </a:ln>
-        </p:spPr>
-        <p:style>
-          <a:lnRef idx="1">
-            <a:schemeClr val="accent1"/>
-          </a:lnRef>
-          <a:fillRef idx="3">
-            <a:schemeClr val="accent1"/>
-          </a:fillRef>
-          <a:effectRef idx="2">
-            <a:schemeClr val="accent1"/>
-          </a:effectRef>
-          <a:fontRef idx="minor">
-            <a:schemeClr val="lt1"/>
-          </a:fontRef>
-        </p:style>
-        <p:txBody>
-          <a:bodyPr rtlCol="0" anchor="ctr" wrap="square"/>
-          <a:lstStyle/>
-          <a:p>
-            <a:pPr algn="ctr">
-              <a:defRPr sz="1300" b="1">
-                <a:solidFill>
-                  <a:srgbClr val="FFFFFF"/>
-                </a:solidFill>
-              </a:defRPr>
-            </a:pPr>
-            <a:r>
-              <a:t>証憑完了</a:t>
-            </a:r>
-          </a:p>
-        </p:txBody>
-      </p:sp>
-      <p:sp>
-        <p:nvSpPr>
-          <p:cNvPr id="14" name="Rectangle 13"/>
-          <p:cNvSpPr/>
-          <p:nvPr/>
-        </p:nvSpPr>
-        <p:spPr>
-          <a:xfrm>
-            <a:off x="9799167" y="3403600"/>
-            <a:ext cx="137160" cy="50800"/>
-          </a:xfrm>
-          <a:prstGeom prst="rect">
-            <a:avLst/>
-          </a:prstGeom>
-          <a:solidFill>
-            <a:srgbClr val="334055"/>
-          </a:solidFill>
-          <a:ln>
-            <a:noFill/>
-          </a:ln>
-        </p:spPr>
-        <p:style>
-          <a:lnRef idx="1">
-            <a:schemeClr val="accent1"/>
-          </a:lnRef>
-          <a:fillRef idx="3">
-            <a:schemeClr val="accent1"/>
-          </a:fillRef>
-          <a:effectRef idx="2">
-            <a:schemeClr val="accent1"/>
-          </a:effectRef>
-          <a:fontRef idx="minor">
-            <a:schemeClr val="lt1"/>
-          </a:fontRef>
-        </p:style>
-        <p:txBody>
-          <a:bodyPr rtlCol="0" anchor="ctr"/>
-          <a:lstStyle/>
-          <a:p>
-            <a:pPr algn="ctr"/>
-          </a:p>
-        </p:txBody>
-      </p:sp>
-      <p:sp>
-        <p:nvSpPr>
-          <p:cNvPr id="15" name="Rounded Rectangle 14"/>
-          <p:cNvSpPr/>
-          <p:nvPr/>
-        </p:nvSpPr>
-        <p:spPr>
-          <a:xfrm>
-            <a:off x="9936327" y="2926080"/>
-            <a:ext cx="1371600" cy="1005840"/>
-          </a:xfrm>
-          <a:prstGeom prst="roundRect">
-            <a:avLst/>
-          </a:prstGeom>
-          <a:solidFill>
-            <a:srgbClr val="10B981"/>
-          </a:solidFill>
-          <a:ln>
-            <a:noFill/>
-          </a:ln>
-        </p:spPr>
-        <p:style>
-          <a:lnRef idx="1">
-            <a:schemeClr val="accent1"/>
-          </a:lnRef>
-          <a:fillRef idx="3">
-            <a:schemeClr val="accent1"/>
-          </a:fillRef>
-          <a:effectRef idx="2">
-            <a:schemeClr val="accent1"/>
-          </a:effectRef>
-          <a:fontRef idx="minor">
-            <a:schemeClr val="lt1"/>
-          </a:fontRef>
-        </p:style>
-        <p:txBody>
-          <a:bodyPr rtlCol="0" anchor="ctr" wrap="square"/>
-          <a:lstStyle/>
-          <a:p>
-            <a:pPr algn="ctr">
-              <a:defRPr sz="1300" b="1">
-                <a:solidFill>
-                  <a:srgbClr val="FFFFFF"/>
-                </a:solidFill>
-              </a:defRPr>
-            </a:pPr>
-            <a:r>
-              <a:t>計上済</a:t>
+              <a:t>支払済</a:t>
             </a:r>
           </a:p>
         </p:txBody>
@@ -13556,602 +13366,6 @@
       <p:grpSpPr/>
       <p:sp>
         <p:nvSpPr>
-          <p:cNvPr id="2" name="TextBox 1"/>
-          <p:cNvSpPr txBox="1"/>
-          <p:nvPr/>
-        </p:nvSpPr>
-        <p:spPr>
-          <a:xfrm>
-            <a:off x="1371600" y="640080"/>
-            <a:ext cx="9144000" cy="914400"/>
-          </a:xfrm>
-          <a:prstGeom prst="rect">
-            <a:avLst/>
-          </a:prstGeom>
-          <a:noFill/>
-        </p:spPr>
-        <p:txBody>
-          <a:bodyPr wrap="none">
-            <a:spAutoFit/>
-          </a:bodyPr>
-          <a:lstStyle/>
-          <a:p>
-            <a:pPr>
-              <a:defRPr sz="3200" b="1">
-                <a:solidFill>
-                  <a:srgbClr val="FFFFFF"/>
-                </a:solidFill>
-              </a:defRPr>
-            </a:pPr>
-            <a:r>
-              <a:t>購入済フロー（立替）</a:t>
-            </a:r>
-          </a:p>
-        </p:txBody>
-      </p:sp>
-      <p:sp>
-        <p:nvSpPr>
-          <p:cNvPr id="3" name="Rounded Rectangle 2"/>
-          <p:cNvSpPr/>
-          <p:nvPr/>
-        </p:nvSpPr>
-        <p:spPr>
-          <a:xfrm>
-            <a:off x="1638147" y="2926080"/>
-            <a:ext cx="1371600" cy="1005840"/>
-          </a:xfrm>
-          <a:prstGeom prst="roundRect">
-            <a:avLst/>
-          </a:prstGeom>
-          <a:solidFill>
-            <a:srgbClr val="EC4899"/>
-          </a:solidFill>
-          <a:ln>
-            <a:noFill/>
-          </a:ln>
-        </p:spPr>
-        <p:style>
-          <a:lnRef idx="1">
-            <a:schemeClr val="accent1"/>
-          </a:lnRef>
-          <a:fillRef idx="3">
-            <a:schemeClr val="accent1"/>
-          </a:fillRef>
-          <a:effectRef idx="2">
-            <a:schemeClr val="accent1"/>
-          </a:effectRef>
-          <a:fontRef idx="minor">
-            <a:schemeClr val="lt1"/>
-          </a:fontRef>
-        </p:style>
-        <p:txBody>
-          <a:bodyPr rtlCol="0" anchor="ctr" wrap="square"/>
-          <a:lstStyle/>
-          <a:p>
-            <a:pPr algn="ctr">
-              <a:defRPr sz="1300" b="1">
-                <a:solidFill>
-                  <a:srgbClr val="FFFFFF"/>
-                </a:solidFill>
-              </a:defRPr>
-            </a:pPr>
-            <a:r>
-              <a:t>申請済</a:t>
-            </a:r>
-            <a:br/>
-            <a:r>
-              <a:t>+証憑</a:t>
-            </a:r>
-          </a:p>
-        </p:txBody>
-      </p:sp>
-      <p:sp>
-        <p:nvSpPr>
-          <p:cNvPr id="4" name="Rectangle 3"/>
-          <p:cNvSpPr/>
-          <p:nvPr/>
-        </p:nvSpPr>
-        <p:spPr>
-          <a:xfrm>
-            <a:off x="3009747" y="3403600"/>
-            <a:ext cx="137160" cy="50800"/>
-          </a:xfrm>
-          <a:prstGeom prst="rect">
-            <a:avLst/>
-          </a:prstGeom>
-          <a:solidFill>
-            <a:srgbClr val="334055"/>
-          </a:solidFill>
-          <a:ln>
-            <a:noFill/>
-          </a:ln>
-        </p:spPr>
-        <p:style>
-          <a:lnRef idx="1">
-            <a:schemeClr val="accent1"/>
-          </a:lnRef>
-          <a:fillRef idx="3">
-            <a:schemeClr val="accent1"/>
-          </a:fillRef>
-          <a:effectRef idx="2">
-            <a:schemeClr val="accent1"/>
-          </a:effectRef>
-          <a:fontRef idx="minor">
-            <a:schemeClr val="lt1"/>
-          </a:fontRef>
-        </p:style>
-        <p:txBody>
-          <a:bodyPr rtlCol="0" anchor="ctr"/>
-          <a:lstStyle/>
-          <a:p>
-            <a:pPr algn="ctr"/>
-          </a:p>
-        </p:txBody>
-      </p:sp>
-      <p:sp>
-        <p:nvSpPr>
-          <p:cNvPr id="5" name="Rounded Rectangle 4"/>
-          <p:cNvSpPr/>
-          <p:nvPr/>
-        </p:nvSpPr>
-        <p:spPr>
-          <a:xfrm>
-            <a:off x="3146907" y="2926080"/>
-            <a:ext cx="1371600" cy="1005840"/>
-          </a:xfrm>
-          <a:prstGeom prst="roundRect">
-            <a:avLst/>
-          </a:prstGeom>
-          <a:solidFill>
-            <a:srgbClr val="7C3AED"/>
-          </a:solidFill>
-          <a:ln>
-            <a:noFill/>
-          </a:ln>
-        </p:spPr>
-        <p:style>
-          <a:lnRef idx="1">
-            <a:schemeClr val="accent1"/>
-          </a:lnRef>
-          <a:fillRef idx="3">
-            <a:schemeClr val="accent1"/>
-          </a:fillRef>
-          <a:effectRef idx="2">
-            <a:schemeClr val="accent1"/>
-          </a:effectRef>
-          <a:fontRef idx="minor">
-            <a:schemeClr val="lt1"/>
-          </a:fontRef>
-        </p:style>
-        <p:txBody>
-          <a:bodyPr rtlCol="0" anchor="ctr" wrap="square"/>
-          <a:lstStyle/>
-          <a:p>
-            <a:pPr algn="ctr">
-              <a:defRPr sz="1300" b="1">
-                <a:solidFill>
-                  <a:srgbClr val="FFFFFF"/>
-                </a:solidFill>
-              </a:defRPr>
-            </a:pPr>
-            <a:r>
-              <a:t>承認済</a:t>
-            </a:r>
-          </a:p>
-        </p:txBody>
-      </p:sp>
-      <p:sp>
-        <p:nvSpPr>
-          <p:cNvPr id="6" name="Rectangle 5"/>
-          <p:cNvSpPr/>
-          <p:nvPr/>
-        </p:nvSpPr>
-        <p:spPr>
-          <a:xfrm>
-            <a:off x="4518507" y="3403600"/>
-            <a:ext cx="137160" cy="50800"/>
-          </a:xfrm>
-          <a:prstGeom prst="rect">
-            <a:avLst/>
-          </a:prstGeom>
-          <a:solidFill>
-            <a:srgbClr val="334055"/>
-          </a:solidFill>
-          <a:ln>
-            <a:noFill/>
-          </a:ln>
-        </p:spPr>
-        <p:style>
-          <a:lnRef idx="1">
-            <a:schemeClr val="accent1"/>
-          </a:lnRef>
-          <a:fillRef idx="3">
-            <a:schemeClr val="accent1"/>
-          </a:fillRef>
-          <a:effectRef idx="2">
-            <a:schemeClr val="accent1"/>
-          </a:effectRef>
-          <a:fontRef idx="minor">
-            <a:schemeClr val="lt1"/>
-          </a:fontRef>
-        </p:style>
-        <p:txBody>
-          <a:bodyPr rtlCol="0" anchor="ctr"/>
-          <a:lstStyle/>
-          <a:p>
-            <a:pPr algn="ctr"/>
-          </a:p>
-        </p:txBody>
-      </p:sp>
-      <p:sp>
-        <p:nvSpPr>
-          <p:cNvPr id="7" name="Rounded Rectangle 6"/>
-          <p:cNvSpPr/>
-          <p:nvPr/>
-        </p:nvSpPr>
-        <p:spPr>
-          <a:xfrm>
-            <a:off x="4655667" y="2926080"/>
-            <a:ext cx="1371600" cy="1005840"/>
-          </a:xfrm>
-          <a:prstGeom prst="roundRect">
-            <a:avLst/>
-          </a:prstGeom>
-          <a:solidFill>
-            <a:srgbClr val="10B981"/>
-          </a:solidFill>
-          <a:ln>
-            <a:noFill/>
-          </a:ln>
-        </p:spPr>
-        <p:style>
-          <a:lnRef idx="1">
-            <a:schemeClr val="accent1"/>
-          </a:lnRef>
-          <a:fillRef idx="3">
-            <a:schemeClr val="accent1"/>
-          </a:fillRef>
-          <a:effectRef idx="2">
-            <a:schemeClr val="accent1"/>
-          </a:effectRef>
-          <a:fontRef idx="minor">
-            <a:schemeClr val="lt1"/>
-          </a:fontRef>
-        </p:style>
-        <p:txBody>
-          <a:bodyPr rtlCol="0" anchor="ctr" wrap="square"/>
-          <a:lstStyle/>
-          <a:p>
-            <a:pPr algn="ctr">
-              <a:defRPr sz="1300" b="1">
-                <a:solidFill>
-                  <a:srgbClr val="FFFFFF"/>
-                </a:solidFill>
-              </a:defRPr>
-            </a:pPr>
-            <a:r>
-              <a:t>検収済</a:t>
-            </a:r>
-            <a:br/>
-            <a:r>
-              <a:t>（即時）</a:t>
-            </a:r>
-          </a:p>
-        </p:txBody>
-      </p:sp>
-      <p:sp>
-        <p:nvSpPr>
-          <p:cNvPr id="8" name="Rectangle 7"/>
-          <p:cNvSpPr/>
-          <p:nvPr/>
-        </p:nvSpPr>
-        <p:spPr>
-          <a:xfrm>
-            <a:off x="6027267" y="3403600"/>
-            <a:ext cx="137160" cy="50800"/>
-          </a:xfrm>
-          <a:prstGeom prst="rect">
-            <a:avLst/>
-          </a:prstGeom>
-          <a:solidFill>
-            <a:srgbClr val="334055"/>
-          </a:solidFill>
-          <a:ln>
-            <a:noFill/>
-          </a:ln>
-        </p:spPr>
-        <p:style>
-          <a:lnRef idx="1">
-            <a:schemeClr val="accent1"/>
-          </a:lnRef>
-          <a:fillRef idx="3">
-            <a:schemeClr val="accent1"/>
-          </a:fillRef>
-          <a:effectRef idx="2">
-            <a:schemeClr val="accent1"/>
-          </a:effectRef>
-          <a:fontRef idx="minor">
-            <a:schemeClr val="lt1"/>
-          </a:fontRef>
-        </p:style>
-        <p:txBody>
-          <a:bodyPr rtlCol="0" anchor="ctr"/>
-          <a:lstStyle/>
-          <a:p>
-            <a:pPr algn="ctr"/>
-          </a:p>
-        </p:txBody>
-      </p:sp>
-      <p:sp>
-        <p:nvSpPr>
-          <p:cNvPr id="9" name="Rounded Rectangle 8"/>
-          <p:cNvSpPr/>
-          <p:nvPr/>
-        </p:nvSpPr>
-        <p:spPr>
-          <a:xfrm>
-            <a:off x="6164427" y="2926080"/>
-            <a:ext cx="1371600" cy="1005840"/>
-          </a:xfrm>
-          <a:prstGeom prst="roundRect">
-            <a:avLst/>
-          </a:prstGeom>
-          <a:solidFill>
-            <a:srgbClr val="F59E0B"/>
-          </a:solidFill>
-          <a:ln>
-            <a:noFill/>
-          </a:ln>
-        </p:spPr>
-        <p:style>
-          <a:lnRef idx="1">
-            <a:schemeClr val="accent1"/>
-          </a:lnRef>
-          <a:fillRef idx="3">
-            <a:schemeClr val="accent1"/>
-          </a:fillRef>
-          <a:effectRef idx="2">
-            <a:schemeClr val="accent1"/>
-          </a:effectRef>
-          <a:fontRef idx="minor">
-            <a:schemeClr val="lt1"/>
-          </a:fontRef>
-        </p:style>
-        <p:txBody>
-          <a:bodyPr rtlCol="0" anchor="ctr" wrap="square"/>
-          <a:lstStyle/>
-          <a:p>
-            <a:pPr algn="ctr">
-              <a:defRPr sz="1300" b="1">
-                <a:solidFill>
-                  <a:srgbClr val="FFFFFF"/>
-                </a:solidFill>
-              </a:defRPr>
-            </a:pPr>
-            <a:r>
-              <a:t>証憑完了</a:t>
-            </a:r>
-          </a:p>
-        </p:txBody>
-      </p:sp>
-      <p:sp>
-        <p:nvSpPr>
-          <p:cNvPr id="10" name="Rectangle 9"/>
-          <p:cNvSpPr/>
-          <p:nvPr/>
-        </p:nvSpPr>
-        <p:spPr>
-          <a:xfrm>
-            <a:off x="7536027" y="3403600"/>
-            <a:ext cx="137160" cy="50800"/>
-          </a:xfrm>
-          <a:prstGeom prst="rect">
-            <a:avLst/>
-          </a:prstGeom>
-          <a:solidFill>
-            <a:srgbClr val="334055"/>
-          </a:solidFill>
-          <a:ln>
-            <a:noFill/>
-          </a:ln>
-        </p:spPr>
-        <p:style>
-          <a:lnRef idx="1">
-            <a:schemeClr val="accent1"/>
-          </a:lnRef>
-          <a:fillRef idx="3">
-            <a:schemeClr val="accent1"/>
-          </a:fillRef>
-          <a:effectRef idx="2">
-            <a:schemeClr val="accent1"/>
-          </a:effectRef>
-          <a:fontRef idx="minor">
-            <a:schemeClr val="lt1"/>
-          </a:fontRef>
-        </p:style>
-        <p:txBody>
-          <a:bodyPr rtlCol="0" anchor="ctr"/>
-          <a:lstStyle/>
-          <a:p>
-            <a:pPr algn="ctr"/>
-          </a:p>
-        </p:txBody>
-      </p:sp>
-      <p:sp>
-        <p:nvSpPr>
-          <p:cNvPr id="11" name="Rounded Rectangle 10"/>
-          <p:cNvSpPr/>
-          <p:nvPr/>
-        </p:nvSpPr>
-        <p:spPr>
-          <a:xfrm>
-            <a:off x="7673187" y="2926080"/>
-            <a:ext cx="1371600" cy="1005840"/>
-          </a:xfrm>
-          <a:prstGeom prst="roundRect">
-            <a:avLst/>
-          </a:prstGeom>
-          <a:solidFill>
-            <a:srgbClr val="10B981"/>
-          </a:solidFill>
-          <a:ln>
-            <a:noFill/>
-          </a:ln>
-        </p:spPr>
-        <p:style>
-          <a:lnRef idx="1">
-            <a:schemeClr val="accent1"/>
-          </a:lnRef>
-          <a:fillRef idx="3">
-            <a:schemeClr val="accent1"/>
-          </a:fillRef>
-          <a:effectRef idx="2">
-            <a:schemeClr val="accent1"/>
-          </a:effectRef>
-          <a:fontRef idx="minor">
-            <a:schemeClr val="lt1"/>
-          </a:fontRef>
-        </p:style>
-        <p:txBody>
-          <a:bodyPr rtlCol="0" anchor="ctr" wrap="square"/>
-          <a:lstStyle/>
-          <a:p>
-            <a:pPr algn="ctr">
-              <a:defRPr sz="1300" b="1">
-                <a:solidFill>
-                  <a:srgbClr val="FFFFFF"/>
-                </a:solidFill>
-              </a:defRPr>
-            </a:pPr>
-            <a:r>
-              <a:t>計上済</a:t>
-            </a:r>
-          </a:p>
-        </p:txBody>
-      </p:sp>
-      <p:sp>
-        <p:nvSpPr>
-          <p:cNvPr id="12" name="Rectangle 11"/>
-          <p:cNvSpPr/>
-          <p:nvPr/>
-        </p:nvSpPr>
-        <p:spPr>
-          <a:xfrm>
-            <a:off x="9044787" y="3403600"/>
-            <a:ext cx="137160" cy="50800"/>
-          </a:xfrm>
-          <a:prstGeom prst="rect">
-            <a:avLst/>
-          </a:prstGeom>
-          <a:solidFill>
-            <a:srgbClr val="334055"/>
-          </a:solidFill>
-          <a:ln>
-            <a:noFill/>
-          </a:ln>
-        </p:spPr>
-        <p:style>
-          <a:lnRef idx="1">
-            <a:schemeClr val="accent1"/>
-          </a:lnRef>
-          <a:fillRef idx="3">
-            <a:schemeClr val="accent1"/>
-          </a:fillRef>
-          <a:effectRef idx="2">
-            <a:schemeClr val="accent1"/>
-          </a:effectRef>
-          <a:fontRef idx="minor">
-            <a:schemeClr val="lt1"/>
-          </a:fontRef>
-        </p:style>
-        <p:txBody>
-          <a:bodyPr rtlCol="0" anchor="ctr"/>
-          <a:lstStyle/>
-          <a:p>
-            <a:pPr algn="ctr"/>
-          </a:p>
-        </p:txBody>
-      </p:sp>
-      <p:sp>
-        <p:nvSpPr>
-          <p:cNvPr id="13" name="Rounded Rectangle 12"/>
-          <p:cNvSpPr/>
-          <p:nvPr/>
-        </p:nvSpPr>
-        <p:spPr>
-          <a:xfrm>
-            <a:off x="9181947" y="2926080"/>
-            <a:ext cx="1371600" cy="1005840"/>
-          </a:xfrm>
-          <a:prstGeom prst="roundRect">
-            <a:avLst/>
-          </a:prstGeom>
-          <a:solidFill>
-            <a:srgbClr val="10B981"/>
-          </a:solidFill>
-          <a:ln>
-            <a:noFill/>
-          </a:ln>
-        </p:spPr>
-        <p:style>
-          <a:lnRef idx="1">
-            <a:schemeClr val="accent1"/>
-          </a:lnRef>
-          <a:fillRef idx="3">
-            <a:schemeClr val="accent1"/>
-          </a:fillRef>
-          <a:effectRef idx="2">
-            <a:schemeClr val="accent1"/>
-          </a:effectRef>
-          <a:fontRef idx="minor">
-            <a:schemeClr val="lt1"/>
-          </a:fontRef>
-        </p:style>
-        <p:txBody>
-          <a:bodyPr rtlCol="0" anchor="ctr" wrap="square"/>
-          <a:lstStyle/>
-          <a:p>
-            <a:pPr algn="ctr">
-              <a:defRPr sz="1300" b="1">
-                <a:solidFill>
-                  <a:srgbClr val="FFFFFF"/>
-                </a:solidFill>
-              </a:defRPr>
-            </a:pPr>
-            <a:r>
-              <a:t>支払済</a:t>
-            </a:r>
-          </a:p>
-        </p:txBody>
-      </p:sp>
-    </p:spTree>
-  </p:cSld>
-  <p:clrMapOvr>
-    <a:masterClrMapping/>
-  </p:clrMapOvr>
-</p:sld>
-</file>
-
-<file path=ppt/slides/slide34.xml><?xml version="1.0" encoding="utf-8"?>
-<p:sld xmlns:a="http://schemas.openxmlformats.org/drawingml/2006/main" xmlns:p="http://schemas.openxmlformats.org/presentationml/2006/main" xmlns:r="http://schemas.openxmlformats.org/officeDocument/2006/relationships">
-  <p:cSld>
-    <p:bg>
-      <p:bgPr>
-        <a:solidFill>
-          <a:srgbClr val="0F0F1A"/>
-        </a:solidFill>
-        <a:effectLst/>
-      </p:bgPr>
-    </p:bg>
-    <p:spTree>
-      <p:nvGrpSpPr>
-        <p:cNvPr id="1" name=""/>
-        <p:cNvGrpSpPr/>
-        <p:nvPr/>
-      </p:nvGrpSpPr>
-      <p:grpSpPr/>
-      <p:sp>
-        <p:nvSpPr>
           <p:cNvPr id="2" name="Rectangle 1"/>
           <p:cNvSpPr/>
           <p:nvPr/>
@@ -14486,7 +13700,7 @@
               </a:defRPr>
             </a:pPr>
             <a:r>
-              <a:t>09:00 日次サマリ → 発注待ち処理 → 仕訳登録 → 週次で突合レポート</a:t>
+              <a:t>09:00 日次サマリ → 証憑確認 → 仕訳登録 → 週次で突合レポート</a:t>
             </a:r>
           </a:p>
         </p:txBody>
@@ -14643,7 +13857,7 @@
               </a:defRPr>
             </a:pPr>
             <a:r>
-              <a:t>パターンA: 少額カード（10万円未満）</a:t>
+              <a:t>パターンA: カード払い</a:t>
             </a:r>
           </a:p>
         </p:txBody>
@@ -15342,7 +14556,7 @@
               </a:defRPr>
             </a:pPr>
             <a:r>
-              <a:t>パターンB: 高額購入（10万円以上）</a:t>
+              <a:t>パターンB: 請求書払い</a:t>
             </a:r>
           </a:p>
         </p:txBody>
@@ -15592,11 +14806,11 @@
               </a:defRPr>
             </a:pPr>
             <a:r>
-              <a:t>管理本部</a:t>
+              <a:t>申請者</a:t>
             </a:r>
             <a:br/>
             <a:r>
-              <a:t>二段階承認</a:t>
+              <a:t>発注</a:t>
             </a:r>
           </a:p>
         </p:txBody>
@@ -15691,11 +14905,7 @@
               </a:defRPr>
             </a:pPr>
             <a:r>
-              <a:t>管理本部</a:t>
-            </a:r>
-            <a:br/>
-            <a:r>
-              <a:t>カード決済</a:t>
+              <a:t>検収完了</a:t>
             </a:r>
           </a:p>
         </p:txBody>
@@ -15790,7 +15000,11 @@
               </a:defRPr>
             </a:pPr>
             <a:r>
-              <a:t>検収</a:t>
+              <a:t>請求書</a:t>
+            </a:r>
+            <a:br/>
+            <a:r>
+              <a:t>提出</a:t>
             </a:r>
           </a:p>
         </p:txBody>
@@ -15885,7 +15099,11 @@
               </a:defRPr>
             </a:pPr>
             <a:r>
-              <a:t>証憑</a:t>
+              <a:t>管理本部</a:t>
+            </a:r>
+            <a:br/>
+            <a:r>
+              <a:t>支払処理</a:t>
             </a:r>
           </a:p>
         </p:txBody>
@@ -15980,7 +15198,7 @@
               </a:defRPr>
             </a:pPr>
             <a:r>
-              <a:t>仕訳</a:t>
+              <a:t>仕訳登録</a:t>
             </a:r>
           </a:p>
         </p:txBody>
@@ -16041,7 +15259,7 @@
               </a:defRPr>
             </a:pPr>
             <a:r>
-              <a:t>パターンC/D</a:t>
+              <a:t>パターンC: 購入済（立替精算）</a:t>
             </a:r>
           </a:p>
         </p:txBody>
@@ -16122,7 +15340,7 @@
               </a:defRPr>
             </a:pPr>
             <a:r>
-              <a:t>C: 請求書払い</a:t>
+              <a:t>緊急時のみ: すでに購入済みの場合</a:t>
             </a:r>
           </a:p>
           <a:p>
@@ -16137,7 +15355,7 @@
               </a:defRPr>
             </a:pPr>
             <a:r>
-              <a:t>金額に関わらず管理本部が発注書を送付</a:t>
+              <a:t>申請時に証憑添付が必須</a:t>
             </a:r>
           </a:p>
           <a:p>
@@ -16152,7 +15370,22 @@
               </a:defRPr>
             </a:pPr>
             <a:r>
-              <a:t>請求書到着 → 証憑として添付 → 仕訳 → 支払</a:t>
+              <a:t>承認→発注・検収スキップ→即「証憑完了」</a:t>
+            </a:r>
+          </a:p>
+          <a:p>
+            <a:pPr lvl="1">
+              <a:spcAft>
+                <a:spcPts val="400"/>
+              </a:spcAft>
+              <a:defRPr sz="1500">
+                <a:solidFill>
+                  <a:srgbClr val="94A3B8"/>
+                </a:solidFill>
+              </a:defRPr>
+            </a:pPr>
+            <a:r>
+              <a:t>MF経費経由で給与精算</a:t>
             </a:r>
           </a:p>
           <a:p>
@@ -16175,7 +15408,7 @@
               </a:defRPr>
             </a:pPr>
             <a:r>
-              <a:t>D: 購入済（立替・緊急時のみ）</a:t>
+              <a:t>提出方法（全パターン共通）:</a:t>
             </a:r>
           </a:p>
           <a:p>
@@ -16190,7 +15423,22 @@
               </a:defRPr>
             </a:pPr>
             <a:r>
-              <a:t>申請時に証憑添付が必須 / 承認→発注・検収スキップ→即「証憑待ち」</a:t>
+              <a:t>Slackスレッドにドラッグ&amp;ドロップ</a:t>
+            </a:r>
+          </a:p>
+          <a:p>
+            <a:pPr lvl="1">
+              <a:spcAft>
+                <a:spcPts val="400"/>
+              </a:spcAft>
+              <a:defRPr sz="1500">
+                <a:solidFill>
+                  <a:srgbClr val="94A3B8"/>
+                </a:solidFill>
+              </a:defRPr>
+            </a:pPr>
+            <a:r>
+              <a:t>マイページ（/purchase/my）からアップロード</a:t>
             </a:r>
           </a:p>
         </p:txBody>

--- a/docs/operational-guide.pptx
+++ b/docs/operational-guide.pptx
@@ -3353,9 +3353,9 @@
           <a:p>
             <a:pPr>
               <a:spcAft>
-                <a:spcPts val="400"/>
+                <a:spcPts val="600"/>
               </a:spcAft>
-              <a:defRPr sz="2000">
+              <a:defRPr sz="2400">
                 <a:solidFill>
                   <a:srgbClr val="E2E8F0"/>
                 </a:solidFill>
@@ -3368,9 +3368,9 @@
           <a:p>
             <a:pPr lvl="1">
               <a:spcAft>
-                <a:spcPts val="400"/>
+                <a:spcPts val="600"/>
               </a:spcAft>
-              <a:defRPr sz="1500">
+              <a:defRPr sz="1800">
                 <a:solidFill>
                   <a:srgbClr val="94A3B8"/>
                 </a:solidFill>
@@ -3383,17 +3383,17 @@
           <a:p>
             <a:pPr>
               <a:spcAft>
-                <a:spcPts val="400"/>
+                <a:spcPts val="600"/>
               </a:spcAft>
-              <a:defRPr sz="800"/>
+              <a:defRPr sz="1000"/>
             </a:pPr>
           </a:p>
           <a:p>
             <a:pPr>
               <a:spcAft>
-                <a:spcPts val="400"/>
+                <a:spcPts val="600"/>
               </a:spcAft>
-              <a:defRPr sz="2000">
+              <a:defRPr sz="2400">
                 <a:solidFill>
                   <a:srgbClr val="E2E8F0"/>
                 </a:solidFill>
@@ -3406,9 +3406,9 @@
           <a:p>
             <a:pPr lvl="1">
               <a:spcAft>
-                <a:spcPts val="400"/>
+                <a:spcPts val="600"/>
               </a:spcAft>
-              <a:defRPr sz="1500">
+              <a:defRPr sz="1800">
                 <a:solidFill>
                   <a:srgbClr val="94A3B8"/>
                 </a:solidFill>
@@ -3421,9 +3421,9 @@
           <a:p>
             <a:pPr lvl="1">
               <a:spcAft>
-                <a:spcPts val="400"/>
+                <a:spcPts val="600"/>
               </a:spcAft>
-              <a:defRPr sz="1500">
+              <a:defRPr sz="1800">
                 <a:solidFill>
                   <a:srgbClr val="94A3B8"/>
                 </a:solidFill>
@@ -3436,9 +3436,9 @@
           <a:p>
             <a:pPr lvl="1">
               <a:spcAft>
-                <a:spcPts val="400"/>
+                <a:spcPts val="600"/>
               </a:spcAft>
-              <a:defRPr sz="1500">
+              <a:defRPr sz="1800">
                 <a:solidFill>
                   <a:srgbClr val="94A3B8"/>
                 </a:solidFill>
@@ -3451,17 +3451,17 @@
           <a:p>
             <a:pPr>
               <a:spcAft>
-                <a:spcPts val="400"/>
+                <a:spcPts val="600"/>
               </a:spcAft>
-              <a:defRPr sz="800"/>
+              <a:defRPr sz="1000"/>
             </a:pPr>
           </a:p>
           <a:p>
             <a:pPr>
               <a:spcAft>
-                <a:spcPts val="400"/>
+                <a:spcPts val="600"/>
               </a:spcAft>
-              <a:defRPr sz="2000">
+              <a:defRPr sz="2400">
                 <a:solidFill>
                   <a:srgbClr val="E2E8F0"/>
                 </a:solidFill>
@@ -3474,9 +3474,9 @@
           <a:p>
             <a:pPr lvl="1">
               <a:spcAft>
-                <a:spcPts val="400"/>
+                <a:spcPts val="600"/>
               </a:spcAft>
-              <a:defRPr sz="1500">
+              <a:defRPr sz="1800">
                 <a:solidFill>
                   <a:srgbClr val="94A3B8"/>
                 </a:solidFill>
@@ -3489,9 +3489,9 @@
           <a:p>
             <a:pPr lvl="1">
               <a:spcAft>
-                <a:spcPts val="400"/>
+                <a:spcPts val="600"/>
               </a:spcAft>
-              <a:defRPr sz="1500">
+              <a:defRPr sz="1800">
                 <a:solidFill>
                   <a:srgbClr val="94A3B8"/>
                 </a:solidFill>
@@ -3804,7 +3804,7 @@
           <a:lstStyle/>
           <a:p>
             <a:pPr>
-              <a:defRPr sz="1600">
+              <a:defRPr sz="1800">
                 <a:solidFill>
                   <a:srgbClr val="E2E8F0"/>
                 </a:solidFill>
@@ -3964,7 +3964,7 @@
           <a:lstStyle/>
           <a:p>
             <a:pPr>
-              <a:defRPr sz="1600">
+              <a:defRPr sz="1800">
                 <a:solidFill>
                   <a:srgbClr val="E2E8F0"/>
                 </a:solidFill>
@@ -4124,7 +4124,7 @@
           <a:lstStyle/>
           <a:p>
             <a:pPr>
-              <a:defRPr sz="1600">
+              <a:defRPr sz="1800">
                 <a:solidFill>
                   <a:srgbClr val="E2E8F0"/>
                 </a:solidFill>
@@ -4232,7 +4232,7 @@
                     <a:lstStyle/>
                     <a:p>
                       <a:pPr>
-                        <a:defRPr sz="1300" b="1">
+                        <a:defRPr sz="1600" b="1">
                           <a:solidFill>
                             <a:srgbClr val="00D4FF"/>
                           </a:solidFill>
@@ -4255,7 +4255,7 @@
                     <a:lstStyle/>
                     <a:p>
                       <a:pPr>
-                        <a:defRPr sz="1300" b="1">
+                        <a:defRPr sz="1600" b="1">
                           <a:solidFill>
                             <a:srgbClr val="00D4FF"/>
                           </a:solidFill>
@@ -4278,7 +4278,7 @@
                     <a:lstStyle/>
                     <a:p>
                       <a:pPr>
-                        <a:defRPr sz="1300" b="1">
+                        <a:defRPr sz="1600" b="1">
                           <a:solidFill>
                             <a:srgbClr val="00D4FF"/>
                           </a:solidFill>
@@ -4301,7 +4301,7 @@
                     <a:lstStyle/>
                     <a:p>
                       <a:pPr>
-                        <a:defRPr sz="1300" b="1">
+                        <a:defRPr sz="1600" b="1">
                           <a:solidFill>
                             <a:srgbClr val="00D4FF"/>
                           </a:solidFill>
@@ -4326,7 +4326,7 @@
                     <a:lstStyle/>
                     <a:p>
                       <a:pPr>
-                        <a:defRPr sz="1200">
+                        <a:defRPr sz="1500">
                           <a:solidFill>
                             <a:srgbClr val="E2E8F0"/>
                           </a:solidFill>
@@ -4349,7 +4349,7 @@
                     <a:lstStyle/>
                     <a:p>
                       <a:pPr>
-                        <a:defRPr sz="1200">
+                        <a:defRPr sz="1500">
                           <a:solidFill>
                             <a:srgbClr val="E2E8F0"/>
                           </a:solidFill>
@@ -4372,7 +4372,7 @@
                     <a:lstStyle/>
                     <a:p>
                       <a:pPr>
-                        <a:defRPr sz="1200">
+                        <a:defRPr sz="1500">
                           <a:solidFill>
                             <a:srgbClr val="E2E8F0"/>
                           </a:solidFill>
@@ -4395,7 +4395,7 @@
                     <a:lstStyle/>
                     <a:p>
                       <a:pPr>
-                        <a:defRPr sz="1200">
+                        <a:defRPr sz="1500">
                           <a:solidFill>
                             <a:srgbClr val="E2E8F0"/>
                           </a:solidFill>
@@ -4420,7 +4420,7 @@
                     <a:lstStyle/>
                     <a:p>
                       <a:pPr>
-                        <a:defRPr sz="1200">
+                        <a:defRPr sz="1500">
                           <a:solidFill>
                             <a:srgbClr val="E2E8F0"/>
                           </a:solidFill>
@@ -4443,7 +4443,7 @@
                     <a:lstStyle/>
                     <a:p>
                       <a:pPr>
-                        <a:defRPr sz="1200">
+                        <a:defRPr sz="1500">
                           <a:solidFill>
                             <a:srgbClr val="E2E8F0"/>
                           </a:solidFill>
@@ -4466,7 +4466,7 @@
                     <a:lstStyle/>
                     <a:p>
                       <a:pPr>
-                        <a:defRPr sz="1200">
+                        <a:defRPr sz="1500">
                           <a:solidFill>
                             <a:srgbClr val="E2E8F0"/>
                           </a:solidFill>
@@ -4489,7 +4489,7 @@
                     <a:lstStyle/>
                     <a:p>
                       <a:pPr>
-                        <a:defRPr sz="1200">
+                        <a:defRPr sz="1500">
                           <a:solidFill>
                             <a:srgbClr val="E2E8F0"/>
                           </a:solidFill>
@@ -4514,7 +4514,7 @@
                     <a:lstStyle/>
                     <a:p>
                       <a:pPr>
-                        <a:defRPr sz="1200">
+                        <a:defRPr sz="1500">
                           <a:solidFill>
                             <a:srgbClr val="E2E8F0"/>
                           </a:solidFill>
@@ -4537,7 +4537,7 @@
                     <a:lstStyle/>
                     <a:p>
                       <a:pPr>
-                        <a:defRPr sz="1200">
+                        <a:defRPr sz="1500">
                           <a:solidFill>
                             <a:srgbClr val="E2E8F0"/>
                           </a:solidFill>
@@ -4560,7 +4560,7 @@
                     <a:lstStyle/>
                     <a:p>
                       <a:pPr>
-                        <a:defRPr sz="1200">
+                        <a:defRPr sz="1500">
                           <a:solidFill>
                             <a:srgbClr val="E2E8F0"/>
                           </a:solidFill>
@@ -4583,7 +4583,7 @@
                     <a:lstStyle/>
                     <a:p>
                       <a:pPr>
-                        <a:defRPr sz="1200">
+                        <a:defRPr sz="1500">
                           <a:solidFill>
                             <a:srgbClr val="E2E8F0"/>
                           </a:solidFill>
@@ -4608,7 +4608,7 @@
                     <a:lstStyle/>
                     <a:p>
                       <a:pPr>
-                        <a:defRPr sz="1200">
+                        <a:defRPr sz="1500">
                           <a:solidFill>
                             <a:srgbClr val="E2E8F0"/>
                           </a:solidFill>
@@ -4631,7 +4631,7 @@
                     <a:lstStyle/>
                     <a:p>
                       <a:pPr>
-                        <a:defRPr sz="1200">
+                        <a:defRPr sz="1500">
                           <a:solidFill>
                             <a:srgbClr val="E2E8F0"/>
                           </a:solidFill>
@@ -4654,7 +4654,7 @@
                     <a:lstStyle/>
                     <a:p>
                       <a:pPr>
-                        <a:defRPr sz="1200">
+                        <a:defRPr sz="1500">
                           <a:solidFill>
                             <a:srgbClr val="E2E8F0"/>
                           </a:solidFill>
@@ -4677,7 +4677,7 @@
                     <a:lstStyle/>
                     <a:p>
                       <a:pPr>
-                        <a:defRPr sz="1200">
+                        <a:defRPr sz="1500">
                           <a:solidFill>
                             <a:srgbClr val="E2E8F0"/>
                           </a:solidFill>
@@ -4702,7 +4702,7 @@
                     <a:lstStyle/>
                     <a:p>
                       <a:pPr>
-                        <a:defRPr sz="1200">
+                        <a:defRPr sz="1500">
                           <a:solidFill>
                             <a:srgbClr val="E2E8F0"/>
                           </a:solidFill>
@@ -4725,7 +4725,7 @@
                     <a:lstStyle/>
                     <a:p>
                       <a:pPr>
-                        <a:defRPr sz="1200">
+                        <a:defRPr sz="1500">
                           <a:solidFill>
                             <a:srgbClr val="E2E8F0"/>
                           </a:solidFill>
@@ -4748,7 +4748,7 @@
                     <a:lstStyle/>
                     <a:p>
                       <a:pPr>
-                        <a:defRPr sz="1200">
+                        <a:defRPr sz="1500">
                           <a:solidFill>
                             <a:srgbClr val="E2E8F0"/>
                           </a:solidFill>
@@ -4771,7 +4771,7 @@
                     <a:lstStyle/>
                     <a:p>
                       <a:pPr>
-                        <a:defRPr sz="1200">
+                        <a:defRPr sz="1500">
                           <a:solidFill>
                             <a:srgbClr val="E2E8F0"/>
                           </a:solidFill>
@@ -5098,7 +5098,7 @@
           <a:lstStyle/>
           <a:p>
             <a:pPr>
-              <a:defRPr sz="1600">
+              <a:defRPr sz="1800">
                 <a:solidFill>
                   <a:srgbClr val="E2E8F0"/>
                 </a:solidFill>
@@ -5258,7 +5258,7 @@
           <a:lstStyle/>
           <a:p>
             <a:pPr>
-              <a:defRPr sz="1600">
+              <a:defRPr sz="1800">
                 <a:solidFill>
                   <a:srgbClr val="E2E8F0"/>
                 </a:solidFill>
@@ -5418,7 +5418,7 @@
           <a:lstStyle/>
           <a:p>
             <a:pPr>
-              <a:defRPr sz="1600">
+              <a:defRPr sz="1800">
                 <a:solidFill>
                   <a:srgbClr val="E2E8F0"/>
                 </a:solidFill>
@@ -5526,7 +5526,7 @@
                     <a:lstStyle/>
                     <a:p>
                       <a:pPr>
-                        <a:defRPr sz="1300" b="1">
+                        <a:defRPr sz="1600" b="1">
                           <a:solidFill>
                             <a:srgbClr val="F59E0B"/>
                           </a:solidFill>
@@ -5549,7 +5549,7 @@
                     <a:lstStyle/>
                     <a:p>
                       <a:pPr>
-                        <a:defRPr sz="1300" b="1">
+                        <a:defRPr sz="1600" b="1">
                           <a:solidFill>
                             <a:srgbClr val="F59E0B"/>
                           </a:solidFill>
@@ -5572,7 +5572,7 @@
                     <a:lstStyle/>
                     <a:p>
                       <a:pPr>
-                        <a:defRPr sz="1300" b="1">
+                        <a:defRPr sz="1600" b="1">
                           <a:solidFill>
                             <a:srgbClr val="F59E0B"/>
                           </a:solidFill>
@@ -5595,7 +5595,7 @@
                     <a:lstStyle/>
                     <a:p>
                       <a:pPr>
-                        <a:defRPr sz="1300" b="1">
+                        <a:defRPr sz="1600" b="1">
                           <a:solidFill>
                             <a:srgbClr val="F59E0B"/>
                           </a:solidFill>
@@ -5620,7 +5620,7 @@
                     <a:lstStyle/>
                     <a:p>
                       <a:pPr>
-                        <a:defRPr sz="1200">
+                        <a:defRPr sz="1500">
                           <a:solidFill>
                             <a:srgbClr val="E2E8F0"/>
                           </a:solidFill>
@@ -5643,7 +5643,7 @@
                     <a:lstStyle/>
                     <a:p>
                       <a:pPr>
-                        <a:defRPr sz="1200">
+                        <a:defRPr sz="1500">
                           <a:solidFill>
                             <a:srgbClr val="E2E8F0"/>
                           </a:solidFill>
@@ -5666,7 +5666,7 @@
                     <a:lstStyle/>
                     <a:p>
                       <a:pPr>
-                        <a:defRPr sz="1200">
+                        <a:defRPr sz="1500">
                           <a:solidFill>
                             <a:srgbClr val="E2E8F0"/>
                           </a:solidFill>
@@ -5689,7 +5689,7 @@
                     <a:lstStyle/>
                     <a:p>
                       <a:pPr>
-                        <a:defRPr sz="1200">
+                        <a:defRPr sz="1500">
                           <a:solidFill>
                             <a:srgbClr val="E2E8F0"/>
                           </a:solidFill>
@@ -5714,7 +5714,7 @@
                     <a:lstStyle/>
                     <a:p>
                       <a:pPr>
-                        <a:defRPr sz="1200">
+                        <a:defRPr sz="1500">
                           <a:solidFill>
                             <a:srgbClr val="E2E8F0"/>
                           </a:solidFill>
@@ -5737,7 +5737,7 @@
                     <a:lstStyle/>
                     <a:p>
                       <a:pPr>
-                        <a:defRPr sz="1200">
+                        <a:defRPr sz="1500">
                           <a:solidFill>
                             <a:srgbClr val="E2E8F0"/>
                           </a:solidFill>
@@ -5760,7 +5760,7 @@
                     <a:lstStyle/>
                     <a:p>
                       <a:pPr>
-                        <a:defRPr sz="1200">
+                        <a:defRPr sz="1500">
                           <a:solidFill>
                             <a:srgbClr val="E2E8F0"/>
                           </a:solidFill>
@@ -5783,7 +5783,7 @@
                     <a:lstStyle/>
                     <a:p>
                       <a:pPr>
-                        <a:defRPr sz="1200">
+                        <a:defRPr sz="1500">
                           <a:solidFill>
                             <a:srgbClr val="E2E8F0"/>
                           </a:solidFill>
@@ -5808,7 +5808,7 @@
                     <a:lstStyle/>
                     <a:p>
                       <a:pPr>
-                        <a:defRPr sz="1200">
+                        <a:defRPr sz="1500">
                           <a:solidFill>
                             <a:srgbClr val="E2E8F0"/>
                           </a:solidFill>
@@ -5831,7 +5831,7 @@
                     <a:lstStyle/>
                     <a:p>
                       <a:pPr>
-                        <a:defRPr sz="1200">
+                        <a:defRPr sz="1500">
                           <a:solidFill>
                             <a:srgbClr val="E2E8F0"/>
                           </a:solidFill>
@@ -5854,7 +5854,7 @@
                     <a:lstStyle/>
                     <a:p>
                       <a:pPr>
-                        <a:defRPr sz="1200">
+                        <a:defRPr sz="1500">
                           <a:solidFill>
                             <a:srgbClr val="E2E8F0"/>
                           </a:solidFill>
@@ -5877,7 +5877,7 @@
                     <a:lstStyle/>
                     <a:p>
                       <a:pPr>
-                        <a:defRPr sz="1200">
+                        <a:defRPr sz="1500">
                           <a:solidFill>
                             <a:srgbClr val="E2E8F0"/>
                           </a:solidFill>
@@ -5902,7 +5902,7 @@
                     <a:lstStyle/>
                     <a:p>
                       <a:pPr>
-                        <a:defRPr sz="1200">
+                        <a:defRPr sz="1500">
                           <a:solidFill>
                             <a:srgbClr val="E2E8F0"/>
                           </a:solidFill>
@@ -5925,7 +5925,7 @@
                     <a:lstStyle/>
                     <a:p>
                       <a:pPr>
-                        <a:defRPr sz="1200">
+                        <a:defRPr sz="1500">
                           <a:solidFill>
                             <a:srgbClr val="E2E8F0"/>
                           </a:solidFill>
@@ -5948,7 +5948,7 @@
                     <a:lstStyle/>
                     <a:p>
                       <a:pPr>
-                        <a:defRPr sz="1200">
+                        <a:defRPr sz="1500">
                           <a:solidFill>
                             <a:srgbClr val="E2E8F0"/>
                           </a:solidFill>
@@ -5971,7 +5971,7 @@
                     <a:lstStyle/>
                     <a:p>
                       <a:pPr>
-                        <a:defRPr sz="1200">
+                        <a:defRPr sz="1500">
                           <a:solidFill>
                             <a:srgbClr val="E2E8F0"/>
                           </a:solidFill>
@@ -5996,7 +5996,7 @@
                     <a:lstStyle/>
                     <a:p>
                       <a:pPr>
-                        <a:defRPr sz="1200">
+                        <a:defRPr sz="1500">
                           <a:solidFill>
                             <a:srgbClr val="E2E8F0"/>
                           </a:solidFill>
@@ -6019,7 +6019,7 @@
                     <a:lstStyle/>
                     <a:p>
                       <a:pPr>
-                        <a:defRPr sz="1200">
+                        <a:defRPr sz="1500">
                           <a:solidFill>
                             <a:srgbClr val="E2E8F0"/>
                           </a:solidFill>
@@ -6042,7 +6042,7 @@
                     <a:lstStyle/>
                     <a:p>
                       <a:pPr>
-                        <a:defRPr sz="1200">
+                        <a:defRPr sz="1500">
                           <a:solidFill>
                             <a:srgbClr val="E2E8F0"/>
                           </a:solidFill>
@@ -6065,7 +6065,7 @@
                     <a:lstStyle/>
                     <a:p>
                       <a:pPr>
-                        <a:defRPr sz="1200">
+                        <a:defRPr sz="1500">
                           <a:solidFill>
                             <a:srgbClr val="E2E8F0"/>
                           </a:solidFill>
@@ -6311,9 +6311,9 @@
           <a:p>
             <a:pPr>
               <a:spcAft>
-                <a:spcPts val="400"/>
+                <a:spcPts val="600"/>
               </a:spcAft>
-              <a:defRPr sz="2000">
+              <a:defRPr sz="2400">
                 <a:solidFill>
                   <a:srgbClr val="E2E8F0"/>
                 </a:solidFill>
@@ -6326,9 +6326,9 @@
           <a:p>
             <a:pPr lvl="1">
               <a:spcAft>
-                <a:spcPts val="400"/>
+                <a:spcPts val="600"/>
               </a:spcAft>
-              <a:defRPr sz="1500">
+              <a:defRPr sz="1800">
                 <a:solidFill>
                   <a:srgbClr val="94A3B8"/>
                 </a:solidFill>
@@ -6341,17 +6341,17 @@
           <a:p>
             <a:pPr>
               <a:spcAft>
-                <a:spcPts val="400"/>
+                <a:spcPts val="600"/>
               </a:spcAft>
-              <a:defRPr sz="800"/>
+              <a:defRPr sz="1000"/>
             </a:pPr>
           </a:p>
           <a:p>
             <a:pPr>
               <a:spcAft>
-                <a:spcPts val="400"/>
+                <a:spcPts val="600"/>
               </a:spcAft>
-              <a:defRPr sz="2000">
+              <a:defRPr sz="2400">
                 <a:solidFill>
                   <a:srgbClr val="E2E8F0"/>
                 </a:solidFill>
@@ -6364,9 +6364,9 @@
           <a:p>
             <a:pPr lvl="1">
               <a:spcAft>
-                <a:spcPts val="400"/>
+                <a:spcPts val="600"/>
               </a:spcAft>
-              <a:defRPr sz="1500">
+              <a:defRPr sz="1800">
                 <a:solidFill>
                   <a:srgbClr val="94A3B8"/>
                 </a:solidFill>
@@ -6379,9 +6379,9 @@
           <a:p>
             <a:pPr lvl="1">
               <a:spcAft>
-                <a:spcPts val="400"/>
+                <a:spcPts val="600"/>
               </a:spcAft>
-              <a:defRPr sz="1500">
+              <a:defRPr sz="1800">
                 <a:solidFill>
                   <a:srgbClr val="94A3B8"/>
                 </a:solidFill>
@@ -6394,9 +6394,9 @@
           <a:p>
             <a:pPr lvl="1">
               <a:spcAft>
-                <a:spcPts val="400"/>
+                <a:spcPts val="600"/>
               </a:spcAft>
-              <a:defRPr sz="1500">
+              <a:defRPr sz="1800">
                 <a:solidFill>
                   <a:srgbClr val="94A3B8"/>
                 </a:solidFill>
@@ -6409,17 +6409,17 @@
           <a:p>
             <a:pPr>
               <a:spcAft>
-                <a:spcPts val="400"/>
+                <a:spcPts val="600"/>
               </a:spcAft>
-              <a:defRPr sz="800"/>
+              <a:defRPr sz="1000"/>
             </a:pPr>
           </a:p>
           <a:p>
             <a:pPr>
               <a:spcAft>
-                <a:spcPts val="400"/>
+                <a:spcPts val="600"/>
               </a:spcAft>
-              <a:defRPr sz="2000">
+              <a:defRPr sz="2400">
                 <a:solidFill>
                   <a:srgbClr val="E2E8F0"/>
                 </a:solidFill>
@@ -6432,9 +6432,9 @@
           <a:p>
             <a:pPr lvl="1">
               <a:spcAft>
-                <a:spcPts val="400"/>
+                <a:spcPts val="600"/>
               </a:spcAft>
-              <a:defRPr sz="1500">
+              <a:defRPr sz="1800">
                 <a:solidFill>
                   <a:srgbClr val="94A3B8"/>
                 </a:solidFill>
@@ -8086,9 +8086,9 @@
           <a:p>
             <a:pPr>
               <a:spcAft>
-                <a:spcPts val="400"/>
+                <a:spcPts val="600"/>
               </a:spcAft>
-              <a:defRPr sz="2000">
+              <a:defRPr sz="2400">
                 <a:solidFill>
                   <a:srgbClr val="E2E8F0"/>
                 </a:solidFill>
@@ -8101,9 +8101,9 @@
           <a:p>
             <a:pPr lvl="1">
               <a:spcAft>
-                <a:spcPts val="400"/>
+                <a:spcPts val="600"/>
               </a:spcAft>
-              <a:defRPr sz="1500">
+              <a:defRPr sz="1800">
                 <a:solidFill>
                   <a:srgbClr val="94A3B8"/>
                 </a:solidFill>
@@ -8116,17 +8116,17 @@
           <a:p>
             <a:pPr>
               <a:spcAft>
-                <a:spcPts val="400"/>
+                <a:spcPts val="600"/>
               </a:spcAft>
-              <a:defRPr sz="800"/>
+              <a:defRPr sz="1000"/>
             </a:pPr>
           </a:p>
           <a:p>
             <a:pPr>
               <a:spcAft>
-                <a:spcPts val="400"/>
+                <a:spcPts val="600"/>
               </a:spcAft>
-              <a:defRPr sz="2000">
+              <a:defRPr sz="2400">
                 <a:solidFill>
                   <a:srgbClr val="E2E8F0"/>
                 </a:solidFill>
@@ -8139,9 +8139,9 @@
           <a:p>
             <a:pPr lvl="1">
               <a:spcAft>
-                <a:spcPts val="400"/>
+                <a:spcPts val="600"/>
               </a:spcAft>
-              <a:defRPr sz="1500">
+              <a:defRPr sz="1800">
                 <a:solidFill>
                   <a:srgbClr val="94A3B8"/>
                 </a:solidFill>
@@ -8154,9 +8154,9 @@
           <a:p>
             <a:pPr lvl="1">
               <a:spcAft>
-                <a:spcPts val="400"/>
+                <a:spcPts val="600"/>
               </a:spcAft>
-              <a:defRPr sz="1500">
+              <a:defRPr sz="1800">
                 <a:solidFill>
                   <a:srgbClr val="94A3B8"/>
                 </a:solidFill>
@@ -8169,9 +8169,9 @@
           <a:p>
             <a:pPr lvl="1">
               <a:spcAft>
-                <a:spcPts val="400"/>
+                <a:spcPts val="600"/>
               </a:spcAft>
-              <a:defRPr sz="1500">
+              <a:defRPr sz="1800">
                 <a:solidFill>
                   <a:srgbClr val="94A3B8"/>
                 </a:solidFill>
@@ -8184,17 +8184,17 @@
           <a:p>
             <a:pPr>
               <a:spcAft>
-                <a:spcPts val="400"/>
+                <a:spcPts val="600"/>
               </a:spcAft>
-              <a:defRPr sz="800"/>
+              <a:defRPr sz="1000"/>
             </a:pPr>
           </a:p>
           <a:p>
             <a:pPr>
               <a:spcAft>
-                <a:spcPts val="400"/>
+                <a:spcPts val="600"/>
               </a:spcAft>
-              <a:defRPr sz="2000">
+              <a:defRPr sz="2400">
                 <a:solidFill>
                   <a:srgbClr val="E2E8F0"/>
                 </a:solidFill>
@@ -8207,9 +8207,9 @@
           <a:p>
             <a:pPr lvl="1">
               <a:spcAft>
-                <a:spcPts val="400"/>
+                <a:spcPts val="600"/>
               </a:spcAft>
-              <a:defRPr sz="1500">
+              <a:defRPr sz="1800">
                 <a:solidFill>
                   <a:srgbClr val="94A3B8"/>
                 </a:solidFill>
@@ -8574,7 +8574,7 @@
           <a:lstStyle/>
           <a:p>
             <a:pPr>
-              <a:defRPr sz="1200">
+              <a:defRPr sz="1400">
                 <a:solidFill>
                   <a:srgbClr val="94A3B8"/>
                 </a:solidFill>
@@ -8790,7 +8790,7 @@
           <a:lstStyle/>
           <a:p>
             <a:pPr>
-              <a:defRPr sz="1200">
+              <a:defRPr sz="1400">
                 <a:solidFill>
                   <a:srgbClr val="94A3B8"/>
                 </a:solidFill>
@@ -9006,7 +9006,7 @@
           <a:lstStyle/>
           <a:p>
             <a:pPr>
-              <a:defRPr sz="1200">
+              <a:defRPr sz="1400">
                 <a:solidFill>
                   <a:srgbClr val="94A3B8"/>
                 </a:solidFill>
@@ -9222,7 +9222,7 @@
           <a:lstStyle/>
           <a:p>
             <a:pPr>
-              <a:defRPr sz="1200">
+              <a:defRPr sz="1400">
                 <a:solidFill>
                   <a:srgbClr val="94A3B8"/>
                 </a:solidFill>
@@ -9438,7 +9438,7 @@
           <a:lstStyle/>
           <a:p>
             <a:pPr>
-              <a:defRPr sz="1200">
+              <a:defRPr sz="1400">
                 <a:solidFill>
                   <a:srgbClr val="94A3B8"/>
                 </a:solidFill>
@@ -9650,7 +9650,7 @@
           <a:lstStyle/>
           <a:p>
             <a:pPr>
-              <a:defRPr sz="1200">
+              <a:defRPr sz="1400">
                 <a:solidFill>
                   <a:srgbClr val="94A3B8"/>
                 </a:solidFill>
@@ -9761,7 +9761,7 @@
                     <a:lstStyle/>
                     <a:p>
                       <a:pPr>
-                        <a:defRPr sz="1300" b="1">
+                        <a:defRPr sz="1600" b="1">
                           <a:solidFill>
                             <a:srgbClr val="F59E0B"/>
                           </a:solidFill>
@@ -9784,7 +9784,7 @@
                     <a:lstStyle/>
                     <a:p>
                       <a:pPr>
-                        <a:defRPr sz="1300" b="1">
+                        <a:defRPr sz="1600" b="1">
                           <a:solidFill>
                             <a:srgbClr val="F59E0B"/>
                           </a:solidFill>
@@ -9807,7 +9807,7 @@
                     <a:lstStyle/>
                     <a:p>
                       <a:pPr>
-                        <a:defRPr sz="1300" b="1">
+                        <a:defRPr sz="1600" b="1">
                           <a:solidFill>
                             <a:srgbClr val="F59E0B"/>
                           </a:solidFill>
@@ -9832,7 +9832,7 @@
                     <a:lstStyle/>
                     <a:p>
                       <a:pPr>
-                        <a:defRPr sz="1200">
+                        <a:defRPr sz="1500">
                           <a:solidFill>
                             <a:srgbClr val="E2E8F0"/>
                           </a:solidFill>
@@ -9855,7 +9855,7 @@
                     <a:lstStyle/>
                     <a:p>
                       <a:pPr>
-                        <a:defRPr sz="1200">
+                        <a:defRPr sz="1500">
                           <a:solidFill>
                             <a:srgbClr val="E2E8F0"/>
                           </a:solidFill>
@@ -9878,7 +9878,7 @@
                     <a:lstStyle/>
                     <a:p>
                       <a:pPr>
-                        <a:defRPr sz="1200">
+                        <a:defRPr sz="1500">
                           <a:solidFill>
                             <a:srgbClr val="E2E8F0"/>
                           </a:solidFill>
@@ -9903,7 +9903,7 @@
                     <a:lstStyle/>
                     <a:p>
                       <a:pPr>
-                        <a:defRPr sz="1200">
+                        <a:defRPr sz="1500">
                           <a:solidFill>
                             <a:srgbClr val="E2E8F0"/>
                           </a:solidFill>
@@ -9926,7 +9926,7 @@
                     <a:lstStyle/>
                     <a:p>
                       <a:pPr>
-                        <a:defRPr sz="1200">
+                        <a:defRPr sz="1500">
                           <a:solidFill>
                             <a:srgbClr val="E2E8F0"/>
                           </a:solidFill>
@@ -9949,7 +9949,7 @@
                     <a:lstStyle/>
                     <a:p>
                       <a:pPr>
-                        <a:defRPr sz="1200">
+                        <a:defRPr sz="1500">
                           <a:solidFill>
                             <a:srgbClr val="E2E8F0"/>
                           </a:solidFill>
@@ -9974,7 +9974,7 @@
                     <a:lstStyle/>
                     <a:p>
                       <a:pPr>
-                        <a:defRPr sz="1200">
+                        <a:defRPr sz="1500">
                           <a:solidFill>
                             <a:srgbClr val="E2E8F0"/>
                           </a:solidFill>
@@ -9997,7 +9997,7 @@
                     <a:lstStyle/>
                     <a:p>
                       <a:pPr>
-                        <a:defRPr sz="1200">
+                        <a:defRPr sz="1500">
                           <a:solidFill>
                             <a:srgbClr val="E2E8F0"/>
                           </a:solidFill>
@@ -10020,7 +10020,7 @@
                     <a:lstStyle/>
                     <a:p>
                       <a:pPr>
-                        <a:defRPr sz="1200">
+                        <a:defRPr sz="1500">
                           <a:solidFill>
                             <a:srgbClr val="E2E8F0"/>
                           </a:solidFill>
@@ -10045,7 +10045,7 @@
                     <a:lstStyle/>
                     <a:p>
                       <a:pPr>
-                        <a:defRPr sz="1200">
+                        <a:defRPr sz="1500">
                           <a:solidFill>
                             <a:srgbClr val="E2E8F0"/>
                           </a:solidFill>
@@ -10068,7 +10068,7 @@
                     <a:lstStyle/>
                     <a:p>
                       <a:pPr>
-                        <a:defRPr sz="1200">
+                        <a:defRPr sz="1500">
                           <a:solidFill>
                             <a:srgbClr val="E2E8F0"/>
                           </a:solidFill>
@@ -10091,7 +10091,7 @@
                     <a:lstStyle/>
                     <a:p>
                       <a:pPr>
-                        <a:defRPr sz="1200">
+                        <a:defRPr sz="1500">
                           <a:solidFill>
                             <a:srgbClr val="E2E8F0"/>
                           </a:solidFill>
@@ -10241,9 +10241,9 @@
           <a:p>
             <a:pPr>
               <a:spcAft>
-                <a:spcPts val="400"/>
+                <a:spcPts val="600"/>
               </a:spcAft>
-              <a:defRPr sz="2000">
+              <a:defRPr sz="2400">
                 <a:solidFill>
                   <a:srgbClr val="E2E8F0"/>
                 </a:solidFill>
@@ -10256,9 +10256,9 @@
           <a:p>
             <a:pPr lvl="1">
               <a:spcAft>
-                <a:spcPts val="400"/>
+                <a:spcPts val="600"/>
               </a:spcAft>
-              <a:defRPr sz="1500">
+              <a:defRPr sz="1800">
                 <a:solidFill>
                   <a:srgbClr val="94A3B8"/>
                 </a:solidFill>
@@ -10271,9 +10271,9 @@
           <a:p>
             <a:pPr lvl="1">
               <a:spcAft>
-                <a:spcPts val="400"/>
+                <a:spcPts val="600"/>
               </a:spcAft>
-              <a:defRPr sz="1500">
+              <a:defRPr sz="1800">
                 <a:solidFill>
                   <a:srgbClr val="94A3B8"/>
                 </a:solidFill>
@@ -10286,17 +10286,17 @@
           <a:p>
             <a:pPr>
               <a:spcAft>
-                <a:spcPts val="400"/>
+                <a:spcPts val="600"/>
               </a:spcAft>
-              <a:defRPr sz="800"/>
+              <a:defRPr sz="1000"/>
             </a:pPr>
           </a:p>
           <a:p>
             <a:pPr>
               <a:spcAft>
-                <a:spcPts val="400"/>
+                <a:spcPts val="600"/>
               </a:spcAft>
-              <a:defRPr sz="2000">
+              <a:defRPr sz="2400">
                 <a:solidFill>
                   <a:srgbClr val="E2E8F0"/>
                 </a:solidFill>
@@ -10309,9 +10309,9 @@
           <a:p>
             <a:pPr lvl="1">
               <a:spcAft>
-                <a:spcPts val="400"/>
+                <a:spcPts val="600"/>
               </a:spcAft>
-              <a:defRPr sz="1500">
+              <a:defRPr sz="1800">
                 <a:solidFill>
                   <a:srgbClr val="94A3B8"/>
                 </a:solidFill>
@@ -10324,9 +10324,9 @@
           <a:p>
             <a:pPr lvl="1">
               <a:spcAft>
-                <a:spcPts val="400"/>
+                <a:spcPts val="600"/>
               </a:spcAft>
-              <a:defRPr sz="1500">
+              <a:defRPr sz="1800">
                 <a:solidFill>
                   <a:srgbClr val="94A3B8"/>
                 </a:solidFill>
@@ -10339,17 +10339,17 @@
           <a:p>
             <a:pPr>
               <a:spcAft>
-                <a:spcPts val="400"/>
+                <a:spcPts val="600"/>
               </a:spcAft>
-              <a:defRPr sz="800"/>
+              <a:defRPr sz="1000"/>
             </a:pPr>
           </a:p>
           <a:p>
             <a:pPr>
               <a:spcAft>
-                <a:spcPts val="400"/>
+                <a:spcPts val="600"/>
               </a:spcAft>
-              <a:defRPr sz="2000">
+              <a:defRPr sz="2400">
                 <a:solidFill>
                   <a:srgbClr val="E2E8F0"/>
                 </a:solidFill>
@@ -10362,9 +10362,9 @@
           <a:p>
             <a:pPr lvl="1">
               <a:spcAft>
-                <a:spcPts val="400"/>
+                <a:spcPts val="600"/>
               </a:spcAft>
-              <a:defRPr sz="1500">
+              <a:defRPr sz="1800">
                 <a:solidFill>
                   <a:srgbClr val="94A3B8"/>
                 </a:solidFill>
@@ -10377,9 +10377,9 @@
           <a:p>
             <a:pPr lvl="1">
               <a:spcAft>
-                <a:spcPts val="400"/>
+                <a:spcPts val="600"/>
               </a:spcAft>
-              <a:defRPr sz="1500">
+              <a:defRPr sz="1800">
                 <a:solidFill>
                   <a:srgbClr val="94A3B8"/>
                 </a:solidFill>
@@ -10579,7 +10579,7 @@
                     <a:lstStyle/>
                     <a:p>
                       <a:pPr>
-                        <a:defRPr sz="1300" b="1">
+                        <a:defRPr sz="1600" b="1">
                           <a:solidFill>
                             <a:srgbClr val="10B981"/>
                           </a:solidFill>
@@ -10602,7 +10602,7 @@
                     <a:lstStyle/>
                     <a:p>
                       <a:pPr>
-                        <a:defRPr sz="1300" b="1">
+                        <a:defRPr sz="1600" b="1">
                           <a:solidFill>
                             <a:srgbClr val="10B981"/>
                           </a:solidFill>
@@ -10625,7 +10625,7 @@
                     <a:lstStyle/>
                     <a:p>
                       <a:pPr>
-                        <a:defRPr sz="1300" b="1">
+                        <a:defRPr sz="1600" b="1">
                           <a:solidFill>
                             <a:srgbClr val="10B981"/>
                           </a:solidFill>
@@ -10648,7 +10648,7 @@
                     <a:lstStyle/>
                     <a:p>
                       <a:pPr>
-                        <a:defRPr sz="1300" b="1">
+                        <a:defRPr sz="1600" b="1">
                           <a:solidFill>
                             <a:srgbClr val="10B981"/>
                           </a:solidFill>
@@ -10673,7 +10673,7 @@
                     <a:lstStyle/>
                     <a:p>
                       <a:pPr>
-                        <a:defRPr sz="1200">
+                        <a:defRPr sz="1500">
                           <a:solidFill>
                             <a:srgbClr val="E2E8F0"/>
                           </a:solidFill>
@@ -10696,7 +10696,7 @@
                     <a:lstStyle/>
                     <a:p>
                       <a:pPr>
-                        <a:defRPr sz="1200">
+                        <a:defRPr sz="1500">
                           <a:solidFill>
                             <a:srgbClr val="E2E8F0"/>
                           </a:solidFill>
@@ -10719,7 +10719,7 @@
                     <a:lstStyle/>
                     <a:p>
                       <a:pPr>
-                        <a:defRPr sz="1200">
+                        <a:defRPr sz="1500">
                           <a:solidFill>
                             <a:srgbClr val="E2E8F0"/>
                           </a:solidFill>
@@ -10742,7 +10742,7 @@
                     <a:lstStyle/>
                     <a:p>
                       <a:pPr>
-                        <a:defRPr sz="1200">
+                        <a:defRPr sz="1500">
                           <a:solidFill>
                             <a:srgbClr val="E2E8F0"/>
                           </a:solidFill>
@@ -10767,7 +10767,7 @@
                     <a:lstStyle/>
                     <a:p>
                       <a:pPr>
-                        <a:defRPr sz="1200">
+                        <a:defRPr sz="1500">
                           <a:solidFill>
                             <a:srgbClr val="E2E8F0"/>
                           </a:solidFill>
@@ -10790,7 +10790,7 @@
                     <a:lstStyle/>
                     <a:p>
                       <a:pPr>
-                        <a:defRPr sz="1200">
+                        <a:defRPr sz="1500">
                           <a:solidFill>
                             <a:srgbClr val="E2E8F0"/>
                           </a:solidFill>
@@ -10813,7 +10813,7 @@
                     <a:lstStyle/>
                     <a:p>
                       <a:pPr>
-                        <a:defRPr sz="1200">
+                        <a:defRPr sz="1500">
                           <a:solidFill>
                             <a:srgbClr val="E2E8F0"/>
                           </a:solidFill>
@@ -10836,7 +10836,7 @@
                     <a:lstStyle/>
                     <a:p>
                       <a:pPr>
-                        <a:defRPr sz="1200">
+                        <a:defRPr sz="1500">
                           <a:solidFill>
                             <a:srgbClr val="E2E8F0"/>
                           </a:solidFill>
@@ -10861,7 +10861,7 @@
                     <a:lstStyle/>
                     <a:p>
                       <a:pPr>
-                        <a:defRPr sz="1200">
+                        <a:defRPr sz="1500">
                           <a:solidFill>
                             <a:srgbClr val="E2E8F0"/>
                           </a:solidFill>
@@ -10884,7 +10884,7 @@
                     <a:lstStyle/>
                     <a:p>
                       <a:pPr>
-                        <a:defRPr sz="1200">
+                        <a:defRPr sz="1500">
                           <a:solidFill>
                             <a:srgbClr val="E2E8F0"/>
                           </a:solidFill>
@@ -10907,7 +10907,7 @@
                     <a:lstStyle/>
                     <a:p>
                       <a:pPr>
-                        <a:defRPr sz="1200">
+                        <a:defRPr sz="1500">
                           <a:solidFill>
                             <a:srgbClr val="E2E8F0"/>
                           </a:solidFill>
@@ -10930,7 +10930,7 @@
                     <a:lstStyle/>
                     <a:p>
                       <a:pPr>
-                        <a:defRPr sz="1200">
+                        <a:defRPr sz="1500">
                           <a:solidFill>
                             <a:srgbClr val="E2E8F0"/>
                           </a:solidFill>
@@ -10955,7 +10955,7 @@
                     <a:lstStyle/>
                     <a:p>
                       <a:pPr>
-                        <a:defRPr sz="1200">
+                        <a:defRPr sz="1500">
                           <a:solidFill>
                             <a:srgbClr val="E2E8F0"/>
                           </a:solidFill>
@@ -10978,7 +10978,7 @@
                     <a:lstStyle/>
                     <a:p>
                       <a:pPr>
-                        <a:defRPr sz="1200">
+                        <a:defRPr sz="1500">
                           <a:solidFill>
                             <a:srgbClr val="E2E8F0"/>
                           </a:solidFill>
@@ -11001,7 +11001,7 @@
                     <a:lstStyle/>
                     <a:p>
                       <a:pPr>
-                        <a:defRPr sz="1200">
+                        <a:defRPr sz="1500">
                           <a:solidFill>
                             <a:srgbClr val="E2E8F0"/>
                           </a:solidFill>
@@ -11024,7 +11024,7 @@
                     <a:lstStyle/>
                     <a:p>
                       <a:pPr>
-                        <a:defRPr sz="1200">
+                        <a:defRPr sz="1500">
                           <a:solidFill>
                             <a:srgbClr val="E2E8F0"/>
                           </a:solidFill>
@@ -11049,7 +11049,7 @@
                     <a:lstStyle/>
                     <a:p>
                       <a:pPr>
-                        <a:defRPr sz="1200">
+                        <a:defRPr sz="1500">
                           <a:solidFill>
                             <a:srgbClr val="E2E8F0"/>
                           </a:solidFill>
@@ -11072,7 +11072,7 @@
                     <a:lstStyle/>
                     <a:p>
                       <a:pPr>
-                        <a:defRPr sz="1200">
+                        <a:defRPr sz="1500">
                           <a:solidFill>
                             <a:srgbClr val="E2E8F0"/>
                           </a:solidFill>
@@ -11095,7 +11095,7 @@
                     <a:lstStyle/>
                     <a:p>
                       <a:pPr>
-                        <a:defRPr sz="1200">
+                        <a:defRPr sz="1500">
                           <a:solidFill>
                             <a:srgbClr val="E2E8F0"/>
                           </a:solidFill>
@@ -11118,7 +11118,7 @@
                     <a:lstStyle/>
                     <a:p>
                       <a:pPr>
-                        <a:defRPr sz="1200">
+                        <a:defRPr sz="1500">
                           <a:solidFill>
                             <a:srgbClr val="E2E8F0"/>
                           </a:solidFill>
@@ -11143,7 +11143,7 @@
                     <a:lstStyle/>
                     <a:p>
                       <a:pPr>
-                        <a:defRPr sz="1200">
+                        <a:defRPr sz="1500">
                           <a:solidFill>
                             <a:srgbClr val="E2E8F0"/>
                           </a:solidFill>
@@ -11166,7 +11166,7 @@
                     <a:lstStyle/>
                     <a:p>
                       <a:pPr>
-                        <a:defRPr sz="1200">
+                        <a:defRPr sz="1500">
                           <a:solidFill>
                             <a:srgbClr val="E2E8F0"/>
                           </a:solidFill>
@@ -11189,7 +11189,7 @@
                     <a:lstStyle/>
                     <a:p>
                       <a:pPr>
-                        <a:defRPr sz="1200">
+                        <a:defRPr sz="1500">
                           <a:solidFill>
                             <a:srgbClr val="E2E8F0"/>
                           </a:solidFill>
@@ -11212,7 +11212,7 @@
                     <a:lstStyle/>
                     <a:p>
                       <a:pPr>
-                        <a:defRPr sz="1200">
+                        <a:defRPr sz="1500">
                           <a:solidFill>
                             <a:srgbClr val="E2E8F0"/>
                           </a:solidFill>
@@ -11237,7 +11237,7 @@
                     <a:lstStyle/>
                     <a:p>
                       <a:pPr>
-                        <a:defRPr sz="1200">
+                        <a:defRPr sz="1500">
                           <a:solidFill>
                             <a:srgbClr val="E2E8F0"/>
                           </a:solidFill>
@@ -11260,7 +11260,7 @@
                     <a:lstStyle/>
                     <a:p>
                       <a:pPr>
-                        <a:defRPr sz="1200">
+                        <a:defRPr sz="1500">
                           <a:solidFill>
                             <a:srgbClr val="E2E8F0"/>
                           </a:solidFill>
@@ -11283,7 +11283,7 @@
                     <a:lstStyle/>
                     <a:p>
                       <a:pPr>
-                        <a:defRPr sz="1200">
+                        <a:defRPr sz="1500">
                           <a:solidFill>
                             <a:srgbClr val="E2E8F0"/>
                           </a:solidFill>
@@ -11306,7 +11306,7 @@
                     <a:lstStyle/>
                     <a:p>
                       <a:pPr>
-                        <a:defRPr sz="1200">
+                        <a:defRPr sz="1500">
                           <a:solidFill>
                             <a:srgbClr val="E2E8F0"/>
                           </a:solidFill>
@@ -11331,7 +11331,7 @@
                     <a:lstStyle/>
                     <a:p>
                       <a:pPr>
-                        <a:defRPr sz="1200">
+                        <a:defRPr sz="1500">
                           <a:solidFill>
                             <a:srgbClr val="E2E8F0"/>
                           </a:solidFill>
@@ -11354,7 +11354,7 @@
                     <a:lstStyle/>
                     <a:p>
                       <a:pPr>
-                        <a:defRPr sz="1200">
+                        <a:defRPr sz="1500">
                           <a:solidFill>
                             <a:srgbClr val="E2E8F0"/>
                           </a:solidFill>
@@ -11377,7 +11377,7 @@
                     <a:lstStyle/>
                     <a:p>
                       <a:pPr>
-                        <a:defRPr sz="1200">
+                        <a:defRPr sz="1500">
                           <a:solidFill>
                             <a:srgbClr val="E2E8F0"/>
                           </a:solidFill>
@@ -11400,7 +11400,7 @@
                     <a:lstStyle/>
                     <a:p>
                       <a:pPr>
-                        <a:defRPr sz="1200">
+                        <a:defRPr sz="1500">
                           <a:solidFill>
                             <a:srgbClr val="E2E8F0"/>
                           </a:solidFill>
@@ -11627,7 +11627,7 @@
           <a:lstStyle/>
           <a:p>
             <a:pPr>
-              <a:defRPr sz="1600">
+              <a:defRPr sz="1800">
                 <a:solidFill>
                   <a:srgbClr val="E2E8F0"/>
                 </a:solidFill>
@@ -11787,7 +11787,7 @@
           <a:lstStyle/>
           <a:p>
             <a:pPr>
-              <a:defRPr sz="1600">
+              <a:defRPr sz="1800">
                 <a:solidFill>
                   <a:srgbClr val="E2E8F0"/>
                 </a:solidFill>
@@ -11947,7 +11947,7 @@
           <a:lstStyle/>
           <a:p>
             <a:pPr>
-              <a:defRPr sz="1600">
+              <a:defRPr sz="1800">
                 <a:solidFill>
                   <a:srgbClr val="E2E8F0"/>
                 </a:solidFill>
@@ -13585,9 +13585,9 @@
           <a:p>
             <a:pPr>
               <a:spcAft>
-                <a:spcPts val="400"/>
+                <a:spcPts val="600"/>
               </a:spcAft>
-              <a:defRPr sz="2000">
+              <a:defRPr sz="2400">
                 <a:solidFill>
                   <a:srgbClr val="E2E8F0"/>
                 </a:solidFill>
@@ -13600,9 +13600,9 @@
           <a:p>
             <a:pPr lvl="1">
               <a:spcAft>
-                <a:spcPts val="400"/>
+                <a:spcPts val="600"/>
               </a:spcAft>
-              <a:defRPr sz="1500">
+              <a:defRPr sz="1800">
                 <a:solidFill>
                   <a:srgbClr val="94A3B8"/>
                 </a:solidFill>
@@ -13615,9 +13615,9 @@
           <a:p>
             <a:pPr lvl="1">
               <a:spcAft>
-                <a:spcPts val="400"/>
+                <a:spcPts val="600"/>
               </a:spcAft>
-              <a:defRPr sz="1500">
+              <a:defRPr sz="1800">
                 <a:solidFill>
                   <a:srgbClr val="94A3B8"/>
                 </a:solidFill>
@@ -13630,17 +13630,17 @@
           <a:p>
             <a:pPr>
               <a:spcAft>
-                <a:spcPts val="400"/>
+                <a:spcPts val="600"/>
               </a:spcAft>
-              <a:defRPr sz="800"/>
+              <a:defRPr sz="1000"/>
             </a:pPr>
           </a:p>
           <a:p>
             <a:pPr>
               <a:spcAft>
-                <a:spcPts val="400"/>
+                <a:spcPts val="600"/>
               </a:spcAft>
-              <a:defRPr sz="2000">
+              <a:defRPr sz="2400">
                 <a:solidFill>
                   <a:srgbClr val="E2E8F0"/>
                 </a:solidFill>
@@ -13653,9 +13653,9 @@
           <a:p>
             <a:pPr lvl="1">
               <a:spcAft>
-                <a:spcPts val="400"/>
+                <a:spcPts val="600"/>
               </a:spcAft>
-              <a:defRPr sz="1500">
+              <a:defRPr sz="1800">
                 <a:solidFill>
                   <a:srgbClr val="94A3B8"/>
                 </a:solidFill>
@@ -13668,17 +13668,17 @@
           <a:p>
             <a:pPr>
               <a:spcAft>
-                <a:spcPts val="400"/>
+                <a:spcPts val="600"/>
               </a:spcAft>
-              <a:defRPr sz="800"/>
+              <a:defRPr sz="1000"/>
             </a:pPr>
           </a:p>
           <a:p>
             <a:pPr>
               <a:spcAft>
-                <a:spcPts val="400"/>
+                <a:spcPts val="600"/>
               </a:spcAft>
-              <a:defRPr sz="2000">
+              <a:defRPr sz="2400">
                 <a:solidFill>
                   <a:srgbClr val="E2E8F0"/>
                 </a:solidFill>
@@ -13691,9 +13691,9 @@
           <a:p>
             <a:pPr lvl="1">
               <a:spcAft>
-                <a:spcPts val="400"/>
+                <a:spcPts val="600"/>
               </a:spcAft>
-              <a:defRPr sz="1500">
+              <a:defRPr sz="1800">
                 <a:solidFill>
                   <a:srgbClr val="94A3B8"/>
                 </a:solidFill>
@@ -15331,9 +15331,9 @@
           <a:p>
             <a:pPr>
               <a:spcAft>
-                <a:spcPts val="400"/>
+                <a:spcPts val="600"/>
               </a:spcAft>
-              <a:defRPr sz="2000">
+              <a:defRPr sz="2400">
                 <a:solidFill>
                   <a:srgbClr val="E2E8F0"/>
                 </a:solidFill>
@@ -15346,9 +15346,9 @@
           <a:p>
             <a:pPr lvl="1">
               <a:spcAft>
-                <a:spcPts val="400"/>
+                <a:spcPts val="600"/>
               </a:spcAft>
-              <a:defRPr sz="1500">
+              <a:defRPr sz="1800">
                 <a:solidFill>
                   <a:srgbClr val="94A3B8"/>
                 </a:solidFill>
@@ -15361,9 +15361,9 @@
           <a:p>
             <a:pPr lvl="1">
               <a:spcAft>
-                <a:spcPts val="400"/>
+                <a:spcPts val="600"/>
               </a:spcAft>
-              <a:defRPr sz="1500">
+              <a:defRPr sz="1800">
                 <a:solidFill>
                   <a:srgbClr val="94A3B8"/>
                 </a:solidFill>
@@ -15376,9 +15376,9 @@
           <a:p>
             <a:pPr lvl="1">
               <a:spcAft>
-                <a:spcPts val="400"/>
+                <a:spcPts val="600"/>
               </a:spcAft>
-              <a:defRPr sz="1500">
+              <a:defRPr sz="1800">
                 <a:solidFill>
                   <a:srgbClr val="94A3B8"/>
                 </a:solidFill>
@@ -15391,17 +15391,17 @@
           <a:p>
             <a:pPr>
               <a:spcAft>
-                <a:spcPts val="400"/>
+                <a:spcPts val="600"/>
               </a:spcAft>
-              <a:defRPr sz="800"/>
+              <a:defRPr sz="1000"/>
             </a:pPr>
           </a:p>
           <a:p>
             <a:pPr>
               <a:spcAft>
-                <a:spcPts val="400"/>
+                <a:spcPts val="600"/>
               </a:spcAft>
-              <a:defRPr sz="2000">
+              <a:defRPr sz="2400">
                 <a:solidFill>
                   <a:srgbClr val="E2E8F0"/>
                 </a:solidFill>
@@ -15414,9 +15414,9 @@
           <a:p>
             <a:pPr lvl="1">
               <a:spcAft>
-                <a:spcPts val="400"/>
+                <a:spcPts val="600"/>
               </a:spcAft>
-              <a:defRPr sz="1500">
+              <a:defRPr sz="1800">
                 <a:solidFill>
                   <a:srgbClr val="94A3B8"/>
                 </a:solidFill>
@@ -15429,9 +15429,9 @@
           <a:p>
             <a:pPr lvl="1">
               <a:spcAft>
-                <a:spcPts val="400"/>
+                <a:spcPts val="600"/>
               </a:spcAft>
-              <a:defRPr sz="1500">
+              <a:defRPr sz="1800">
                 <a:solidFill>
                   <a:srgbClr val="94A3B8"/>
                 </a:solidFill>

--- a/docs/operational-guide.pptx
+++ b/docs/operational-guide.pptx
@@ -3220,7 +3220,7 @@
               </a:defRPr>
             </a:pPr>
             <a:r>
-              <a:t>next-procurement-poc  |  2026-03-28  v2</a:t>
+              <a:t>next-procurement-poc  |  2026-03-28  v3.0（Supabase版）</a:t>
             </a:r>
           </a:p>
         </p:txBody>
@@ -6948,7 +6948,7 @@
             </a:r>
             <a:br/>
             <a:r>
-              <a:t>(GAS)</a:t>
+              <a:t>(Supabase)</a:t>
             </a:r>
           </a:p>
         </p:txBody>
@@ -7306,7 +7306,7 @@
               </a:defRPr>
             </a:pPr>
             <a:r>
-              <a:t>/trip 出張申請フロー</a:t>
+              <a:t>出張予約完了申請フロー（事後承認）</a:t>
             </a:r>
           </a:p>
         </p:txBody>
@@ -10265,7 +10265,7 @@
               </a:defRPr>
             </a:pPr>
             <a:r>
-              <a:t>購買承認時に card_last4 × 金額 × 予想日付 を予測テーブルに自動記録</a:t>
+              <a:t>購買承認時に office_member_id × 金額 × 予想日付 を予測テーブルに自動記録</a:t>
             </a:r>
           </a:p>
           <a:p>
@@ -13452,7 +13452,7 @@
               </a:defRPr>
             </a:pPr>
             <a:r>
-              <a:t>全機能完成 → 内部テスト → 旧WFから一括移行</a:t>
+              <a:t>Supabase版 全機能実装完了</a:t>
             </a:r>
           </a:p>
         </p:txBody>
@@ -15385,7 +15385,8 @@
               </a:defRPr>
             </a:pPr>
             <a:r>
-              <a:t>MF経費経由で給与精算</a:t>
+              <a:t>MF経費経由で給与精算
+専用ページ: /expense/new から簡易申請可</a:t>
             </a:r>
           </a:p>
           <a:p>

--- a/docs/operational-guide.pptx
+++ b/docs/operational-guide.pptx
@@ -38,6 +38,9 @@
     <p:sldId id="286" r:id="rId37"/>
     <p:sldId id="287" r:id="rId38"/>
     <p:sldId id="288" r:id="rId39"/>
+    <p:sldId id="289" r:id="rId40"/>
+    <p:sldId id="290" r:id="rId41"/>
+    <p:sldId id="291" r:id="rId42"/>
   </p:sldIdLst>
   <p:sldSz cx="12191695" cy="6858000" type="screen4x3"/>
   <p:notesSz cx="6858000" cy="9144000"/>
@@ -3220,7 +3223,7 @@
               </a:defRPr>
             </a:pPr>
             <a:r>
-              <a:t>next-procurement-poc  |  2026-03-28  v3.0（Supabase版）</a:t>
+              <a:t>next-procurement-poc  |  2026-03-28  v3.1（監査ログ・AI検索対応）</a:t>
             </a:r>
           </a:p>
         </p:txBody>
@@ -13452,7 +13455,373 @@
               </a:defRPr>
             </a:pPr>
             <a:r>
-              <a:t>Supabase版 全機能実装完了</a:t>
+              <a:t>Supabase版 全機能+障害対策基盤 実装完了</a:t>
+            </a:r>
+          </a:p>
+        </p:txBody>
+      </p:sp>
+    </p:spTree>
+  </p:cSld>
+  <p:clrMapOvr>
+    <a:masterClrMapping/>
+  </p:clrMapOvr>
+</p:sld>
+</file>
+
+<file path=ppt/slides/slide34.xml><?xml version="1.0" encoding="utf-8"?>
+<p:sld xmlns:a="http://schemas.openxmlformats.org/drawingml/2006/main" xmlns:p="http://schemas.openxmlformats.org/presentationml/2006/main" xmlns:r="http://schemas.openxmlformats.org/officeDocument/2006/relationships">
+  <p:cSld>
+    <p:spTree>
+      <p:nvGrpSpPr>
+        <p:cNvPr id="1" name=""/>
+        <p:cNvGrpSpPr/>
+        <p:nvPr/>
+      </p:nvGrpSpPr>
+      <p:grpSpPr/>
+      <p:sp>
+        <p:nvSpPr>
+          <p:cNvPr id="2" name="Title 1"/>
+          <p:cNvSpPr>
+            <a:spLocks noGrp="1"/>
+          </p:cNvSpPr>
+          <p:nvPr>
+            <p:ph type="title"/>
+          </p:nvPr>
+        </p:nvSpPr>
+        <p:spPr/>
+        <p:txBody>
+          <a:bodyPr/>
+          <a:lstStyle/>
+          <a:p>
+            <a:r>
+              <a:rPr sz="2800" b="1"/>
+              <a:t>障害対策基盤（§13）</a:t>
+            </a:r>
+          </a:p>
+        </p:txBody>
+      </p:sp>
+      <p:sp>
+        <p:nvSpPr>
+          <p:cNvPr id="3" name="Content Placeholder 2"/>
+          <p:cNvSpPr>
+            <a:spLocks noGrp="1"/>
+          </p:cNvSpPr>
+          <p:nvPr>
+            <p:ph idx="1"/>
+          </p:nvPr>
+        </p:nvSpPr>
+        <p:spPr/>
+        <p:txBody>
+          <a:bodyPr/>
+          <a:lstStyle/>
+          <a:p>
+            <a:pPr>
+              <a:spcAft>
+                <a:spcPts val="600"/>
+              </a:spcAft>
+              <a:defRPr sz="1600"/>
+            </a:pPr>
+            <a:r>
+              <a:t>監査ログ（audit_log）: ステータス変更時に自動記録</a:t>
+            </a:r>
+          </a:p>
+          <a:p>
+            <a:pPr>
+              <a:spcAft>
+                <a:spcPts val="600"/>
+              </a:spcAft>
+              <a:defRPr sz="1600"/>
+            </a:pPr>
+            <a:r>
+              <a:t>リトライ+DLQ: 外部API失敗→指数バックオフ4回→OPS通知</a:t>
+            </a:r>
+          </a:p>
+          <a:p>
+            <a:pPr>
+              <a:spcAft>
+                <a:spcPts val="600"/>
+              </a:spcAft>
+              <a:defRPr sz="1600"/>
+            </a:pPr>
+            <a:r>
+              <a:t>日次DBバックアップ: JST 03:00 → Google Drive永久保持</a:t>
+            </a:r>
+          </a:p>
+          <a:p>
+            <a:pPr>
+              <a:spcAft>
+                <a:spcPts val="600"/>
+              </a:spcAft>
+              <a:defRPr sz="1600"/>
+            </a:pPr>
+            <a:r>
+              <a:t>科目修正学習ループ: 仕訳画面の修正→RAGコンテキスト注入</a:t>
+            </a:r>
+          </a:p>
+          <a:p>
+            <a:pPr>
+              <a:spcAft>
+                <a:spcPts val="600"/>
+              </a:spcAft>
+              <a:defRPr sz="1600"/>
+            </a:pPr>
+            <a:r>
+              <a:t>障害復旧手順書: docs/disaster-recovery.md</a:t>
+            </a:r>
+          </a:p>
+        </p:txBody>
+      </p:sp>
+    </p:spTree>
+  </p:cSld>
+  <p:clrMapOvr>
+    <a:masterClrMapping/>
+  </p:clrMapOvr>
+</p:sld>
+</file>
+
+<file path=ppt/slides/slide35.xml><?xml version="1.0" encoding="utf-8"?>
+<p:sld xmlns:a="http://schemas.openxmlformats.org/drawingml/2006/main" xmlns:p="http://schemas.openxmlformats.org/presentationml/2006/main" xmlns:r="http://schemas.openxmlformats.org/officeDocument/2006/relationships">
+  <p:cSld>
+    <p:spTree>
+      <p:nvGrpSpPr>
+        <p:cNvPr id="1" name=""/>
+        <p:cNvGrpSpPr/>
+        <p:nvPr/>
+      </p:nvGrpSpPr>
+      <p:grpSpPr/>
+      <p:sp>
+        <p:nvSpPr>
+          <p:cNvPr id="2" name="Title 1"/>
+          <p:cNvSpPr>
+            <a:spLocks noGrp="1"/>
+          </p:cNvSpPr>
+          <p:nvPr>
+            <p:ph type="title"/>
+          </p:nvPr>
+        </p:nvSpPr>
+        <p:spPr/>
+        <p:txBody>
+          <a:bodyPr/>
+          <a:lstStyle/>
+          <a:p>
+            <a:r>
+              <a:rPr sz="2800" b="1"/>
+              <a:t>Slack AI・全文検索（§14-15）</a:t>
+            </a:r>
+          </a:p>
+        </p:txBody>
+      </p:sp>
+      <p:sp>
+        <p:nvSpPr>
+          <p:cNvPr id="3" name="Content Placeholder 2"/>
+          <p:cNvSpPr>
+            <a:spLocks noGrp="1"/>
+          </p:cNvSpPr>
+          <p:nvPr>
+            <p:ph idx="1"/>
+          </p:nvPr>
+        </p:nvSpPr>
+        <p:spPr/>
+        <p:txBody>
+          <a:bodyPr/>
+          <a:lstStyle/>
+          <a:p>
+            <a:pPr>
+              <a:spcAft>
+                <a:spcPts val="600"/>
+              </a:spcAft>
+              <a:defRPr sz="1600"/>
+            </a:pPr>
+            <a:r>
+              <a:t>Slack AIアシスタント（/ask）: Claude Haiku + RAG応答</a:t>
+            </a:r>
+          </a:p>
+          <a:p>
+            <a:pPr>
+              <a:spcAft>
+                <a:spcPts val="600"/>
+              </a:spcAft>
+              <a:defRPr sz="1600"/>
+            </a:pPr>
+            <a:r>
+              <a:t>  → 購買・出張に関する質問をSlackから即座に回答</a:t>
+            </a:r>
+          </a:p>
+          <a:p>
+            <a:pPr>
+              <a:spcAft>
+                <a:spcPts val="600"/>
+              </a:spcAft>
+              <a:defRPr sz="1600"/>
+            </a:pPr>
+            <a:r>
+              <a:t>全文検索: マイページ検索バー（pg_trgm + GIN）</a:t>
+            </a:r>
+          </a:p>
+          <a:p>
+            <a:pPr>
+              <a:spcAft>
+                <a:spcPts val="600"/>
+              </a:spcAft>
+              <a:defRPr sz="1600"/>
+            </a:pPr>
+            <a:r>
+              <a:t>  → 品目名・仕入先名・備考を部分一致検索</a:t>
+            </a:r>
+          </a:p>
+          <a:p>
+            <a:pPr>
+              <a:spcAft>
+                <a:spcPts val="600"/>
+              </a:spcAft>
+              <a:defRPr sz="1600"/>
+            </a:pPr>
+            <a:r>
+              <a:t>環境変数: ANTHROPIC_API_KEY（AI用）</a:t>
+            </a:r>
+          </a:p>
+        </p:txBody>
+      </p:sp>
+    </p:spTree>
+  </p:cSld>
+  <p:clrMapOvr>
+    <a:masterClrMapping/>
+  </p:clrMapOvr>
+</p:sld>
+</file>
+
+<file path=ppt/slides/slide36.xml><?xml version="1.0" encoding="utf-8"?>
+<p:sld xmlns:a="http://schemas.openxmlformats.org/drawingml/2006/main" xmlns:p="http://schemas.openxmlformats.org/presentationml/2006/main" xmlns:r="http://schemas.openxmlformats.org/officeDocument/2006/relationships">
+  <p:cSld>
+    <p:spTree>
+      <p:nvGrpSpPr>
+        <p:cNvPr id="1" name=""/>
+        <p:cNvGrpSpPr/>
+        <p:nvPr/>
+      </p:nvGrpSpPr>
+      <p:grpSpPr/>
+      <p:sp>
+        <p:nvSpPr>
+          <p:cNvPr id="2" name="Title 1"/>
+          <p:cNvSpPr>
+            <a:spLocks noGrp="1"/>
+          </p:cNvSpPr>
+          <p:nvPr>
+            <p:ph type="title"/>
+          </p:nvPr>
+        </p:nvSpPr>
+        <p:spPr/>
+        <p:txBody>
+          <a:bodyPr/>
+          <a:lstStyle/>
+          <a:p>
+            <a:r>
+              <a:rPr sz="2800" b="1"/>
+              <a:t>定期実行一覧（8 cron jobs）</a:t>
+            </a:r>
+          </a:p>
+        </p:txBody>
+      </p:sp>
+      <p:sp>
+        <p:nvSpPr>
+          <p:cNvPr id="3" name="Content Placeholder 2"/>
+          <p:cNvSpPr>
+            <a:spLocks noGrp="1"/>
+          </p:cNvSpPr>
+          <p:nvPr>
+            <p:ph idx="1"/>
+          </p:nvPr>
+        </p:nvSpPr>
+        <p:spPr/>
+        <p:txBody>
+          <a:bodyPr/>
+          <a:lstStyle/>
+          <a:p>
+            <a:pPr>
+              <a:spcAft>
+                <a:spcPts val="600"/>
+              </a:spcAft>
+              <a:defRPr sz="1600"/>
+            </a:pPr>
+            <a:r>
+              <a:t>cache-warm: 4分毎 — Redisキャッシュ先読み</a:t>
+            </a:r>
+          </a:p>
+          <a:p>
+            <a:pPr>
+              <a:spcAft>
+                <a:spcPts val="600"/>
+              </a:spcAft>
+              <a:defRPr sz="1600"/>
+            </a:pPr>
+            <a:r>
+              <a:t>daily-summary: 09:00 — OPSチャンネルに日次サマリ</a:t>
+            </a:r>
+          </a:p>
+          <a:p>
+            <a:pPr>
+              <a:spcAft>
+                <a:spcPts val="600"/>
+              </a:spcAft>
+              <a:defRPr sz="1600"/>
+            </a:pPr>
+            <a:r>
+              <a:t>voucher-reminder: 10:00 — 証憑催促（Day1/3/7）</a:t>
+            </a:r>
+          </a:p>
+          <a:p>
+            <a:pPr>
+              <a:spcAft>
+                <a:spcPts val="600"/>
+              </a:spcAft>
+              <a:defRPr sz="1600"/>
+            </a:pPr>
+            <a:r>
+              <a:t>weekly-reminder: 月曜09:00 — 承認待ち週次まとめ</a:t>
+            </a:r>
+          </a:p>
+          <a:p>
+            <a:pPr>
+              <a:spcAft>
+                <a:spcPts val="600"/>
+              </a:spcAft>
+              <a:defRPr sz="1600"/>
+            </a:pPr>
+            <a:r>
+              <a:t>card-reconciliation: 月曜11:00 — カード明細照合</a:t>
+            </a:r>
+          </a:p>
+          <a:p>
+            <a:pPr>
+              <a:spcAft>
+                <a:spcPts val="600"/>
+              </a:spcAft>
+              <a:defRPr sz="1600"/>
+            </a:pPr>
+            <a:r>
+              <a:t>daily-variance: 12:00 — 金額乖離検知</a:t>
+            </a:r>
+          </a:p>
+          <a:p>
+            <a:pPr>
+              <a:spcAft>
+                <a:spcPts val="600"/>
+              </a:spcAft>
+              <a:defRPr sz="1600"/>
+            </a:pPr>
+            <a:r>
+              <a:t>trip-controls: 毎月1日10:00 — 出張統制レポート</a:t>
+            </a:r>
+          </a:p>
+          <a:p>
+            <a:pPr>
+              <a:spcAft>
+                <a:spcPts val="600"/>
+              </a:spcAft>
+              <a:defRPr sz="1600"/>
+            </a:pPr>
+            <a:r>
+              <a:t>db-backup: 03:00 — DBバックアップ→GDrive永久保持</a:t>
             </a:r>
           </a:p>
         </p:txBody>
